--- a/sunumlar/5-sinif-unite5-yapay-zeka-DETAYLI.pptx
+++ b/sunumlar/5-sinif-unite5-yapay-zeka-DETAYLI.pptx
@@ -522,6 +522,53 @@
               <a:t>Video: 'Yapay Zeka Nedir?' - Çocuklar için animasyonlu anlatım</a:t>
             </a:r>
           </a:p>
+          <a:p/>
+          <a:p>
+            <a:r>
+              <a:t>🎨 GÖRSELLEŞTİRME ÖNERİLERİ:</a:t>
+            </a:r>
+          </a:p>
+          <a:p/>
+          <a:p>
+            <a:r>
+              <a:t>📸 Görsel: LAN ve WAN ağ topolojileri şeması</a:t>
+            </a:r>
+          </a:p>
+          <a:p>
+            <a:r>
+              <a:t>🎬 Video: İnternet nasıl çalışır? Animasyonlu anlatım</a:t>
+            </a:r>
+          </a:p>
+          <a:p>
+            <a:r>
+              <a:t>💡 İnfografik: Ev ağı kurulumu diyagramı</a:t>
+            </a:r>
+          </a:p>
+          <a:p>
+            <a:r>
+              <a:t>📸 Görsel: Yapay zeka uygulama örnekleri (Siri, Alexa, ChatGPT)</a:t>
+            </a:r>
+          </a:p>
+          <a:p>
+            <a:r>
+              <a:t>🎬 Video: Yapay zeka nedir? Çocuklar için anlatım</a:t>
+            </a:r>
+          </a:p>
+          <a:p>
+            <a:r>
+              <a:t>💡 İnfografik: AI kullanım alanları</a:t>
+            </a:r>
+          </a:p>
+          <a:p>
+            <a:r>
+              <a:t>📸 Görsel: Makine öğrenmesi süreci diyagramı</a:t>
+            </a:r>
+          </a:p>
+          <a:p>
+            <a:r>
+              <a:t>🎬 Video: Makine öğrenmesi basit örneklerle</a:t>
+            </a:r>
+          </a:p>
         </p:txBody>
       </p:sp>
       <p:sp>
@@ -592,6 +639,73 @@
               <a:t>Gösterim: Bir AI görsel üretici aracı gösterin (öğretmen gözetiminde)</a:t>
             </a:r>
           </a:p>
+          <a:p/>
+          <a:p>
+            <a:r>
+              <a:t>🎨 GÖRSELLEŞTİRME ÖNERİLERİ:</a:t>
+            </a:r>
+          </a:p>
+          <a:p/>
+          <a:p>
+            <a:r>
+              <a:t>📸 Görsel: LAN ve WAN ağ topolojileri şeması</a:t>
+            </a:r>
+          </a:p>
+          <a:p>
+            <a:r>
+              <a:t>🎬 Video: İnternet nasıl çalışır? Animasyonlu anlatım</a:t>
+            </a:r>
+          </a:p>
+          <a:p>
+            <a:r>
+              <a:t>💡 İnfografik: Ev ağı kurulumu diyagramı</a:t>
+            </a:r>
+          </a:p>
+          <a:p>
+            <a:r>
+              <a:t>📸 Görsel: Yapay zeka uygulama örnekleri (Siri, Alexa, ChatGPT)</a:t>
+            </a:r>
+          </a:p>
+          <a:p>
+            <a:r>
+              <a:t>🎬 Video: Yapay zeka nedir? Çocuklar için anlatım</a:t>
+            </a:r>
+          </a:p>
+          <a:p>
+            <a:r>
+              <a:t>💡 İnfografik: AI kullanım alanları</a:t>
+            </a:r>
+          </a:p>
+          <a:p>
+            <a:r>
+              <a:t>📸 Görsel: Döngü mantığı şeması</a:t>
+            </a:r>
+          </a:p>
+          <a:p>
+            <a:r>
+              <a:t>🎬 Video: Döngüler Scratch'te nasıl kullanılır?</a:t>
+            </a:r>
+          </a:p>
+          <a:p>
+            <a:r>
+              <a:t>📸 Görsel: Koşullu yapılar akış diyagramı</a:t>
+            </a:r>
+          </a:p>
+          <a:p>
+            <a:r>
+              <a:t>🎬 Video: Koşullu ifadeler Scratch'te</a:t>
+            </a:r>
+          </a:p>
+          <a:p>
+            <a:r>
+              <a:t>📸 Görsel: Paint araçları ekran görüntüsü</a:t>
+            </a:r>
+          </a:p>
+          <a:p>
+            <a:r>
+              <a:t>🎬 Video: Paint ile basit çizim teknikleri</a:t>
+            </a:r>
+          </a:p>
         </p:txBody>
       </p:sp>
       <p:sp>
@@ -662,6 +776,78 @@
               <a:t>Tartışma: Yapay zeka daha çok iyi mi kötü mü? Faydaları ve zararları nedir?</a:t>
             </a:r>
           </a:p>
+          <a:p/>
+          <a:p>
+            <a:r>
+              <a:t>🎨 GÖRSELLEŞTİRME ÖNERİLERİ:</a:t>
+            </a:r>
+          </a:p>
+          <a:p/>
+          <a:p>
+            <a:r>
+              <a:t>📸 Görsel: LAN ve WAN ağ topolojileri şeması</a:t>
+            </a:r>
+          </a:p>
+          <a:p>
+            <a:r>
+              <a:t>🎬 Video: İnternet nasıl çalışır? Animasyonlu anlatım</a:t>
+            </a:r>
+          </a:p>
+          <a:p>
+            <a:r>
+              <a:t>💡 İnfografik: Ev ağı kurulumu diyagramı</a:t>
+            </a:r>
+          </a:p>
+          <a:p>
+            <a:r>
+              <a:t>📸 Görsel: KVKK logosu ve temel ilkeler</a:t>
+            </a:r>
+          </a:p>
+          <a:p>
+            <a:r>
+              <a:t>🎬 Video: Kişisel veri nedir? Animasyon</a:t>
+            </a:r>
+          </a:p>
+          <a:p>
+            <a:r>
+              <a:t>📸 Görsel: Yapay zeka uygulama örnekleri (Siri, Alexa, ChatGPT)</a:t>
+            </a:r>
+          </a:p>
+          <a:p>
+            <a:r>
+              <a:t>🎬 Video: Yapay zeka nedir? Çocuklar için anlatım</a:t>
+            </a:r>
+          </a:p>
+          <a:p>
+            <a:r>
+              <a:t>💡 İnfografik: AI kullanım alanları</a:t>
+            </a:r>
+          </a:p>
+          <a:p>
+            <a:r>
+              <a:t>📸 Görsel: Koşullu yapılar akış diyagramı</a:t>
+            </a:r>
+          </a:p>
+          <a:p>
+            <a:r>
+              <a:t>🎬 Video: Koşullu ifadeler Scratch'te</a:t>
+            </a:r>
+          </a:p>
+          <a:p>
+            <a:r>
+              <a:t>📸 Görsel: Farklı grafik türleri örnekleri</a:t>
+            </a:r>
+          </a:p>
+          <a:p>
+            <a:r>
+              <a:t>🎬 Video: Veri görselleştirme önemi</a:t>
+            </a:r>
+          </a:p>
+          <a:p>
+            <a:r>
+              <a:t>💡 İnfografik: Grafik türleri ve kullanım alanları</a:t>
+            </a:r>
+          </a:p>
         </p:txBody>
       </p:sp>
       <p:sp>
@@ -732,6 +918,98 @@
               <a:t>Etkinlik: Öğrenciler hangi mesleği yapmak ister? AI nasıl etkileyecek?</a:t>
             </a:r>
           </a:p>
+          <a:p/>
+          <a:p>
+            <a:r>
+              <a:t>🎨 GÖRSELLEŞTİRME ÖNERİLERİ:</a:t>
+            </a:r>
+          </a:p>
+          <a:p/>
+          <a:p>
+            <a:r>
+              <a:t>📸 Görsel: LAN ve WAN ağ topolojileri şeması</a:t>
+            </a:r>
+          </a:p>
+          <a:p>
+            <a:r>
+              <a:t>🎬 Video: İnternet nasıl çalışır? Animasyonlu anlatım</a:t>
+            </a:r>
+          </a:p>
+          <a:p>
+            <a:r>
+              <a:t>💡 İnfografik: Ev ağı kurulumu diyagramı</a:t>
+            </a:r>
+          </a:p>
+          <a:p>
+            <a:r>
+              <a:t>📸 Görsel: Yapay zeka uygulama örnekleri (Siri, Alexa, ChatGPT)</a:t>
+            </a:r>
+          </a:p>
+          <a:p>
+            <a:r>
+              <a:t>🎬 Video: Yapay zeka nedir? Çocuklar için anlatım</a:t>
+            </a:r>
+          </a:p>
+          <a:p>
+            <a:r>
+              <a:t>💡 İnfografik: AI kullanım alanları</a:t>
+            </a:r>
+          </a:p>
+          <a:p>
+            <a:r>
+              <a:t>📸 Görsel: Makine öğrenmesi süreci diyagramı</a:t>
+            </a:r>
+          </a:p>
+          <a:p>
+            <a:r>
+              <a:t>🎬 Video: Makine öğrenmesi basit örneklerle</a:t>
+            </a:r>
+          </a:p>
+          <a:p>
+            <a:r>
+              <a:t>📸 Görsel: Scratch arayüzü ekran görüntüsü</a:t>
+            </a:r>
+          </a:p>
+          <a:p>
+            <a:r>
+              <a:t>🎬 Video: Scratch ile basit oyun yapımı (3-5 dk)</a:t>
+            </a:r>
+          </a:p>
+          <a:p>
+            <a:r>
+              <a:t>💡 Ekran kaydı: Adım adım Scratch projesi</a:t>
+            </a:r>
+          </a:p>
+          <a:p>
+            <a:r>
+              <a:t>📸 Görsel: Farklı grafik türleri örnekleri</a:t>
+            </a:r>
+          </a:p>
+          <a:p>
+            <a:r>
+              <a:t>🎬 Video: Veri görselleştirme önemi</a:t>
+            </a:r>
+          </a:p>
+          <a:p>
+            <a:r>
+              <a:t>💡 İnfografik: Grafik türleri ve kullanım alanları</a:t>
+            </a:r>
+          </a:p>
+          <a:p>
+            <a:r>
+              <a:t>📸 Görsel: Temel tasarım prensipleri</a:t>
+            </a:r>
+          </a:p>
+          <a:p>
+            <a:r>
+              <a:t>🎬 Video: Dijital tasarıma giriş</a:t>
+            </a:r>
+          </a:p>
+          <a:p>
+            <a:r>
+              <a:t>💡 İnfografik: Renk teorisi ve uyumu</a:t>
+            </a:r>
+          </a:p>
         </p:txBody>
       </p:sp>
       <p:sp>
@@ -802,6 +1080,78 @@
               <a:t>Etkinlik: Google Teachable Machine ile sınıfta mini proje yapın</a:t>
             </a:r>
           </a:p>
+          <a:p/>
+          <a:p>
+            <a:r>
+              <a:t>🎨 GÖRSELLEŞTİRME ÖNERİLERİ:</a:t>
+            </a:r>
+          </a:p>
+          <a:p/>
+          <a:p>
+            <a:r>
+              <a:t>📸 Görsel: LAN ve WAN ağ topolojileri şeması</a:t>
+            </a:r>
+          </a:p>
+          <a:p>
+            <a:r>
+              <a:t>🎬 Video: İnternet nasıl çalışır? Animasyonlu anlatım</a:t>
+            </a:r>
+          </a:p>
+          <a:p>
+            <a:r>
+              <a:t>💡 İnfografik: Ev ağı kurulumu diyagramı</a:t>
+            </a:r>
+          </a:p>
+          <a:p>
+            <a:r>
+              <a:t>📸 Görsel: Yapay zeka uygulama örnekleri (Siri, Alexa, ChatGPT)</a:t>
+            </a:r>
+          </a:p>
+          <a:p>
+            <a:r>
+              <a:t>🎬 Video: Yapay zeka nedir? Çocuklar için anlatım</a:t>
+            </a:r>
+          </a:p>
+          <a:p>
+            <a:r>
+              <a:t>💡 İnfografik: AI kullanım alanları</a:t>
+            </a:r>
+          </a:p>
+          <a:p>
+            <a:r>
+              <a:t>📸 Görsel: Makine öğrenmesi süreci diyagramı</a:t>
+            </a:r>
+          </a:p>
+          <a:p>
+            <a:r>
+              <a:t>🎬 Video: Makine öğrenmesi basit örneklerle</a:t>
+            </a:r>
+          </a:p>
+          <a:p>
+            <a:r>
+              <a:t>📸 Görsel: Popüler chatbot örnekleri (Siri, Google Assistant)</a:t>
+            </a:r>
+          </a:p>
+          <a:p>
+            <a:r>
+              <a:t>🎬 Video: Chatbot nasıl çalışır?</a:t>
+            </a:r>
+          </a:p>
+          <a:p>
+            <a:r>
+              <a:t>📸 Görsel: Scratch arayüzü ekran görüntüsü</a:t>
+            </a:r>
+          </a:p>
+          <a:p>
+            <a:r>
+              <a:t>🎬 Video: Scratch ile basit oyun yapımı (3-5 dk)</a:t>
+            </a:r>
+          </a:p>
+          <a:p>
+            <a:r>
+              <a:t>💡 Ekran kaydı: Adım adım Scratch projesi</a:t>
+            </a:r>
+          </a:p>
         </p:txBody>
       </p:sp>
       <p:sp>
@@ -872,6 +1222,58 @@
               <a:t>Video: 'Geleceğin Dünyası ve AI' - Bilim kurgu ama gerçekçi tahminler</a:t>
             </a:r>
           </a:p>
+          <a:p/>
+          <a:p>
+            <a:r>
+              <a:t>🎨 GÖRSELLEŞTİRME ÖNERİLERİ:</a:t>
+            </a:r>
+          </a:p>
+          <a:p/>
+          <a:p>
+            <a:r>
+              <a:t>📸 Görsel: LAN ve WAN ağ topolojileri şeması</a:t>
+            </a:r>
+          </a:p>
+          <a:p>
+            <a:r>
+              <a:t>🎬 Video: İnternet nasıl çalışır? Animasyonlu anlatım</a:t>
+            </a:r>
+          </a:p>
+          <a:p>
+            <a:r>
+              <a:t>💡 İnfografik: Ev ağı kurulumu diyagramı</a:t>
+            </a:r>
+          </a:p>
+          <a:p>
+            <a:r>
+              <a:t>📸 Görsel: Yapay zeka uygulama örnekleri (Siri, Alexa, ChatGPT)</a:t>
+            </a:r>
+          </a:p>
+          <a:p>
+            <a:r>
+              <a:t>🎬 Video: Yapay zeka nedir? Çocuklar için anlatım</a:t>
+            </a:r>
+          </a:p>
+          <a:p>
+            <a:r>
+              <a:t>💡 İnfografik: AI kullanım alanları</a:t>
+            </a:r>
+          </a:p>
+          <a:p>
+            <a:r>
+              <a:t>📸 Görsel: Temel tasarım prensipleri</a:t>
+            </a:r>
+          </a:p>
+          <a:p>
+            <a:r>
+              <a:t>🎬 Video: Dijital tasarıma giriş</a:t>
+            </a:r>
+          </a:p>
+          <a:p>
+            <a:r>
+              <a:t>💡 İnfografik: Renk teorisi ve uyumu</a:t>
+            </a:r>
+          </a:p>
         </p:txBody>
       </p:sp>
       <p:sp>
@@ -942,6 +1344,78 @@
               <a:t>Quiz yapın</a:t>
             </a:r>
           </a:p>
+          <a:p/>
+          <a:p>
+            <a:r>
+              <a:t>🎨 GÖRSELLEŞTİRME ÖNERİLERİ:</a:t>
+            </a:r>
+          </a:p>
+          <a:p/>
+          <a:p>
+            <a:r>
+              <a:t>📸 Görsel: LAN ve WAN ağ topolojileri şeması</a:t>
+            </a:r>
+          </a:p>
+          <a:p>
+            <a:r>
+              <a:t>🎬 Video: İnternet nasıl çalışır? Animasyonlu anlatım</a:t>
+            </a:r>
+          </a:p>
+          <a:p>
+            <a:r>
+              <a:t>💡 İnfografik: Ev ağı kurulumu diyagramı</a:t>
+            </a:r>
+          </a:p>
+          <a:p>
+            <a:r>
+              <a:t>📸 Görsel: Yapay zeka uygulama örnekleri (Siri, Alexa, ChatGPT)</a:t>
+            </a:r>
+          </a:p>
+          <a:p>
+            <a:r>
+              <a:t>🎬 Video: Yapay zeka nedir? Çocuklar için anlatım</a:t>
+            </a:r>
+          </a:p>
+          <a:p>
+            <a:r>
+              <a:t>💡 İnfografik: AI kullanım alanları</a:t>
+            </a:r>
+          </a:p>
+          <a:p>
+            <a:r>
+              <a:t>📸 Görsel: Makine öğrenmesi süreci diyagramı</a:t>
+            </a:r>
+          </a:p>
+          <a:p>
+            <a:r>
+              <a:t>🎬 Video: Makine öğrenmesi basit örneklerle</a:t>
+            </a:r>
+          </a:p>
+          <a:p>
+            <a:r>
+              <a:t>📸 Görsel: Temel tasarım prensipleri</a:t>
+            </a:r>
+          </a:p>
+          <a:p>
+            <a:r>
+              <a:t>🎬 Video: Dijital tasarıma giriş</a:t>
+            </a:r>
+          </a:p>
+          <a:p>
+            <a:r>
+              <a:t>💡 İnfografik: Renk teorisi ve uyumu</a:t>
+            </a:r>
+          </a:p>
+          <a:p>
+            <a:r>
+              <a:t>📸 Görsel: Dijital çağ görselleri ve teknoloji örnekleri</a:t>
+            </a:r>
+          </a:p>
+          <a:p>
+            <a:r>
+              <a:t>🎬 Video: Bilişim teknolojilerinin tarihçesi</a:t>
+            </a:r>
+          </a:p>
         </p:txBody>
       </p:sp>
       <p:sp>
@@ -1012,6 +1486,245 @@
               <a:t>Tüm kaynakları önceden deneyin</a:t>
             </a:r>
           </a:p>
+          <a:p/>
+          <a:p>
+            <a:r>
+              <a:t>🎨 GÖRSELLEŞTİRME ÖNERİLERİ:</a:t>
+            </a:r>
+          </a:p>
+          <a:p/>
+          <a:p>
+            <a:r>
+              <a:t>📸 Görsel: Yapay zeka uygulama örnekleri (Siri, Alexa, ChatGPT)</a:t>
+            </a:r>
+          </a:p>
+          <a:p>
+            <a:r>
+              <a:t>🎬 Video: Yapay zeka nedir? Çocuklar için anlatım</a:t>
+            </a:r>
+          </a:p>
+          <a:p>
+            <a:r>
+              <a:t>💡 İnfografik: AI kullanım alanları</a:t>
+            </a:r>
+          </a:p>
+          <a:p>
+            <a:r>
+              <a:t>📸 Görsel: Makine öğrenmesi süreci diyagramı</a:t>
+            </a:r>
+          </a:p>
+          <a:p>
+            <a:r>
+              <a:t>🎬 Video: Makine öğrenmesi basit örneklerle</a:t>
+            </a:r>
+          </a:p>
+          <a:p>
+            <a:r>
+              <a:t>📸 Görsel: Popüler chatbot örnekleri (Siri, Google Assistant)</a:t>
+            </a:r>
+          </a:p>
+          <a:p>
+            <a:r>
+              <a:t>🎬 Video: Chatbot nasıl çalışır?</a:t>
+            </a:r>
+          </a:p>
+          <a:p>
+            <a:r>
+              <a:t>📸 Görsel: Scratch arayüzü ekran görüntüsü</a:t>
+            </a:r>
+          </a:p>
+          <a:p>
+            <a:r>
+              <a:t>🎬 Video: Scratch ile basit oyun yapımı (3-5 dk)</a:t>
+            </a:r>
+          </a:p>
+          <a:p>
+            <a:r>
+              <a:t>💡 Ekran kaydı: Adım adım Scratch projesi</a:t>
+            </a:r>
+          </a:p>
+          <a:p>
+            <a:r>
+              <a:t>📸 Görsel: Paint araçları ekran görüntüsü</a:t>
+            </a:r>
+          </a:p>
+          <a:p>
+            <a:r>
+              <a:t>🎬 Video: Paint ile basit çizim teknikleri</a:t>
+            </a:r>
+          </a:p>
+        </p:txBody>
+      </p:sp>
+      <p:sp>
+        <p:nvSpPr>
+          <p:cNvPr id="4" name="Slide Number Placeholder 3"/>
+          <p:cNvSpPr>
+            <a:spLocks noGrp="1"/>
+          </p:cNvSpPr>
+          <p:nvPr>
+            <p:ph type="sldNum" idx="5" sz="quarter"/>
+          </p:nvPr>
+        </p:nvSpPr>
+        <p:spPr/>
+      </p:sp>
+    </p:spTree>
+  </p:cSld>
+  <p:clrMapOvr>
+    <a:masterClrMapping/>
+  </p:clrMapOvr>
+</p:notes>
+</file>
+
+<file path=ppt/notesSlides/notesSlide17.xml><?xml version="1.0" encoding="utf-8"?>
+<p:notes xmlns:a="http://schemas.openxmlformats.org/drawingml/2006/main" xmlns:p="http://schemas.openxmlformats.org/presentationml/2006/main" xmlns:r="http://schemas.openxmlformats.org/officeDocument/2006/relationships">
+  <p:cSld>
+    <p:spTree>
+      <p:nvGrpSpPr>
+        <p:cNvPr id="1" name=""/>
+        <p:cNvGrpSpPr/>
+        <p:nvPr/>
+      </p:nvGrpSpPr>
+      <p:grpSpPr>
+        <a:xfrm>
+          <a:off x="0" y="0"/>
+          <a:ext cx="0" cy="0"/>
+          <a:chOff x="0" y="0"/>
+          <a:chExt cx="0" cy="0"/>
+        </a:xfrm>
+      </p:grpSpPr>
+      <p:sp>
+        <p:nvSpPr>
+          <p:cNvPr id="2" name="Slide Image Placeholder 1"/>
+          <p:cNvSpPr>
+            <a:spLocks noGrp="1"/>
+          </p:cNvSpPr>
+          <p:nvPr>
+            <p:ph type="sldImg" idx="2"/>
+          </p:nvPr>
+        </p:nvSpPr>
+        <p:spPr/>
+      </p:sp>
+      <p:sp>
+        <p:nvSpPr>
+          <p:cNvPr id="3" name="Notes Placeholder 2"/>
+          <p:cNvSpPr>
+            <a:spLocks noGrp="1"/>
+          </p:cNvSpPr>
+          <p:nvPr>
+            <p:ph type="body" idx="3" sz="quarter"/>
+          </p:nvPr>
+        </p:nvSpPr>
+        <p:spPr/>
+        <p:txBody>
+          <a:bodyPr/>
+          <a:lstStyle/>
+          <a:p>
+            <a:r>
+              <a:t>🎨 GÖRSELLEŞTİRME ÖNERİLERİ:</a:t>
+            </a:r>
+          </a:p>
+          <a:p/>
+          <a:p>
+            <a:r>
+              <a:t>📸 Görsel: Yapay zeka uygulama örnekleri (Siri, Alexa, ChatGPT)</a:t>
+            </a:r>
+          </a:p>
+          <a:p>
+            <a:r>
+              <a:t>🎬 Video: Yapay zeka nedir? Çocuklar için anlatım</a:t>
+            </a:r>
+          </a:p>
+          <a:p>
+            <a:r>
+              <a:t>💡 İnfografik: AI kullanım alanları</a:t>
+            </a:r>
+          </a:p>
+        </p:txBody>
+      </p:sp>
+      <p:sp>
+        <p:nvSpPr>
+          <p:cNvPr id="4" name="Slide Number Placeholder 3"/>
+          <p:cNvSpPr>
+            <a:spLocks noGrp="1"/>
+          </p:cNvSpPr>
+          <p:nvPr>
+            <p:ph type="sldNum" idx="5" sz="quarter"/>
+          </p:nvPr>
+        </p:nvSpPr>
+        <p:spPr/>
+      </p:sp>
+    </p:spTree>
+  </p:cSld>
+  <p:clrMapOvr>
+    <a:masterClrMapping/>
+  </p:clrMapOvr>
+</p:notes>
+</file>
+
+<file path=ppt/notesSlides/notesSlide18.xml><?xml version="1.0" encoding="utf-8"?>
+<p:notes xmlns:a="http://schemas.openxmlformats.org/drawingml/2006/main" xmlns:p="http://schemas.openxmlformats.org/presentationml/2006/main" xmlns:r="http://schemas.openxmlformats.org/officeDocument/2006/relationships">
+  <p:cSld>
+    <p:spTree>
+      <p:nvGrpSpPr>
+        <p:cNvPr id="1" name=""/>
+        <p:cNvGrpSpPr/>
+        <p:nvPr/>
+      </p:nvGrpSpPr>
+      <p:grpSpPr>
+        <a:xfrm>
+          <a:off x="0" y="0"/>
+          <a:ext cx="0" cy="0"/>
+          <a:chOff x="0" y="0"/>
+          <a:chExt cx="0" cy="0"/>
+        </a:xfrm>
+      </p:grpSpPr>
+      <p:sp>
+        <p:nvSpPr>
+          <p:cNvPr id="2" name="Slide Image Placeholder 1"/>
+          <p:cNvSpPr>
+            <a:spLocks noGrp="1"/>
+          </p:cNvSpPr>
+          <p:nvPr>
+            <p:ph type="sldImg" idx="2"/>
+          </p:nvPr>
+        </p:nvSpPr>
+        <p:spPr/>
+      </p:sp>
+      <p:sp>
+        <p:nvSpPr>
+          <p:cNvPr id="3" name="Notes Placeholder 2"/>
+          <p:cNvSpPr>
+            <a:spLocks noGrp="1"/>
+          </p:cNvSpPr>
+          <p:nvPr>
+            <p:ph type="body" idx="3" sz="quarter"/>
+          </p:nvPr>
+        </p:nvSpPr>
+        <p:spPr/>
+        <p:txBody>
+          <a:bodyPr/>
+          <a:lstStyle/>
+          <a:p>
+            <a:r>
+              <a:t>🎨 GÖRSELLEŞTİRME ÖNERİLERİ:</a:t>
+            </a:r>
+          </a:p>
+          <a:p/>
+          <a:p>
+            <a:r>
+              <a:t>📸 Görsel: Yapay zeka uygulama örnekleri (Siri, Alexa, ChatGPT)</a:t>
+            </a:r>
+          </a:p>
+          <a:p>
+            <a:r>
+              <a:t>🎬 Video: Yapay zeka nedir? Çocuklar için anlatım</a:t>
+            </a:r>
+          </a:p>
+          <a:p>
+            <a:r>
+              <a:t>💡 İnfografik: AI kullanım alanları</a:t>
+            </a:r>
+          </a:p>
         </p:txBody>
       </p:sp>
       <p:sp>
@@ -1082,6 +1795,68 @@
               <a:t>Tartışma: Robot ve yapay zeka arasındaki fark nedir? Robot fiziksel, AI yazılımdır.</a:t>
             </a:r>
           </a:p>
+          <a:p/>
+          <a:p>
+            <a:r>
+              <a:t>🎨 GÖRSELLEŞTİRME ÖNERİLERİ:</a:t>
+            </a:r>
+          </a:p>
+          <a:p/>
+          <a:p>
+            <a:r>
+              <a:t>📸 Görsel: LAN ve WAN ağ topolojileri şeması</a:t>
+            </a:r>
+          </a:p>
+          <a:p>
+            <a:r>
+              <a:t>🎬 Video: İnternet nasıl çalışır? Animasyonlu anlatım</a:t>
+            </a:r>
+          </a:p>
+          <a:p>
+            <a:r>
+              <a:t>💡 İnfografik: Ev ağı kurulumu diyagramı</a:t>
+            </a:r>
+          </a:p>
+          <a:p>
+            <a:r>
+              <a:t>📸 Görsel: Yapay zeka uygulama örnekleri (Siri, Alexa, ChatGPT)</a:t>
+            </a:r>
+          </a:p>
+          <a:p>
+            <a:r>
+              <a:t>🎬 Video: Yapay zeka nedir? Çocuklar için anlatım</a:t>
+            </a:r>
+          </a:p>
+          <a:p>
+            <a:r>
+              <a:t>💡 İnfografik: AI kullanım alanları</a:t>
+            </a:r>
+          </a:p>
+          <a:p>
+            <a:r>
+              <a:t>📸 Görsel: Koşullu yapılar akış diyagramı</a:t>
+            </a:r>
+          </a:p>
+          <a:p>
+            <a:r>
+              <a:t>🎬 Video: Koşullu ifadeler Scratch'te</a:t>
+            </a:r>
+          </a:p>
+          <a:p>
+            <a:r>
+              <a:t>📸 Görsel: Farklı grafik türleri örnekleri</a:t>
+            </a:r>
+          </a:p>
+          <a:p>
+            <a:r>
+              <a:t>🎬 Video: Veri görselleştirme önemi</a:t>
+            </a:r>
+          </a:p>
+          <a:p>
+            <a:r>
+              <a:t>💡 İnfografik: Grafik türleri ve kullanım alanları</a:t>
+            </a:r>
+          </a:p>
         </p:txBody>
       </p:sp>
       <p:sp>
@@ -1152,6 +1927,73 @@
               <a:t>Video: 'Yapay Zekanın Tarihi' - Kısa animasyon</a:t>
             </a:r>
           </a:p>
+          <a:p/>
+          <a:p>
+            <a:r>
+              <a:t>🎨 GÖRSELLEŞTİRME ÖNERİLERİ:</a:t>
+            </a:r>
+          </a:p>
+          <a:p/>
+          <a:p>
+            <a:r>
+              <a:t>📸 Görsel: CPU, RAM ve anakart fotoğrafları</a:t>
+            </a:r>
+          </a:p>
+          <a:p>
+            <a:r>
+              <a:t>🎬 Video: Bilgisayar donanımı tanıtım videosu (1-2 dk)</a:t>
+            </a:r>
+          </a:p>
+          <a:p>
+            <a:r>
+              <a:t>💡 İnfografik: Bilgisayar bileşenleri şeması</a:t>
+            </a:r>
+          </a:p>
+          <a:p>
+            <a:r>
+              <a:t>📸 Görsel: LAN ve WAN ağ topolojileri şeması</a:t>
+            </a:r>
+          </a:p>
+          <a:p>
+            <a:r>
+              <a:t>🎬 Video: İnternet nasıl çalışır? Animasyonlu anlatım</a:t>
+            </a:r>
+          </a:p>
+          <a:p>
+            <a:r>
+              <a:t>💡 İnfografik: Ev ağı kurulumu diyagramı</a:t>
+            </a:r>
+          </a:p>
+          <a:p>
+            <a:r>
+              <a:t>📸 Görsel: Yapay zeka uygulama örnekleri (Siri, Alexa, ChatGPT)</a:t>
+            </a:r>
+          </a:p>
+          <a:p>
+            <a:r>
+              <a:t>🎬 Video: Yapay zeka nedir? Çocuklar için anlatım</a:t>
+            </a:r>
+          </a:p>
+          <a:p>
+            <a:r>
+              <a:t>💡 İnfografik: AI kullanım alanları</a:t>
+            </a:r>
+          </a:p>
+          <a:p>
+            <a:r>
+              <a:t>📸 Görsel: Scratch arayüzü ekran görüntüsü</a:t>
+            </a:r>
+          </a:p>
+          <a:p>
+            <a:r>
+              <a:t>🎬 Video: Scratch ile basit oyun yapımı (3-5 dk)</a:t>
+            </a:r>
+          </a:p>
+          <a:p>
+            <a:r>
+              <a:t>💡 Ekran kaydı: Adım adım Scratch projesi</a:t>
+            </a:r>
+          </a:p>
         </p:txBody>
       </p:sp>
       <p:sp>
@@ -1222,6 +2064,63 @@
               <a:t>Etkinlik: Öğrencilere 'öğrenme' sürecini düşündürün. Nasıl bisiklete binmeyi öğrendiler?</a:t>
             </a:r>
           </a:p>
+          <a:p/>
+          <a:p>
+            <a:r>
+              <a:t>🎨 GÖRSELLEŞTİRME ÖNERİLERİ:</a:t>
+            </a:r>
+          </a:p>
+          <a:p/>
+          <a:p>
+            <a:r>
+              <a:t>📸 Görsel: Yapay zeka uygulama örnekleri (Siri, Alexa, ChatGPT)</a:t>
+            </a:r>
+          </a:p>
+          <a:p>
+            <a:r>
+              <a:t>🎬 Video: Yapay zeka nedir? Çocuklar için anlatım</a:t>
+            </a:r>
+          </a:p>
+          <a:p>
+            <a:r>
+              <a:t>💡 İnfografik: AI kullanım alanları</a:t>
+            </a:r>
+          </a:p>
+          <a:p>
+            <a:r>
+              <a:t>📸 Görsel: Makine öğrenmesi süreci diyagramı</a:t>
+            </a:r>
+          </a:p>
+          <a:p>
+            <a:r>
+              <a:t>🎬 Video: Makine öğrenmesi basit örneklerle</a:t>
+            </a:r>
+          </a:p>
+          <a:p>
+            <a:r>
+              <a:t>📸 Görsel: Koşullu yapılar akış diyagramı</a:t>
+            </a:r>
+          </a:p>
+          <a:p>
+            <a:r>
+              <a:t>🎬 Video: Koşullu ifadeler Scratch'te</a:t>
+            </a:r>
+          </a:p>
+          <a:p>
+            <a:r>
+              <a:t>📸 Görsel: Farklı grafik türleri örnekleri</a:t>
+            </a:r>
+          </a:p>
+          <a:p>
+            <a:r>
+              <a:t>🎬 Video: Veri görselleştirme önemi</a:t>
+            </a:r>
+          </a:p>
+          <a:p>
+            <a:r>
+              <a:t>💡 İnfografik: Grafik türleri ve kullanım alanları</a:t>
+            </a:r>
+          </a:p>
         </p:txBody>
       </p:sp>
       <p:sp>
@@ -1292,6 +2191,88 @@
               <a:t>Görsel: Basit bir yapay sinir ağı diyagramı gösterin</a:t>
             </a:r>
           </a:p>
+          <a:p/>
+          <a:p>
+            <a:r>
+              <a:t>🎨 GÖRSELLEŞTİRME ÖNERİLERİ:</a:t>
+            </a:r>
+          </a:p>
+          <a:p/>
+          <a:p>
+            <a:r>
+              <a:t>📸 Görsel: LAN ve WAN ağ topolojileri şeması</a:t>
+            </a:r>
+          </a:p>
+          <a:p>
+            <a:r>
+              <a:t>🎬 Video: İnternet nasıl çalışır? Animasyonlu anlatım</a:t>
+            </a:r>
+          </a:p>
+          <a:p>
+            <a:r>
+              <a:t>💡 İnfografik: Ev ağı kurulumu diyagramı</a:t>
+            </a:r>
+          </a:p>
+          <a:p>
+            <a:r>
+              <a:t>📸 Görsel: Yapay zeka uygulama örnekleri (Siri, Alexa, ChatGPT)</a:t>
+            </a:r>
+          </a:p>
+          <a:p>
+            <a:r>
+              <a:t>🎬 Video: Yapay zeka nedir? Çocuklar için anlatım</a:t>
+            </a:r>
+          </a:p>
+          <a:p>
+            <a:r>
+              <a:t>💡 İnfografik: AI kullanım alanları</a:t>
+            </a:r>
+          </a:p>
+          <a:p>
+            <a:r>
+              <a:t>📸 Görsel: Makine öğrenmesi süreci diyagramı</a:t>
+            </a:r>
+          </a:p>
+          <a:p>
+            <a:r>
+              <a:t>🎬 Video: Makine öğrenmesi basit örneklerle</a:t>
+            </a:r>
+          </a:p>
+          <a:p>
+            <a:r>
+              <a:t>📸 Görsel: Popüler chatbot örnekleri (Siri, Google Assistant)</a:t>
+            </a:r>
+          </a:p>
+          <a:p>
+            <a:r>
+              <a:t>🎬 Video: Chatbot nasıl çalışır?</a:t>
+            </a:r>
+          </a:p>
+          <a:p>
+            <a:r>
+              <a:t>📸 Görsel: Excel arayüzü ekran görüntüsü</a:t>
+            </a:r>
+          </a:p>
+          <a:p>
+            <a:r>
+              <a:t>🎬 Video: Excel temel işlemler (2-3 dk)</a:t>
+            </a:r>
+          </a:p>
+          <a:p>
+            <a:r>
+              <a:t>💡 Ekran kaydı: Formül kullanımı demo</a:t>
+            </a:r>
+          </a:p>
+          <a:p>
+            <a:r>
+              <a:t>📸 Görsel: Dijital çağ görselleri ve teknoloji örnekleri</a:t>
+            </a:r>
+          </a:p>
+          <a:p>
+            <a:r>
+              <a:t>🎬 Video: Bilişim teknolojilerinin tarihçesi</a:t>
+            </a:r>
+          </a:p>
         </p:txBody>
       </p:sp>
       <p:sp>
@@ -1362,6 +2343,38 @@
               <a:t>Gösterim: Sınıfta sesli asistan kullanımı gösterin (uygunsa)</a:t>
             </a:r>
           </a:p>
+          <a:p/>
+          <a:p>
+            <a:r>
+              <a:t>🎨 GÖRSELLEŞTİRME ÖNERİLERİ:</a:t>
+            </a:r>
+          </a:p>
+          <a:p/>
+          <a:p>
+            <a:r>
+              <a:t>📸 Görsel: Yapay zeka uygulama örnekleri (Siri, Alexa, ChatGPT)</a:t>
+            </a:r>
+          </a:p>
+          <a:p>
+            <a:r>
+              <a:t>🎬 Video: Yapay zeka nedir? Çocuklar için anlatım</a:t>
+            </a:r>
+          </a:p>
+          <a:p>
+            <a:r>
+              <a:t>💡 İnfografik: AI kullanım alanları</a:t>
+            </a:r>
+          </a:p>
+          <a:p>
+            <a:r>
+              <a:t>📸 Görsel: Popüler chatbot örnekleri (Siri, Google Assistant)</a:t>
+            </a:r>
+          </a:p>
+          <a:p>
+            <a:r>
+              <a:t>🎬 Video: Chatbot nasıl çalışır?</a:t>
+            </a:r>
+          </a:p>
         </p:txBody>
       </p:sp>
       <p:sp>
@@ -1432,6 +2445,73 @@
               <a:t>Video: 'Görüntü Tanıma Nasıl Çalışır?' - Animasyon</a:t>
             </a:r>
           </a:p>
+          <a:p/>
+          <a:p>
+            <a:r>
+              <a:t>🎨 GÖRSELLEŞTİRME ÖNERİLERİ:</a:t>
+            </a:r>
+          </a:p>
+          <a:p/>
+          <a:p>
+            <a:r>
+              <a:t>📸 Görsel: CPU, RAM ve anakart fotoğrafları</a:t>
+            </a:r>
+          </a:p>
+          <a:p>
+            <a:r>
+              <a:t>🎬 Video: Bilgisayar donanımı tanıtım videosu (1-2 dk)</a:t>
+            </a:r>
+          </a:p>
+          <a:p>
+            <a:r>
+              <a:t>💡 İnfografik: Bilgisayar bileşenleri şeması</a:t>
+            </a:r>
+          </a:p>
+          <a:p>
+            <a:r>
+              <a:t>📸 Görsel: LAN ve WAN ağ topolojileri şeması</a:t>
+            </a:r>
+          </a:p>
+          <a:p>
+            <a:r>
+              <a:t>🎬 Video: İnternet nasıl çalışır? Animasyonlu anlatım</a:t>
+            </a:r>
+          </a:p>
+          <a:p>
+            <a:r>
+              <a:t>💡 İnfografik: Ev ağı kurulumu diyagramı</a:t>
+            </a:r>
+          </a:p>
+          <a:p>
+            <a:r>
+              <a:t>📸 Görsel: Güçlü şifre örnekleri vs zayıf şifre</a:t>
+            </a:r>
+          </a:p>
+          <a:p>
+            <a:r>
+              <a:t>🎬 Video: Şifre güvenliği önemi (1-2 dk)</a:t>
+            </a:r>
+          </a:p>
+          <a:p>
+            <a:r>
+              <a:t>💡 İnfografik: Güçlü şifre oluşturma kuralları</a:t>
+            </a:r>
+          </a:p>
+          <a:p>
+            <a:r>
+              <a:t>📸 Görsel: Yapay zeka uygulama örnekleri (Siri, Alexa, ChatGPT)</a:t>
+            </a:r>
+          </a:p>
+          <a:p>
+            <a:r>
+              <a:t>🎬 Video: Yapay zeka nedir? Çocuklar için anlatım</a:t>
+            </a:r>
+          </a:p>
+          <a:p>
+            <a:r>
+              <a:t>💡 İnfografik: AI kullanım alanları</a:t>
+            </a:r>
+          </a:p>
         </p:txBody>
       </p:sp>
       <p:sp>
@@ -1502,6 +2582,53 @@
               <a:t>Tartışma: Öneri sistemleri sizi nasıl etkiliyor? Fark ettiniz mi?</a:t>
             </a:r>
           </a:p>
+          <a:p/>
+          <a:p>
+            <a:r>
+              <a:t>🎨 GÖRSELLEŞTİRME ÖNERİLERİ:</a:t>
+            </a:r>
+          </a:p>
+          <a:p/>
+          <a:p>
+            <a:r>
+              <a:t>📸 Görsel: CPU, RAM ve anakart fotoğrafları</a:t>
+            </a:r>
+          </a:p>
+          <a:p>
+            <a:r>
+              <a:t>🎬 Video: Bilgisayar donanımı tanıtım videosu (1-2 dk)</a:t>
+            </a:r>
+          </a:p>
+          <a:p>
+            <a:r>
+              <a:t>💡 İnfografik: Bilgisayar bileşenleri şeması</a:t>
+            </a:r>
+          </a:p>
+          <a:p>
+            <a:r>
+              <a:t>📸 Görsel: LAN ve WAN ağ topolojileri şeması</a:t>
+            </a:r>
+          </a:p>
+          <a:p>
+            <a:r>
+              <a:t>🎬 Video: İnternet nasıl çalışır? Animasyonlu anlatım</a:t>
+            </a:r>
+          </a:p>
+          <a:p>
+            <a:r>
+              <a:t>💡 İnfografik: Ev ağı kurulumu diyagramı</a:t>
+            </a:r>
+          </a:p>
+          <a:p>
+            <a:r>
+              <a:t>📸 Görsel: Koşullu yapılar akış diyagramı</a:t>
+            </a:r>
+          </a:p>
+          <a:p>
+            <a:r>
+              <a:t>🎬 Video: Koşullu ifadeler Scratch'te</a:t>
+            </a:r>
+          </a:p>
         </p:txBody>
       </p:sp>
       <p:sp>
@@ -1570,6 +2697,68 @@
           <a:p>
             <a:r>
               <a:t>Etkinlik: Öğrenciler hangi oyunlarda AI fark ettiler? Paylaşsınlar.</a:t>
+            </a:r>
+          </a:p>
+          <a:p/>
+          <a:p>
+            <a:r>
+              <a:t>🎨 GÖRSELLEŞTİRME ÖNERİLERİ:</a:t>
+            </a:r>
+          </a:p>
+          <a:p/>
+          <a:p>
+            <a:r>
+              <a:t>📸 Görsel: LAN ve WAN ağ topolojileri şeması</a:t>
+            </a:r>
+          </a:p>
+          <a:p>
+            <a:r>
+              <a:t>🎬 Video: İnternet nasıl çalışır? Animasyonlu anlatım</a:t>
+            </a:r>
+          </a:p>
+          <a:p>
+            <a:r>
+              <a:t>💡 İnfografik: Ev ağı kurulumu diyagramı</a:t>
+            </a:r>
+          </a:p>
+          <a:p>
+            <a:r>
+              <a:t>📸 Görsel: Yapay zeka uygulama örnekleri (Siri, Alexa, ChatGPT)</a:t>
+            </a:r>
+          </a:p>
+          <a:p>
+            <a:r>
+              <a:t>🎬 Video: Yapay zeka nedir? Çocuklar için anlatım</a:t>
+            </a:r>
+          </a:p>
+          <a:p>
+            <a:r>
+              <a:t>💡 İnfografik: AI kullanım alanları</a:t>
+            </a:r>
+          </a:p>
+          <a:p>
+            <a:r>
+              <a:t>📸 Görsel: Koşullu yapılar akış diyagramı</a:t>
+            </a:r>
+          </a:p>
+          <a:p>
+            <a:r>
+              <a:t>🎬 Video: Koşullu ifadeler Scratch'te</a:t>
+            </a:r>
+          </a:p>
+          <a:p>
+            <a:r>
+              <a:t>📸 Görsel: Farklı grafik türleri örnekleri</a:t>
+            </a:r>
+          </a:p>
+          <a:p>
+            <a:r>
+              <a:t>🎬 Video: Veri görselleştirme önemi</a:t>
+            </a:r>
+          </a:p>
+          <a:p>
+            <a:r>
+              <a:t>💡 İnfografik: Grafik türleri ve kullanım alanları</a:t>
             </a:r>
           </a:p>
         </p:txBody>
@@ -4746,6 +5935,7 @@
               <a:defRPr sz="2000"/>
             </a:pPr>
             <a:r>
+              <a:rPr sz="1400"/>
               <a:t>Oyunlarda AI = Rakip karakterlerin zeki davranması</a:t>
             </a:r>
           </a:p>
@@ -4765,6 +5955,7 @@
               <a:defRPr sz="2000" b="1"/>
             </a:pPr>
             <a:r>
+              <a:rPr sz="1400"/>
               <a:t>✅ Oyun AI'sı Örnekleri:</a:t>
             </a:r>
           </a:p>
@@ -4784,6 +5975,7 @@
               <a:defRPr sz="2000" b="1"/>
             </a:pPr>
             <a:r>
+              <a:rPr sz="1400"/>
               <a:t>🎯 NPC (Non-Player Character):</a:t>
             </a:r>
           </a:p>
@@ -4795,6 +5987,7 @@
               <a:defRPr sz="1800"/>
             </a:pPr>
             <a:r>
+              <a:rPr sz="1400"/>
               <a:t>    • Düşmanlar</a:t>
             </a:r>
           </a:p>
@@ -4806,6 +5999,7 @@
               <a:defRPr sz="1800"/>
             </a:pPr>
             <a:r>
+              <a:rPr sz="1400"/>
               <a:t>    • Takım arkadaşları</a:t>
             </a:r>
           </a:p>
@@ -4817,6 +6011,7 @@
               <a:defRPr sz="1800"/>
             </a:pPr>
             <a:r>
+              <a:rPr sz="1400"/>
               <a:t>    • Köylüler, karakterler</a:t>
             </a:r>
           </a:p>
@@ -4836,6 +6031,7 @@
               <a:defRPr sz="2000" b="1"/>
             </a:pPr>
             <a:r>
+              <a:rPr sz="1400"/>
               <a:t>📌 AI Ne Yapar?</a:t>
             </a:r>
           </a:p>
@@ -4847,6 +6043,7 @@
               <a:defRPr sz="1800"/>
             </a:pPr>
             <a:r>
+              <a:rPr sz="1400"/>
               <a:t>    • Seni takip eder</a:t>
             </a:r>
           </a:p>
@@ -4858,6 +6055,7 @@
               <a:defRPr sz="1800"/>
             </a:pPr>
             <a:r>
+              <a:rPr sz="1400"/>
               <a:t>    • Stratejik kararlar verir</a:t>
             </a:r>
           </a:p>
@@ -4869,6 +6067,7 @@
               <a:defRPr sz="1800"/>
             </a:pPr>
             <a:r>
+              <a:rPr sz="1400"/>
               <a:t>    • Engelleri aşar</a:t>
             </a:r>
           </a:p>
@@ -4880,6 +6079,7 @@
               <a:defRPr sz="1800"/>
             </a:pPr>
             <a:r>
+              <a:rPr sz="1400"/>
               <a:t>    • Zorluğa göre uyum sağlar</a:t>
             </a:r>
           </a:p>
@@ -4899,6 +6099,7 @@
               <a:defRPr sz="2000"/>
             </a:pPr>
             <a:r>
+              <a:rPr sz="1400"/>
               <a:t>🎮 Popüler Örnekler:</a:t>
             </a:r>
           </a:p>
@@ -4918,6 +6119,7 @@
               <a:defRPr sz="2000"/>
             </a:pPr>
             <a:r>
+              <a:rPr sz="1400"/>
               <a:t>♟️ Satranç/Dama:</a:t>
             </a:r>
           </a:p>
@@ -4929,6 +6131,7 @@
               <a:defRPr sz="1800"/>
             </a:pPr>
             <a:r>
+              <a:rPr sz="1400"/>
               <a:t>    • Birkaç hamle önceden düşünür</a:t>
             </a:r>
           </a:p>
@@ -4948,6 +6151,7 @@
               <a:defRPr sz="2000"/>
             </a:pPr>
             <a:r>
+              <a:rPr sz="1400"/>
               <a:t>🧟 Minecraft Mob'ları:</a:t>
             </a:r>
           </a:p>
@@ -4959,6 +6163,7 @@
               <a:defRPr sz="1800"/>
             </a:pPr>
             <a:r>
+              <a:rPr sz="1400"/>
               <a:t>    • Zombie seni bulur ve kovalar</a:t>
             </a:r>
           </a:p>
@@ -4970,6 +6175,7 @@
               <a:defRPr sz="1800"/>
             </a:pPr>
             <a:r>
+              <a:rPr sz="1400"/>
               <a:t>    • Creeper yaklaşır ve patlar</a:t>
             </a:r>
           </a:p>
@@ -4989,6 +6195,7 @@
               <a:defRPr sz="2000"/>
             </a:pPr>
             <a:r>
+              <a:rPr sz="1400"/>
               <a:t>🏎️ Yarış Oyunları:</a:t>
             </a:r>
           </a:p>
@@ -5000,6 +6207,7 @@
               <a:defRPr sz="1800"/>
             </a:pPr>
             <a:r>
+              <a:rPr sz="1400"/>
               <a:t>    • Rakip arabalar akıllıca yarışır</a:t>
             </a:r>
           </a:p>
@@ -5019,6 +6227,7 @@
               <a:defRPr sz="2000" b="1"/>
             </a:pPr>
             <a:r>
+              <a:rPr sz="1400"/>
               <a:t>💡 Oyun AI'sı ne kadar iyi olursa, oyun o kadar eğlenceli!</a:t>
             </a:r>
           </a:p>
@@ -5117,6 +6326,7 @@
               <a:defRPr sz="2000"/>
             </a:pPr>
             <a:r>
+              <a:rPr sz="1400"/>
               <a:t>AI artık sadece hesap yapmıyor, sanat da üretiyor!</a:t>
             </a:r>
           </a:p>
@@ -5136,6 +6346,7 @@
               <a:defRPr sz="2000" b="1"/>
             </a:pPr>
             <a:r>
+              <a:rPr sz="1400"/>
               <a:t>✅ Yaratıcı AI Örnekleri:</a:t>
             </a:r>
           </a:p>
@@ -5155,6 +6366,7 @@
               <a:defRPr sz="2000"/>
             </a:pPr>
             <a:r>
+              <a:rPr sz="1400"/>
               <a:t>🎨 Görsel Üretme:</a:t>
             </a:r>
           </a:p>
@@ -5166,6 +6378,7 @@
               <a:defRPr sz="1800"/>
             </a:pPr>
             <a:r>
+              <a:rPr sz="1400"/>
               <a:t>    • DALL-E, Midjourney, Stable Diffusion</a:t>
             </a:r>
           </a:p>
@@ -5177,6 +6390,7 @@
               <a:defRPr sz="1800"/>
             </a:pPr>
             <a:r>
+              <a:rPr sz="1400"/>
               <a:t>    • Metin yazarsın → Resim oluşturur</a:t>
             </a:r>
           </a:p>
@@ -5188,6 +6402,7 @@
               <a:defRPr sz="1800"/>
             </a:pPr>
             <a:r>
+              <a:rPr sz="1400"/>
               <a:t>    • Örnek: 'Uzayda yüzen kedi' → AI çizer</a:t>
             </a:r>
           </a:p>
@@ -5207,6 +6422,7 @@
               <a:defRPr sz="2000"/>
             </a:pPr>
             <a:r>
+              <a:rPr sz="1400"/>
               <a:t>✍️ Metin Üretme:</a:t>
             </a:r>
           </a:p>
@@ -5218,6 +6434,7 @@
               <a:defRPr sz="1800"/>
             </a:pPr>
             <a:r>
+              <a:rPr sz="1400"/>
               <a:t>    • ChatGPT</a:t>
             </a:r>
           </a:p>
@@ -5229,6 +6446,7 @@
               <a:defRPr sz="1800"/>
             </a:pPr>
             <a:r>
+              <a:rPr sz="1400"/>
               <a:t>    • Hikaye yazar, şiir oluşturur</a:t>
             </a:r>
           </a:p>
@@ -5240,6 +6458,7 @@
               <a:defRPr sz="1800"/>
             </a:pPr>
             <a:r>
+              <a:rPr sz="1400"/>
               <a:t>    • Soru cevaplar</a:t>
             </a:r>
           </a:p>
@@ -5259,6 +6478,7 @@
               <a:defRPr sz="2000"/>
             </a:pPr>
             <a:r>
+              <a:rPr sz="1400"/>
               <a:t>🎵 Müzik Üretme:</a:t>
             </a:r>
           </a:p>
@@ -5270,6 +6490,7 @@
               <a:defRPr sz="1800"/>
             </a:pPr>
             <a:r>
+              <a:rPr sz="1400"/>
               <a:t>    • AI besteler yapabilir</a:t>
             </a:r>
           </a:p>
@@ -5281,6 +6502,7 @@
               <a:defRPr sz="1800"/>
             </a:pPr>
             <a:r>
+              <a:rPr sz="1400"/>
               <a:t>    • Suno, AIVA</a:t>
             </a:r>
           </a:p>
@@ -5300,6 +6522,7 @@
               <a:defRPr sz="2000"/>
             </a:pPr>
             <a:r>
+              <a:rPr sz="1400"/>
               <a:t>🎬 Video Üretme:</a:t>
             </a:r>
           </a:p>
@@ -5311,6 +6534,7 @@
               <a:defRPr sz="1800"/>
             </a:pPr>
             <a:r>
+              <a:rPr sz="1400"/>
               <a:t>    • Kısa videolar oluşturabilir</a:t>
             </a:r>
           </a:p>
@@ -5330,6 +6554,7 @@
               <a:defRPr sz="2000" b="1"/>
             </a:pPr>
             <a:r>
+              <a:rPr sz="1400"/>
               <a:t>📌 Nasıl Kullanılır?</a:t>
             </a:r>
           </a:p>
@@ -5341,6 +6566,7 @@
               <a:defRPr sz="1800"/>
             </a:pPr>
             <a:r>
+              <a:rPr sz="1400"/>
               <a:t>    • Prompt (komut) yazarsın</a:t>
             </a:r>
           </a:p>
@@ -5352,6 +6578,7 @@
               <a:defRPr sz="1800"/>
             </a:pPr>
             <a:r>
+              <a:rPr sz="1400"/>
               <a:t>    • AI üretir</a:t>
             </a:r>
           </a:p>
@@ -5363,6 +6590,7 @@
               <a:defRPr sz="1800"/>
             </a:pPr>
             <a:r>
+              <a:rPr sz="1400"/>
               <a:t>    • Beğenmezsen tekrar dene</a:t>
             </a:r>
           </a:p>
@@ -5382,6 +6610,7 @@
               <a:defRPr sz="2000" b="1"/>
             </a:pPr>
             <a:r>
+              <a:rPr sz="1400"/>
               <a:t>💡 Etik Soru:</a:t>
             </a:r>
           </a:p>
@@ -5393,6 +6622,7 @@
               <a:defRPr sz="2000"/>
             </a:pPr>
             <a:r>
+              <a:rPr sz="1400"/>
               <a:t>AI'nın ürettiği sanat, gerçek sanat mıdır?</a:t>
             </a:r>
           </a:p>
@@ -5404,6 +6634,7 @@
               <a:defRPr sz="2000"/>
             </a:pPr>
             <a:r>
+              <a:rPr sz="1400"/>
               <a:t>Kim sahibidir?</a:t>
             </a:r>
           </a:p>
@@ -5502,6 +6733,7 @@
               <a:defRPr sz="2000"/>
             </a:pPr>
             <a:r>
+              <a:rPr sz="1400"/>
               <a:t>Yapay zeka güçlü bir araç ama bazı sorunları var</a:t>
             </a:r>
           </a:p>
@@ -5521,6 +6753,7 @@
               <a:defRPr sz="2000" b="1"/>
             </a:pPr>
             <a:r>
+              <a:rPr sz="1400"/>
               <a:t>✅ Etik Sorunlar:</a:t>
             </a:r>
           </a:p>
@@ -5540,6 +6773,7 @@
               <a:defRPr sz="2000"/>
             </a:pPr>
             <a:r>
+              <a:rPr sz="1400"/>
               <a:t>🎭 Önyargı (Bias):</a:t>
             </a:r>
           </a:p>
@@ -5551,6 +6785,7 @@
               <a:defRPr sz="1800"/>
             </a:pPr>
             <a:r>
+              <a:rPr sz="1400"/>
               <a:t>    • AI verilere göre öğrenir</a:t>
             </a:r>
           </a:p>
@@ -5562,6 +6797,7 @@
               <a:defRPr sz="1800"/>
             </a:pPr>
             <a:r>
+              <a:rPr sz="1400"/>
               <a:t>    • Yanlış veri = Yanlış karar</a:t>
             </a:r>
           </a:p>
@@ -5573,6 +6809,7 @@
               <a:defRPr sz="1800"/>
             </a:pPr>
             <a:r>
+              <a:rPr sz="1400"/>
               <a:t>    • Örnek: Sadece erkek doktor fotoğrafları → 'Doktor = Erkek' düşüncesi</a:t>
             </a:r>
           </a:p>
@@ -5592,6 +6829,7 @@
               <a:defRPr sz="2000"/>
             </a:pPr>
             <a:r>
+              <a:rPr sz="1400"/>
               <a:t>🔒 Gizlilik:</a:t>
             </a:r>
           </a:p>
@@ -5603,6 +6841,7 @@
               <a:defRPr sz="1800"/>
             </a:pPr>
             <a:r>
+              <a:rPr sz="1400"/>
               <a:t>    • AI çok veri topluyor</a:t>
             </a:r>
           </a:p>
@@ -5614,6 +6853,7 @@
               <a:defRPr sz="1800"/>
             </a:pPr>
             <a:r>
+              <a:rPr sz="1400"/>
               <a:t>    • Kişisel bilgiler tehlikede olabilir</a:t>
             </a:r>
           </a:p>
@@ -5633,6 +6873,7 @@
               <a:defRPr sz="2000"/>
             </a:pPr>
             <a:r>
+              <a:rPr sz="1400"/>
               <a:t>💼 İş Kaybı:</a:t>
             </a:r>
           </a:p>
@@ -5644,6 +6885,7 @@
               <a:defRPr sz="1800"/>
             </a:pPr>
             <a:r>
+              <a:rPr sz="1400"/>
               <a:t>    • Bazı meslekler AI ile değiştirilebilir</a:t>
             </a:r>
           </a:p>
@@ -5655,6 +6897,7 @@
               <a:defRPr sz="1800"/>
             </a:pPr>
             <a:r>
+              <a:rPr sz="1400"/>
               <a:t>    • Kasiyerlik, fabrika işleri</a:t>
             </a:r>
           </a:p>
@@ -5674,6 +6917,7 @@
               <a:defRPr sz="2000"/>
             </a:pPr>
             <a:r>
+              <a:rPr sz="1400"/>
               <a:t>🎭 Deepfake:</a:t>
             </a:r>
           </a:p>
@@ -5685,6 +6929,7 @@
               <a:defRPr sz="1800"/>
             </a:pPr>
             <a:r>
+              <a:rPr sz="1400"/>
               <a:t>    • Sahte video/ses oluşturma</a:t>
             </a:r>
           </a:p>
@@ -5696,6 +6941,7 @@
               <a:defRPr sz="1800"/>
             </a:pPr>
             <a:r>
+              <a:rPr sz="1400"/>
               <a:t>    • Yalan haber yayabilir</a:t>
             </a:r>
           </a:p>
@@ -5715,6 +6961,7 @@
               <a:defRPr sz="2000"/>
             </a:pPr>
             <a:r>
+              <a:rPr sz="1400"/>
               <a:t>⚖️ Sorumluluk:</a:t>
             </a:r>
           </a:p>
@@ -5726,6 +6973,7 @@
               <a:defRPr sz="1800"/>
             </a:pPr>
             <a:r>
+              <a:rPr sz="1400"/>
               <a:t>    • AI hata yaparsa kim sorumlu?</a:t>
             </a:r>
           </a:p>
@@ -5737,6 +6985,7 @@
               <a:defRPr sz="1800"/>
             </a:pPr>
             <a:r>
+              <a:rPr sz="1400"/>
               <a:t>    • Otonom araç kaza yaparsa?</a:t>
             </a:r>
           </a:p>
@@ -5756,6 +7005,7 @@
               <a:defRPr sz="2000" b="1"/>
             </a:pPr>
             <a:r>
+              <a:rPr sz="1400"/>
               <a:t>💡 AI'yı etik ve sorumlu kullanmalıyız!</a:t>
             </a:r>
           </a:p>
@@ -5854,6 +7104,7 @@
               <a:defRPr sz="2000"/>
             </a:pPr>
             <a:r>
+              <a:rPr sz="1400"/>
               <a:t>Yapay zeka bazı meslekleri değiştirecek, bazılarını yaratacak!</a:t>
             </a:r>
           </a:p>
@@ -5873,6 +7124,7 @@
               <a:defRPr sz="2000" b="1"/>
             </a:pPr>
             <a:r>
+              <a:rPr sz="1400"/>
               <a:t>✅ Yok Olabilecek Meslekler:</a:t>
             </a:r>
           </a:p>
@@ -5884,6 +7136,7 @@
               <a:defRPr sz="1800"/>
             </a:pPr>
             <a:r>
+              <a:rPr sz="1400"/>
               <a:t>    • Fabrika işçileri (robotlar yapacak)</a:t>
             </a:r>
           </a:p>
@@ -5895,6 +7148,7 @@
               <a:defRPr sz="1800"/>
             </a:pPr>
             <a:r>
+              <a:rPr sz="1400"/>
               <a:t>    • Kasiyerler (otomasyon)</a:t>
             </a:r>
           </a:p>
@@ -5906,6 +7160,7 @@
               <a:defRPr sz="1800"/>
             </a:pPr>
             <a:r>
+              <a:rPr sz="1400"/>
               <a:t>    • Veri giriş elemanları</a:t>
             </a:r>
           </a:p>
@@ -5925,6 +7180,7 @@
               <a:defRPr sz="2000" b="1"/>
             </a:pPr>
             <a:r>
+              <a:rPr sz="1400"/>
               <a:t>✅ Değişecek Meslekler:</a:t>
             </a:r>
           </a:p>
@@ -5936,6 +7192,7 @@
               <a:defRPr sz="1800"/>
             </a:pPr>
             <a:r>
+              <a:rPr sz="1400"/>
               <a:t>    • Öğretmenler (AI yardımcı olacak)</a:t>
             </a:r>
           </a:p>
@@ -5947,6 +7204,7 @@
               <a:defRPr sz="1800"/>
             </a:pPr>
             <a:r>
+              <a:rPr sz="1400"/>
               <a:t>    • Doktorlar (AI teşhis yardımcısı)</a:t>
             </a:r>
           </a:p>
@@ -5958,6 +7216,7 @@
               <a:defRPr sz="1800"/>
             </a:pPr>
             <a:r>
+              <a:rPr sz="1400"/>
               <a:t>    • Sanatçılar (AI araçlarını kullanacak)</a:t>
             </a:r>
           </a:p>
@@ -5977,6 +7236,7 @@
               <a:defRPr sz="2000" b="1"/>
             </a:pPr>
             <a:r>
+              <a:rPr sz="1400"/>
               <a:t>✅ Yeni Meslekler:</a:t>
             </a:r>
           </a:p>
@@ -5988,6 +7248,7 @@
               <a:defRPr sz="1800"/>
             </a:pPr>
             <a:r>
+              <a:rPr sz="1400"/>
               <a:t>    • AI Eğitim Uzmanı</a:t>
             </a:r>
           </a:p>
@@ -5999,6 +7260,7 @@
               <a:defRPr sz="1800"/>
             </a:pPr>
             <a:r>
+              <a:rPr sz="1400"/>
               <a:t>    • Veri Bilimcisi</a:t>
             </a:r>
           </a:p>
@@ -6010,6 +7272,7 @@
               <a:defRPr sz="1800"/>
             </a:pPr>
             <a:r>
+              <a:rPr sz="1400"/>
               <a:t>    • Makine Öğrenmesi Mühendisi</a:t>
             </a:r>
           </a:p>
@@ -6021,6 +7284,7 @@
               <a:defRPr sz="1800"/>
             </a:pPr>
             <a:r>
+              <a:rPr sz="1400"/>
               <a:t>    • AI Etik Uzmanı</a:t>
             </a:r>
           </a:p>
@@ -6032,6 +7296,7 @@
               <a:defRPr sz="1800"/>
             </a:pPr>
             <a:r>
+              <a:rPr sz="1400"/>
               <a:t>    • Robot Tasarımcısı</a:t>
             </a:r>
           </a:p>
@@ -6051,6 +7316,7 @@
               <a:defRPr sz="2000" b="1"/>
             </a:pPr>
             <a:r>
+              <a:rPr sz="1400"/>
               <a:t>💡 Gelecekte Önemli Beceriler:</a:t>
             </a:r>
           </a:p>
@@ -6062,6 +7328,7 @@
               <a:defRPr sz="1800"/>
             </a:pPr>
             <a:r>
+              <a:rPr sz="1400"/>
               <a:t>    • Yaratıcılık</a:t>
             </a:r>
           </a:p>
@@ -6073,6 +7340,7 @@
               <a:defRPr sz="1800"/>
             </a:pPr>
             <a:r>
+              <a:rPr sz="1400"/>
               <a:t>    • Eleştirel düşünme</a:t>
             </a:r>
           </a:p>
@@ -6084,6 +7352,7 @@
               <a:defRPr sz="1800"/>
             </a:pPr>
             <a:r>
+              <a:rPr sz="1400"/>
               <a:t>    • Kodlama</a:t>
             </a:r>
           </a:p>
@@ -6095,6 +7364,7 @@
               <a:defRPr sz="1800"/>
             </a:pPr>
             <a:r>
+              <a:rPr sz="1400"/>
               <a:t>    • Problem çözme</a:t>
             </a:r>
           </a:p>
@@ -6106,6 +7376,7 @@
               <a:defRPr sz="1800"/>
             </a:pPr>
             <a:r>
+              <a:rPr sz="1400"/>
               <a:t>    • İşbirliği</a:t>
             </a:r>
           </a:p>
@@ -6125,6 +7396,7 @@
               <a:defRPr sz="2000" b="1"/>
             </a:pPr>
             <a:r>
+              <a:rPr sz="1400"/>
               <a:t>🎯 AI ile rekabet etme, AI ile işbirliği yap!</a:t>
             </a:r>
           </a:p>
@@ -6223,6 +7495,7 @@
               <a:defRPr sz="2000"/>
             </a:pPr>
             <a:r>
+              <a:rPr sz="1400"/>
               <a:t>Sen de yapay zekayı öğrenebilir ve kullanabilirsin!</a:t>
             </a:r>
           </a:p>
@@ -6242,6 +7515,7 @@
               <a:defRPr sz="2000" b="1"/>
             </a:pPr>
             <a:r>
+              <a:rPr sz="1400"/>
               <a:t>✅ Başlangıç Seviyesi:</a:t>
             </a:r>
           </a:p>
@@ -6261,6 +7535,7 @@
               <a:defRPr sz="2000"/>
             </a:pPr>
             <a:r>
+              <a:rPr sz="1400"/>
               <a:t>🎨 Görsel Oluşturma:</a:t>
             </a:r>
           </a:p>
@@ -6272,6 +7547,7 @@
               <a:defRPr sz="1800"/>
             </a:pPr>
             <a:r>
+              <a:rPr sz="1400"/>
               <a:t>    • Bing Image Creator</a:t>
             </a:r>
           </a:p>
@@ -6283,6 +7559,7 @@
               <a:defRPr sz="1800"/>
             </a:pPr>
             <a:r>
+              <a:rPr sz="1400"/>
               <a:t>    • Craiyon (Ücretsiz)</a:t>
             </a:r>
           </a:p>
@@ -6302,6 +7579,7 @@
               <a:defRPr sz="2000"/>
             </a:pPr>
             <a:r>
+              <a:rPr sz="1400"/>
               <a:t>🤖 Chatbot ile Konuşma:</a:t>
             </a:r>
           </a:p>
@@ -6313,6 +7591,7 @@
               <a:defRPr sz="1800"/>
             </a:pPr>
             <a:r>
+              <a:rPr sz="1400"/>
               <a:t>    • ChatGPT (Ebeveyn izni ile)</a:t>
             </a:r>
           </a:p>
@@ -6324,6 +7603,7 @@
               <a:defRPr sz="1800"/>
             </a:pPr>
             <a:r>
+              <a:rPr sz="1400"/>
               <a:t>    • Soru sor, öğren</a:t>
             </a:r>
           </a:p>
@@ -6343,6 +7623,7 @@
               <a:defRPr sz="2000"/>
             </a:pPr>
             <a:r>
+              <a:rPr sz="1400"/>
               <a:t>🎮 Scratch ile AI:</a:t>
             </a:r>
           </a:p>
@@ -6354,6 +7635,7 @@
               <a:defRPr sz="1800"/>
             </a:pPr>
             <a:r>
+              <a:rPr sz="1400"/>
               <a:t>    • Makine öğrenmesi blokları</a:t>
             </a:r>
           </a:p>
@@ -6365,6 +7647,7 @@
               <a:defRPr sz="1800"/>
             </a:pPr>
             <a:r>
+              <a:rPr sz="1400"/>
               <a:t>    • Basit AI projeleri</a:t>
             </a:r>
           </a:p>
@@ -6384,6 +7667,7 @@
               <a:defRPr sz="2000"/>
             </a:pPr>
             <a:r>
+              <a:rPr sz="1400"/>
               <a:t>📚 Google Teachable Machine:</a:t>
             </a:r>
           </a:p>
@@ -6395,6 +7679,7 @@
               <a:defRPr sz="1800"/>
             </a:pPr>
             <a:r>
+              <a:rPr sz="1400"/>
               <a:t>    • Kendi AI modelini eğit</a:t>
             </a:r>
           </a:p>
@@ -6406,6 +7691,7 @@
               <a:defRPr sz="1800"/>
             </a:pPr>
             <a:r>
+              <a:rPr sz="1400"/>
               <a:t>    • Görüntü, ses, pozisyon tanıma</a:t>
             </a:r>
           </a:p>
@@ -6417,6 +7703,7 @@
               <a:defRPr sz="1800"/>
             </a:pPr>
             <a:r>
+              <a:rPr sz="1400"/>
               <a:t>    • Kodlama bilmeden yapabilirsin!</a:t>
             </a:r>
           </a:p>
@@ -6436,6 +7723,7 @@
               <a:defRPr sz="2000" b="1"/>
             </a:pPr>
             <a:r>
+              <a:rPr sz="1400"/>
               <a:t>💡 Nasıl Başlarsın?</a:t>
             </a:r>
           </a:p>
@@ -6447,6 +7735,7 @@
               <a:defRPr sz="2000"/>
             </a:pPr>
             <a:r>
+              <a:rPr sz="1400"/>
               <a:t>1️⃣ Merak et ve araştır</a:t>
             </a:r>
           </a:p>
@@ -6458,6 +7747,7 @@
               <a:defRPr sz="2000"/>
             </a:pPr>
             <a:r>
+              <a:rPr sz="1400"/>
               <a:t>2️⃣ Basit projelerle başla</a:t>
             </a:r>
           </a:p>
@@ -6469,6 +7759,7 @@
               <a:defRPr sz="2000"/>
             </a:pPr>
             <a:r>
+              <a:rPr sz="1400"/>
               <a:t>3️⃣ Deneme yanılma yap</a:t>
             </a:r>
           </a:p>
@@ -6480,6 +7771,7 @@
               <a:defRPr sz="2000"/>
             </a:pPr>
             <a:r>
+              <a:rPr sz="1400"/>
               <a:t>4️⃣ Ebeveyn/öğretmen gözetiminde kullan</a:t>
             </a:r>
           </a:p>
@@ -6578,6 +7870,7 @@
               <a:defRPr sz="2000"/>
             </a:pPr>
             <a:r>
+              <a:rPr sz="1400"/>
               <a:t>Yapay zeka gelecekte nasıl olacak?</a:t>
             </a:r>
           </a:p>
@@ -6597,6 +7890,7 @@
               <a:defRPr sz="2000" b="1"/>
             </a:pPr>
             <a:r>
+              <a:rPr sz="1400"/>
               <a:t>✅ Gelecekteki AI Uygulamaları:</a:t>
             </a:r>
           </a:p>
@@ -6616,6 +7910,7 @@
               <a:defRPr sz="2000"/>
             </a:pPr>
             <a:r>
+              <a:rPr sz="1400"/>
               <a:t>🚗 Otonom Araçlar:</a:t>
             </a:r>
           </a:p>
@@ -6627,6 +7922,7 @@
               <a:defRPr sz="1800"/>
             </a:pPr>
             <a:r>
+              <a:rPr sz="1400"/>
               <a:t>    • Kendi kendine giden arabalar</a:t>
             </a:r>
           </a:p>
@@ -6638,6 +7934,7 @@
               <a:defRPr sz="1800"/>
             </a:pPr>
             <a:r>
+              <a:rPr sz="1400"/>
               <a:t>    • Trafik kazaları azalacak</a:t>
             </a:r>
           </a:p>
@@ -6657,6 +7954,7 @@
               <a:defRPr sz="2000"/>
             </a:pPr>
             <a:r>
+              <a:rPr sz="1400"/>
               <a:t>🏥 Gelişmiş Sağlık:</a:t>
             </a:r>
           </a:p>
@@ -6668,6 +7966,7 @@
               <a:defRPr sz="1800"/>
             </a:pPr>
             <a:r>
+              <a:rPr sz="1400"/>
               <a:t>    • Hastalık teşhisi</a:t>
             </a:r>
           </a:p>
@@ -6679,6 +7978,7 @@
               <a:defRPr sz="1800"/>
             </a:pPr>
             <a:r>
+              <a:rPr sz="1400"/>
               <a:t>    • Kişiselleştirilmiş tedavi</a:t>
             </a:r>
           </a:p>
@@ -6698,6 +7998,7 @@
               <a:defRPr sz="2000"/>
             </a:pPr>
             <a:r>
+              <a:rPr sz="1400"/>
               <a:t>🏠 Akıllı Şehirler:</a:t>
             </a:r>
           </a:p>
@@ -6709,6 +8010,7 @@
               <a:defRPr sz="1800"/>
             </a:pPr>
             <a:r>
+              <a:rPr sz="1400"/>
               <a:t>    • Trafik yönetimi</a:t>
             </a:r>
           </a:p>
@@ -6720,6 +8022,7 @@
               <a:defRPr sz="1800"/>
             </a:pPr>
             <a:r>
+              <a:rPr sz="1400"/>
               <a:t>    • Enerji tasarrufu</a:t>
             </a:r>
           </a:p>
@@ -6739,6 +8042,7 @@
               <a:defRPr sz="2000"/>
             </a:pPr>
             <a:r>
+              <a:rPr sz="1400"/>
               <a:t>🌱 Çevre Koruma:</a:t>
             </a:r>
           </a:p>
@@ -6750,6 +8054,7 @@
               <a:defRPr sz="1800"/>
             </a:pPr>
             <a:r>
+              <a:rPr sz="1400"/>
               <a:t>    • İklim değişikliği tahmini</a:t>
             </a:r>
           </a:p>
@@ -6761,6 +8066,7 @@
               <a:defRPr sz="1800"/>
             </a:pPr>
             <a:r>
+              <a:rPr sz="1400"/>
               <a:t>    • Geri dönüşüm optimizasyonu</a:t>
             </a:r>
           </a:p>
@@ -6780,6 +8086,7 @@
               <a:defRPr sz="2000"/>
             </a:pPr>
             <a:r>
+              <a:rPr sz="1400"/>
               <a:t>🎓 Eğitim:</a:t>
             </a:r>
           </a:p>
@@ -6791,6 +8098,7 @@
               <a:defRPr sz="1800"/>
             </a:pPr>
             <a:r>
+              <a:rPr sz="1400"/>
               <a:t>    • Kişiselleştirilmiş öğrenme</a:t>
             </a:r>
           </a:p>
@@ -6802,6 +8110,7 @@
               <a:defRPr sz="1800"/>
             </a:pPr>
             <a:r>
+              <a:rPr sz="1400"/>
               <a:t>    • AI öğretmen yardımcıları</a:t>
             </a:r>
           </a:p>
@@ -6821,6 +8130,7 @@
               <a:defRPr sz="2000"/>
             </a:pPr>
             <a:r>
+              <a:rPr sz="1400"/>
               <a:t>🤖 Genel Yapay Zeka (AGI)?</a:t>
             </a:r>
           </a:p>
@@ -6832,6 +8142,7 @@
               <a:defRPr sz="1800"/>
             </a:pPr>
             <a:r>
+              <a:rPr sz="1400"/>
               <a:t>    • Her alanda insan seviyesinde AI</a:t>
             </a:r>
           </a:p>
@@ -6843,6 +8154,7 @@
               <a:defRPr sz="1800"/>
             </a:pPr>
             <a:r>
+              <a:rPr sz="1400"/>
               <a:t>    • Henüz çok uzak!</a:t>
             </a:r>
           </a:p>
@@ -6862,6 +8174,7 @@
               <a:defRPr sz="2000" b="1"/>
             </a:pPr>
             <a:r>
+              <a:rPr sz="1400"/>
               <a:t>💡 Sen bu geleceği şekillendireceksin!</a:t>
             </a:r>
           </a:p>
@@ -6960,6 +8273,7 @@
               <a:defRPr sz="2000"/>
             </a:pPr>
             <a:r>
+              <a:rPr sz="1400"/>
               <a:t>Bu ünitede neler öğrendik?</a:t>
             </a:r>
           </a:p>
@@ -6979,6 +8293,7 @@
               <a:defRPr sz="2000" b="1"/>
             </a:pPr>
             <a:r>
+              <a:rPr sz="1400"/>
               <a:t>✅ Yapay zeka nedir, nasıl çalışır</a:t>
             </a:r>
           </a:p>
@@ -6990,6 +8305,7 @@
               <a:defRPr sz="2000" b="1"/>
             </a:pPr>
             <a:r>
+              <a:rPr sz="1400"/>
               <a:t>✅ Yapay zekanın tarihi</a:t>
             </a:r>
           </a:p>
@@ -7001,6 +8317,7 @@
               <a:defRPr sz="2000" b="1"/>
             </a:pPr>
             <a:r>
+              <a:rPr sz="1400"/>
               <a:t>✅ Makine öğrenmesi ve derin öğrenme</a:t>
             </a:r>
           </a:p>
@@ -7012,6 +8329,7 @@
               <a:defRPr sz="2000" b="1"/>
             </a:pPr>
             <a:r>
+              <a:rPr sz="1400"/>
               <a:t>✅ Sesli asistanlar ve günlük kullanım</a:t>
             </a:r>
           </a:p>
@@ -7023,6 +8341,7 @@
               <a:defRPr sz="2000" b="1"/>
             </a:pPr>
             <a:r>
+              <a:rPr sz="1400"/>
               <a:t>✅ Görüntü tanıma teknolojisi</a:t>
             </a:r>
           </a:p>
@@ -7034,6 +8353,7 @@
               <a:defRPr sz="2000" b="1"/>
             </a:pPr>
             <a:r>
+              <a:rPr sz="1400"/>
               <a:t>✅ Öneri sistemleri</a:t>
             </a:r>
           </a:p>
@@ -7045,6 +8365,7 @@
               <a:defRPr sz="2000" b="1"/>
             </a:pPr>
             <a:r>
+              <a:rPr sz="1400"/>
               <a:t>✅ Oyunlarda yapay zeka</a:t>
             </a:r>
           </a:p>
@@ -7056,6 +8377,7 @@
               <a:defRPr sz="2000" b="1"/>
             </a:pPr>
             <a:r>
+              <a:rPr sz="1400"/>
               <a:t>✅ Yaratıcı AI (sanat, müzik, metin)</a:t>
             </a:r>
           </a:p>
@@ -7067,6 +8389,7 @@
               <a:defRPr sz="2000" b="1"/>
             </a:pPr>
             <a:r>
+              <a:rPr sz="1400"/>
               <a:t>✅ Yapay zekanın etik sorunları</a:t>
             </a:r>
           </a:p>
@@ -7078,6 +8401,7 @@
               <a:defRPr sz="2000" b="1"/>
             </a:pPr>
             <a:r>
+              <a:rPr sz="1400"/>
               <a:t>✅ Geleceğin meslekleri</a:t>
             </a:r>
           </a:p>
@@ -7089,6 +8413,7 @@
               <a:defRPr sz="2000" b="1"/>
             </a:pPr>
             <a:r>
+              <a:rPr sz="1400"/>
               <a:t>✅ AI ile neler yapabilirsin</a:t>
             </a:r>
           </a:p>
@@ -7108,6 +8433,7 @@
               <a:defRPr sz="2000" b="1"/>
             </a:pPr>
             <a:r>
+              <a:rPr sz="1400"/>
               <a:t>💡 Anahtar Mesaj:</a:t>
             </a:r>
           </a:p>
@@ -7119,6 +8445,7 @@
               <a:defRPr sz="2000"/>
             </a:pPr>
             <a:r>
+              <a:rPr sz="1400"/>
               <a:t>Yapay zeka geleceğin en önemli teknolojilerinden biri!</a:t>
             </a:r>
           </a:p>
@@ -7130,6 +8457,7 @@
               <a:defRPr sz="2000"/>
             </a:pPr>
             <a:r>
+              <a:rPr sz="1400"/>
               <a:t>Sen de AI ile çalışmayı öğrenebilirsin.</a:t>
             </a:r>
           </a:p>
@@ -7149,6 +8477,7 @@
               <a:defRPr sz="2000" b="1"/>
             </a:pPr>
             <a:r>
+              <a:rPr sz="1400"/>
               <a:t>🎯 Artık yapay zeka konusunda bilinçlisin!</a:t>
             </a:r>
           </a:p>
@@ -7160,6 +8489,7 @@
               <a:defRPr sz="2000"/>
             </a:pPr>
             <a:r>
+              <a:rPr sz="1400"/>
               <a:t>🤖 Geleceği sen şekillendir!</a:t>
             </a:r>
           </a:p>
@@ -7258,6 +8588,7 @@
               <a:defRPr sz="2000"/>
             </a:pPr>
             <a:r>
+              <a:rPr sz="1400"/>
               <a:t>🎥 İzlenecek Videolar:</a:t>
             </a:r>
           </a:p>
@@ -7269,6 +8600,7 @@
               <a:defRPr sz="1800"/>
             </a:pPr>
             <a:r>
+              <a:rPr sz="1400"/>
               <a:t>    • 'Yapay Zeka Nedir?' - TRT Okul</a:t>
             </a:r>
           </a:p>
@@ -7280,6 +8612,7 @@
               <a:defRPr sz="1800"/>
             </a:pPr>
             <a:r>
+              <a:rPr sz="1400"/>
               <a:t>    • 'Makine Öğrenmesi Animasyon'</a:t>
             </a:r>
           </a:p>
@@ -7291,6 +8624,7 @@
               <a:defRPr sz="1800"/>
             </a:pPr>
             <a:r>
+              <a:rPr sz="1400"/>
               <a:t>    • 'AI'nın Tarihi' - Kısa belgesel</a:t>
             </a:r>
           </a:p>
@@ -7302,6 +8636,7 @@
               <a:defRPr sz="1800"/>
             </a:pPr>
             <a:r>
+              <a:rPr sz="1400"/>
               <a:t>    • 'Geleceğin Dünyası' - Bilim kurgu</a:t>
             </a:r>
           </a:p>
@@ -7321,6 +8656,7 @@
               <a:defRPr sz="2000"/>
             </a:pPr>
             <a:r>
+              <a:rPr sz="1400"/>
               <a:t>🌐 Keşfedilecek Siteler:</a:t>
             </a:r>
           </a:p>
@@ -7332,6 +8668,7 @@
               <a:defRPr sz="1800"/>
             </a:pPr>
             <a:r>
+              <a:rPr sz="1400"/>
               <a:t>    • https://teachablemachine.withgoogle.com</a:t>
             </a:r>
           </a:p>
@@ -7343,6 +8680,7 @@
               <a:defRPr sz="1800"/>
             </a:pPr>
             <a:r>
+              <a:rPr sz="1400"/>
               <a:t>    • Scratch AI blokları</a:t>
             </a:r>
           </a:p>
@@ -7354,6 +8692,7 @@
               <a:defRPr sz="1800"/>
             </a:pPr>
             <a:r>
+              <a:rPr sz="1400"/>
               <a:t>    • https://quickdraw.withgoogle.com (AI çizim oyunu)</a:t>
             </a:r>
           </a:p>
@@ -7373,6 +8712,7 @@
               <a:defRPr sz="2000"/>
             </a:pPr>
             <a:r>
+              <a:rPr sz="1400"/>
               <a:t>🎮 Oyunlar:</a:t>
             </a:r>
           </a:p>
@@ -7384,6 +8724,7 @@
               <a:defRPr sz="1800"/>
             </a:pPr>
             <a:r>
+              <a:rPr sz="1400"/>
               <a:t>    • 'Quick, Draw!' - Google AI oyunu</a:t>
             </a:r>
           </a:p>
@@ -7395,6 +8736,7 @@
               <a:defRPr sz="1800"/>
             </a:pPr>
             <a:r>
+              <a:rPr sz="1400"/>
               <a:t>    • 'Akinator' - Tahmin oyunu</a:t>
             </a:r>
           </a:p>
@@ -7414,6 +8756,7 @@
               <a:defRPr sz="2000"/>
             </a:pPr>
             <a:r>
+              <a:rPr sz="1400"/>
               <a:t>📖 Projeler:</a:t>
             </a:r>
           </a:p>
@@ -7425,6 +8768,7 @@
               <a:defRPr sz="1800"/>
             </a:pPr>
             <a:r>
+              <a:rPr sz="1400"/>
               <a:t>    • Teachable Machine ile el hareketi tanıma</a:t>
             </a:r>
           </a:p>
@@ -7436,6 +8780,7 @@
               <a:defRPr sz="1800"/>
             </a:pPr>
             <a:r>
+              <a:rPr sz="1400"/>
               <a:t>    • AI chatbot ile röportaj</a:t>
             </a:r>
           </a:p>
@@ -7447,6 +8792,7 @@
               <a:defRPr sz="1800"/>
             </a:pPr>
             <a:r>
+              <a:rPr sz="1400"/>
               <a:t>    • AI görsel oluşturma projesi</a:t>
             </a:r>
           </a:p>
@@ -7466,6 +8812,7 @@
               <a:defRPr sz="2000" b="1"/>
             </a:pPr>
             <a:r>
+              <a:rPr sz="1400"/>
               <a:t>💡 Yapay zeka ile geleceği keşfet!</a:t>
             </a:r>
           </a:p>
@@ -7917,6 +9264,7 @@
               <a:defRPr sz="2000"/>
             </a:pPr>
             <a:r>
+              <a:rPr sz="1600"/>
               <a:t>Yapay Zeka (AI - Artificial Intelligence)</a:t>
             </a:r>
           </a:p>
@@ -7928,6 +9276,7 @@
               <a:defRPr sz="2000"/>
             </a:pPr>
             <a:r>
+              <a:rPr sz="1600"/>
               <a:t>= Makinelerin insan gibi düşünmesi ve öğrenmesi</a:t>
             </a:r>
           </a:p>
@@ -7947,6 +9296,7 @@
               <a:defRPr sz="2000" b="1"/>
             </a:pPr>
             <a:r>
+              <a:rPr sz="1600"/>
               <a:t>✅ Yapay Zekanın Özellikleri:</a:t>
             </a:r>
           </a:p>
@@ -7958,6 +9308,7 @@
               <a:defRPr sz="1800"/>
             </a:pPr>
             <a:r>
+              <a:rPr sz="1600"/>
               <a:t>    • Öğrenir</a:t>
             </a:r>
           </a:p>
@@ -7969,6 +9320,7 @@
               <a:defRPr sz="1800"/>
             </a:pPr>
             <a:r>
+              <a:rPr sz="1600"/>
               <a:t>    • Problem çözer</a:t>
             </a:r>
           </a:p>
@@ -7980,6 +9332,7 @@
               <a:defRPr sz="1800"/>
             </a:pPr>
             <a:r>
+              <a:rPr sz="1600"/>
               <a:t>    • Karar verir</a:t>
             </a:r>
           </a:p>
@@ -7991,6 +9344,7 @@
               <a:defRPr sz="1800"/>
             </a:pPr>
             <a:r>
+              <a:rPr sz="1600"/>
               <a:t>    • Uyum sağlar</a:t>
             </a:r>
           </a:p>
@@ -8010,6 +9364,7 @@
               <a:defRPr sz="2000" b="1"/>
             </a:pPr>
             <a:r>
+              <a:rPr sz="1600"/>
               <a:t>📌 İnsan Zekası vs Yapay Zeka:</a:t>
             </a:r>
           </a:p>
@@ -8029,6 +9384,7 @@
               <a:defRPr sz="2000"/>
             </a:pPr>
             <a:r>
+              <a:rPr sz="1600"/>
               <a:t>🧠 İnsan Zekası:</a:t>
             </a:r>
           </a:p>
@@ -8040,6 +9396,7 @@
               <a:defRPr sz="1800"/>
             </a:pPr>
             <a:r>
+              <a:rPr sz="1600"/>
               <a:t>    • Duygular hisseder</a:t>
             </a:r>
           </a:p>
@@ -8051,6 +9408,7 @@
               <a:defRPr sz="1800"/>
             </a:pPr>
             <a:r>
+              <a:rPr sz="1600"/>
               <a:t>    • Yaratıcı düşünür</a:t>
             </a:r>
           </a:p>
@@ -8062,6 +9420,7 @@
               <a:defRPr sz="1800"/>
             </a:pPr>
             <a:r>
+              <a:rPr sz="1600"/>
               <a:t>    • Sosyal etkileşim</a:t>
             </a:r>
           </a:p>
@@ -8073,6 +9432,7 @@
               <a:defRPr sz="1800"/>
             </a:pPr>
             <a:r>
+              <a:rPr sz="1600"/>
               <a:t>    • Genel zeka</a:t>
             </a:r>
           </a:p>
@@ -8092,6 +9452,7 @@
               <a:defRPr sz="2000"/>
             </a:pPr>
             <a:r>
+              <a:rPr sz="1600"/>
               <a:t>🤖 Yapay Zeka:</a:t>
             </a:r>
           </a:p>
@@ -8103,6 +9464,7 @@
               <a:defRPr sz="1800"/>
             </a:pPr>
             <a:r>
+              <a:rPr sz="1600"/>
               <a:t>    • Duyguları yoktur</a:t>
             </a:r>
           </a:p>
@@ -8114,6 +9476,7 @@
               <a:defRPr sz="1800"/>
             </a:pPr>
             <a:r>
+              <a:rPr sz="1600"/>
               <a:t>    • Veri analiz eder</a:t>
             </a:r>
           </a:p>
@@ -8125,6 +9488,7 @@
               <a:defRPr sz="1800"/>
             </a:pPr>
             <a:r>
+              <a:rPr sz="1600"/>
               <a:t>    • Belirli görevlerde uzman</a:t>
             </a:r>
           </a:p>
@@ -8136,6 +9500,7 @@
               <a:defRPr sz="1800"/>
             </a:pPr>
             <a:r>
+              <a:rPr sz="1600"/>
               <a:t>    • Dar (spesifik) zeka</a:t>
             </a:r>
           </a:p>
@@ -8155,6 +9520,7 @@
               <a:defRPr sz="2000" b="1"/>
             </a:pPr>
             <a:r>
+              <a:rPr sz="1600"/>
               <a:t>💡 Yapay zeka insan zekasını taklit etmeye çalışır ama aynısı değildir!</a:t>
             </a:r>
           </a:p>
@@ -8253,6 +9619,7 @@
               <a:defRPr sz="2000"/>
             </a:pPr>
             <a:r>
+              <a:rPr sz="1600"/>
               <a:t>Yapay zeka fikri çok eski!</a:t>
             </a:r>
           </a:p>
@@ -8272,6 +9639,7 @@
               <a:defRPr sz="2000" b="1"/>
             </a:pPr>
             <a:r>
+              <a:rPr sz="1600"/>
               <a:t>✅ Önemli Tarihler:</a:t>
             </a:r>
           </a:p>
@@ -8291,6 +9659,7 @@
               <a:defRPr sz="2000"/>
             </a:pPr>
             <a:r>
+              <a:rPr sz="1600"/>
               <a:t>1950 📝 Alan Turing:</a:t>
             </a:r>
           </a:p>
@@ -8302,6 +9671,7 @@
               <a:defRPr sz="1800"/>
             </a:pPr>
             <a:r>
+              <a:rPr sz="1600"/>
               <a:t>    • 'Makineler düşünebilir mi?' sorusu</a:t>
             </a:r>
           </a:p>
@@ -8313,6 +9683,7 @@
               <a:defRPr sz="1800"/>
             </a:pPr>
             <a:r>
+              <a:rPr sz="1600"/>
               <a:t>    • Turing Testi</a:t>
             </a:r>
           </a:p>
@@ -8332,6 +9703,7 @@
               <a:defRPr sz="2000" b="1"/>
             </a:pPr>
             <a:r>
+              <a:rPr sz="1600"/>
               <a:t>1956 🎯 'Yapay Zeka' terimi:</a:t>
             </a:r>
           </a:p>
@@ -8343,6 +9715,7 @@
               <a:defRPr sz="1800"/>
             </a:pPr>
             <a:r>
+              <a:rPr sz="1600"/>
               <a:t>    • Dartmouth Konferansı</a:t>
             </a:r>
           </a:p>
@@ -8354,6 +9727,7 @@
               <a:defRPr sz="1800"/>
             </a:pPr>
             <a:r>
+              <a:rPr sz="1600"/>
               <a:t>    • İlk AI programları</a:t>
             </a:r>
           </a:p>
@@ -8373,6 +9747,7 @@
               <a:defRPr sz="2000"/>
             </a:pPr>
             <a:r>
+              <a:rPr sz="1600"/>
               <a:t>1997 ♟️ Deep Blue:</a:t>
             </a:r>
           </a:p>
@@ -8384,6 +9759,7 @@
               <a:defRPr sz="1800"/>
             </a:pPr>
             <a:r>
+              <a:rPr sz="1600"/>
               <a:t>    • IBM'in satranç bilgisayarı</a:t>
             </a:r>
           </a:p>
@@ -8395,6 +9771,7 @@
               <a:defRPr sz="1800"/>
             </a:pPr>
             <a:r>
+              <a:rPr sz="1600"/>
               <a:t>    • Dünya şampiyonunu yendi</a:t>
             </a:r>
           </a:p>
@@ -8414,6 +9791,7 @@
               <a:defRPr sz="2000"/>
             </a:pPr>
             <a:r>
+              <a:rPr sz="1600"/>
               <a:t>2011 🎤 Siri:</a:t>
             </a:r>
           </a:p>
@@ -8425,6 +9803,7 @@
               <a:defRPr sz="1800"/>
             </a:pPr>
             <a:r>
+              <a:rPr sz="1600"/>
               <a:t>    • İlk popüler sesli asistan</a:t>
             </a:r>
           </a:p>
@@ -8444,6 +9823,7 @@
               <a:defRPr sz="2000"/>
             </a:pPr>
             <a:r>
+              <a:rPr sz="1600"/>
               <a:t>2016 🎮 AlphaGo:</a:t>
             </a:r>
           </a:p>
@@ -8455,6 +9835,7 @@
               <a:defRPr sz="1800"/>
             </a:pPr>
             <a:r>
+              <a:rPr sz="1600"/>
               <a:t>    • Go oyununda dünya şampiyonunu yendi</a:t>
             </a:r>
           </a:p>
@@ -8474,6 +9855,7 @@
               <a:defRPr sz="2000"/>
             </a:pPr>
             <a:r>
+              <a:rPr sz="1600"/>
               <a:t>2022 🎨 ChatGPT, DALL-E:</a:t>
             </a:r>
           </a:p>
@@ -8485,6 +9867,7 @@
               <a:defRPr sz="1800"/>
             </a:pPr>
             <a:r>
+              <a:rPr sz="1600"/>
               <a:t>    • Metin ve görsel üreten AI</a:t>
             </a:r>
           </a:p>
@@ -8504,6 +9887,7 @@
               <a:defRPr sz="2000" b="1"/>
             </a:pPr>
             <a:r>
+              <a:rPr sz="1600"/>
               <a:t>💡 Yapay zeka son 10 yılda çok hızlı gelişti!</a:t>
             </a:r>
           </a:p>
@@ -8602,6 +9986,7 @@
               <a:defRPr sz="2000"/>
             </a:pPr>
             <a:r>
+              <a:rPr sz="1400"/>
               <a:t>Makine Öğrenmesi = Makinelerin deneyimlerden öğrenmesi</a:t>
             </a:r>
           </a:p>
@@ -8621,6 +10006,7 @@
               <a:defRPr sz="2000" b="1"/>
             </a:pPr>
             <a:r>
+              <a:rPr sz="1400"/>
               <a:t>✅ Nasıl Çalışır?</a:t>
             </a:r>
           </a:p>
@@ -8640,6 +10026,7 @@
               <a:defRPr sz="2000"/>
             </a:pPr>
             <a:r>
+              <a:rPr sz="1400"/>
               <a:t>1️⃣ Veri Topla:</a:t>
             </a:r>
           </a:p>
@@ -8651,6 +10038,7 @@
               <a:defRPr sz="1800"/>
             </a:pPr>
             <a:r>
+              <a:rPr sz="1400"/>
               <a:t>    • Binlerce örnek</a:t>
             </a:r>
           </a:p>
@@ -8670,6 +10058,7 @@
               <a:defRPr sz="2000"/>
             </a:pPr>
             <a:r>
+              <a:rPr sz="1400"/>
               <a:t>2️⃣ Öğren:</a:t>
             </a:r>
           </a:p>
@@ -8681,6 +10070,7 @@
               <a:defRPr sz="1800"/>
             </a:pPr>
             <a:r>
+              <a:rPr sz="1400"/>
               <a:t>    • Örneklerdeki kalıpları bul</a:t>
             </a:r>
           </a:p>
@@ -8700,6 +10090,7 @@
               <a:defRPr sz="2000"/>
             </a:pPr>
             <a:r>
+              <a:rPr sz="1400"/>
               <a:t>3️⃣ Tahmin Et:</a:t>
             </a:r>
           </a:p>
@@ -8711,6 +10102,7 @@
               <a:defRPr sz="1800"/>
             </a:pPr>
             <a:r>
+              <a:rPr sz="1400"/>
               <a:t>    • Yeni örneklerde karar ver</a:t>
             </a:r>
           </a:p>
@@ -8730,6 +10122,7 @@
               <a:defRPr sz="2000" b="1"/>
             </a:pPr>
             <a:r>
+              <a:rPr sz="1400"/>
               <a:t>📌 Örnek: Kedi-Köpek Tanıma</a:t>
             </a:r>
           </a:p>
@@ -8749,6 +10142,7 @@
               <a:defRPr sz="2000"/>
             </a:pPr>
             <a:r>
+              <a:rPr sz="1400"/>
               <a:t>1️⃣ Binlerce kedi ve köpek fotoğrafı göster</a:t>
             </a:r>
           </a:p>
@@ -8760,6 +10154,7 @@
               <a:defRPr sz="2000"/>
             </a:pPr>
             <a:r>
+              <a:rPr sz="1400"/>
               <a:t>2️⃣ AI kalıpları öğrenir:</a:t>
             </a:r>
           </a:p>
@@ -8771,6 +10166,7 @@
               <a:defRPr sz="1800"/>
             </a:pPr>
             <a:r>
+              <a:rPr sz="1400"/>
               <a:t>    • Kulak şekli</a:t>
             </a:r>
           </a:p>
@@ -8782,6 +10178,7 @@
               <a:defRPr sz="1800"/>
             </a:pPr>
             <a:r>
+              <a:rPr sz="1400"/>
               <a:t>    • Burun yapısı</a:t>
             </a:r>
           </a:p>
@@ -8793,6 +10190,7 @@
               <a:defRPr sz="1800"/>
             </a:pPr>
             <a:r>
+              <a:rPr sz="1400"/>
               <a:t>    • Vücut ölçüleri</a:t>
             </a:r>
           </a:p>
@@ -8804,6 +10202,7 @@
               <a:defRPr sz="2000"/>
             </a:pPr>
             <a:r>
+              <a:rPr sz="1400"/>
               <a:t>3️⃣ Yeni fotoğraf göster → AI tanır: 'Bu bir kedi!'</a:t>
             </a:r>
           </a:p>
@@ -8823,6 +10222,7 @@
               <a:defRPr sz="2000" b="1"/>
             </a:pPr>
             <a:r>
+              <a:rPr sz="1400"/>
               <a:t>💡 Ne kadar çok veri, o kadar iyi öğrenir!</a:t>
             </a:r>
           </a:p>
@@ -8842,6 +10242,7 @@
               <a:defRPr sz="2000" b="1"/>
             </a:pPr>
             <a:r>
+              <a:rPr sz="1400"/>
               <a:t>🎯 Analoji: Sen de böyle öğrenirsin!</a:t>
             </a:r>
           </a:p>
@@ -8853,6 +10254,7 @@
               <a:defRPr sz="2000"/>
             </a:pPr>
             <a:r>
+              <a:rPr sz="1400"/>
               <a:t>Bir kez elma gördün → Hepsini tanırsın</a:t>
             </a:r>
           </a:p>
@@ -8951,6 +10353,7 @@
               <a:defRPr sz="2000"/>
             </a:pPr>
             <a:r>
+              <a:rPr sz="1400"/>
               <a:t>Derin Öğrenme = Makine öğrenmesinin ileri seviyesi</a:t>
             </a:r>
           </a:p>
@@ -8962,6 +10365,7 @@
               <a:defRPr sz="2000"/>
             </a:pPr>
             <a:r>
+              <a:rPr sz="1400"/>
               <a:t>Yapay sinir ağları kullanır</a:t>
             </a:r>
           </a:p>
@@ -8981,6 +10385,7 @@
               <a:defRPr sz="2000" b="1"/>
             </a:pPr>
             <a:r>
+              <a:rPr sz="1400"/>
               <a:t>✅ Yapay Sinir Ağı:</a:t>
             </a:r>
           </a:p>
@@ -8992,6 +10397,7 @@
               <a:defRPr sz="2000"/>
             </a:pPr>
             <a:r>
+              <a:rPr sz="1400"/>
               <a:t>İnsan beynini taklit eder</a:t>
             </a:r>
           </a:p>
@@ -9011,6 +10417,7 @@
               <a:defRPr sz="2000"/>
             </a:pPr>
             <a:r>
+              <a:rPr sz="1400"/>
               <a:t>🧠 İnsan Beyni:</a:t>
             </a:r>
           </a:p>
@@ -9022,6 +10429,7 @@
               <a:defRPr sz="1800"/>
             </a:pPr>
             <a:r>
+              <a:rPr sz="1400"/>
               <a:t>    • Milyarlarca sinir hücresi (nöron)</a:t>
             </a:r>
           </a:p>
@@ -9033,6 +10441,7 @@
               <a:defRPr sz="1800"/>
             </a:pPr>
             <a:r>
+              <a:rPr sz="1400"/>
               <a:t>    • Birbirine bağlı</a:t>
             </a:r>
           </a:p>
@@ -9044,6 +10453,7 @@
               <a:defRPr sz="1800"/>
             </a:pPr>
             <a:r>
+              <a:rPr sz="1400"/>
               <a:t>    • Bilgi işler</a:t>
             </a:r>
           </a:p>
@@ -9063,6 +10473,7 @@
               <a:defRPr sz="2000"/>
             </a:pPr>
             <a:r>
+              <a:rPr sz="1400"/>
               <a:t>🤖 Yapay Sinir Ağı:</a:t>
             </a:r>
           </a:p>
@@ -9074,6 +10485,7 @@
               <a:defRPr sz="1800"/>
             </a:pPr>
             <a:r>
+              <a:rPr sz="1400"/>
               <a:t>    • Dijital nöronlar</a:t>
             </a:r>
           </a:p>
@@ -9085,6 +10497,7 @@
               <a:defRPr sz="1800"/>
             </a:pPr>
             <a:r>
+              <a:rPr sz="1400"/>
               <a:t>    • Katmanlar halinde</a:t>
             </a:r>
           </a:p>
@@ -9096,6 +10509,7 @@
               <a:defRPr sz="1800"/>
             </a:pPr>
             <a:r>
+              <a:rPr sz="1400"/>
               <a:t>    • Karmaşık kalıpları öğrenir</a:t>
             </a:r>
           </a:p>
@@ -9115,6 +10529,7 @@
               <a:defRPr sz="2000" b="1"/>
             </a:pPr>
             <a:r>
+              <a:rPr sz="1400"/>
               <a:t>📌 Derin Öğrenme Kullanım Alanları:</a:t>
             </a:r>
           </a:p>
@@ -9126,6 +10541,7 @@
               <a:defRPr sz="1800"/>
             </a:pPr>
             <a:r>
+              <a:rPr sz="1400"/>
               <a:t>    • Yüz tanıma (telefon kilidi)</a:t>
             </a:r>
           </a:p>
@@ -9137,6 +10553,7 @@
               <a:defRPr sz="1800"/>
             </a:pPr>
             <a:r>
+              <a:rPr sz="1400"/>
               <a:t>    • Ses tanıma (Siri)</a:t>
             </a:r>
           </a:p>
@@ -9148,6 +10565,7 @@
               <a:defRPr sz="1800"/>
             </a:pPr>
             <a:r>
+              <a:rPr sz="1400"/>
               <a:t>    • Otomatik çeviri (Google Translate)</a:t>
             </a:r>
           </a:p>
@@ -9159,6 +10577,7 @@
               <a:defRPr sz="1800"/>
             </a:pPr>
             <a:r>
+              <a:rPr sz="1400"/>
               <a:t>    • Görüntü oluşturma (AI sanat)</a:t>
             </a:r>
           </a:p>
@@ -9178,6 +10597,7 @@
               <a:defRPr sz="2000" b="1"/>
             </a:pPr>
             <a:r>
+              <a:rPr sz="1400"/>
               <a:t>💡 'Derin' kelimesi:</a:t>
             </a:r>
           </a:p>
@@ -9189,6 +10609,7 @@
               <a:defRPr sz="2000"/>
             </a:pPr>
             <a:r>
+              <a:rPr sz="1400"/>
               <a:t>Çok katmanlı yapay sinir ağlarından gelir</a:t>
             </a:r>
           </a:p>
@@ -9287,6 +10708,7 @@
               <a:defRPr sz="2000"/>
             </a:pPr>
             <a:r>
+              <a:rPr sz="1400"/>
               <a:t>Sesli asistan = Sesinizi anlayan ve yanıt veren yapay zeka</a:t>
             </a:r>
           </a:p>
@@ -9306,6 +10728,7 @@
               <a:defRPr sz="2000" b="1"/>
             </a:pPr>
             <a:r>
+              <a:rPr sz="1400"/>
               <a:t>✅ Popüler Sesli Asistanlar:</a:t>
             </a:r>
           </a:p>
@@ -9317,6 +10740,7 @@
               <a:defRPr sz="1800"/>
             </a:pPr>
             <a:r>
+              <a:rPr sz="1400"/>
               <a:t>    • Siri (Apple) 📱</a:t>
             </a:r>
           </a:p>
@@ -9328,6 +10752,7 @@
               <a:defRPr sz="1800"/>
             </a:pPr>
             <a:r>
+              <a:rPr sz="1400"/>
               <a:t>    • Google Asistan (Google) 🔍</a:t>
             </a:r>
           </a:p>
@@ -9339,6 +10764,7 @@
               <a:defRPr sz="1800"/>
             </a:pPr>
             <a:r>
+              <a:rPr sz="1400"/>
               <a:t>    • Alexa (Amazon) 🔊</a:t>
             </a:r>
           </a:p>
@@ -9350,6 +10776,7 @@
               <a:defRPr sz="1800"/>
             </a:pPr>
             <a:r>
+              <a:rPr sz="1400"/>
               <a:t>    • Cortana (Microsoft) 💻</a:t>
             </a:r>
           </a:p>
@@ -9369,6 +10796,7 @@
               <a:defRPr sz="2000" b="1"/>
             </a:pPr>
             <a:r>
+              <a:rPr sz="1400"/>
               <a:t>📌 Ne Yapabilirler?</a:t>
             </a:r>
           </a:p>
@@ -9380,6 +10808,7 @@
               <a:defRPr sz="1800"/>
             </a:pPr>
             <a:r>
+              <a:rPr sz="1400"/>
               <a:t>    • Soru cevapla ('Hava nasıl?')</a:t>
             </a:r>
           </a:p>
@@ -9391,6 +10820,7 @@
               <a:defRPr sz="1800"/>
             </a:pPr>
             <a:r>
+              <a:rPr sz="1400"/>
               <a:t>    • Alarm kur</a:t>
             </a:r>
           </a:p>
@@ -9402,6 +10832,7 @@
               <a:defRPr sz="1800"/>
             </a:pPr>
             <a:r>
+              <a:rPr sz="1400"/>
               <a:t>    • Müzik çal</a:t>
             </a:r>
           </a:p>
@@ -9413,6 +10844,7 @@
               <a:defRPr sz="1800"/>
             </a:pPr>
             <a:r>
+              <a:rPr sz="1400"/>
               <a:t>    • Hesaplama yap</a:t>
             </a:r>
           </a:p>
@@ -9424,6 +10856,7 @@
               <a:defRPr sz="1800"/>
             </a:pPr>
             <a:r>
+              <a:rPr sz="1400"/>
               <a:t>    • Akıllı ev kontrolü (ışıklar, klima)</a:t>
             </a:r>
           </a:p>
@@ -9443,6 +10876,7 @@
               <a:defRPr sz="2000"/>
             </a:pPr>
             <a:r>
+              <a:rPr sz="1400"/>
               <a:t>⚙️ Nasıl Çalışır?</a:t>
             </a:r>
           </a:p>
@@ -9462,6 +10896,7 @@
               <a:defRPr sz="2000"/>
             </a:pPr>
             <a:r>
+              <a:rPr sz="1400"/>
               <a:t>1️⃣ Ses Tanıma:</a:t>
             </a:r>
           </a:p>
@@ -9473,6 +10908,7 @@
               <a:defRPr sz="1800"/>
             </a:pPr>
             <a:r>
+              <a:rPr sz="1400"/>
               <a:t>    • Sesini metne çevirir</a:t>
             </a:r>
           </a:p>
@@ -9492,6 +10928,7 @@
               <a:defRPr sz="2000"/>
             </a:pPr>
             <a:r>
+              <a:rPr sz="1400"/>
               <a:t>2️⃣ Doğal Dil İşleme:</a:t>
             </a:r>
           </a:p>
@@ -9503,6 +10940,7 @@
               <a:defRPr sz="1800"/>
             </a:pPr>
             <a:r>
+              <a:rPr sz="1400"/>
               <a:t>    • Cümleyi anlar</a:t>
             </a:r>
           </a:p>
@@ -9522,6 +10960,7 @@
               <a:defRPr sz="2000"/>
             </a:pPr>
             <a:r>
+              <a:rPr sz="1400"/>
               <a:t>3️⃣ İşlem:</a:t>
             </a:r>
           </a:p>
@@ -9533,6 +10972,7 @@
               <a:defRPr sz="1800"/>
             </a:pPr>
             <a:r>
+              <a:rPr sz="1400"/>
               <a:t>    • Cevap bulur veya görev yapar</a:t>
             </a:r>
           </a:p>
@@ -9552,6 +10992,7 @@
               <a:defRPr sz="2000"/>
             </a:pPr>
             <a:r>
+              <a:rPr sz="1400"/>
               <a:t>4️⃣ Yanıt:</a:t>
             </a:r>
           </a:p>
@@ -9563,6 +11004,7 @@
               <a:defRPr sz="1800"/>
             </a:pPr>
             <a:r>
+              <a:rPr sz="1400"/>
               <a:t>    • Sesli veya ekranda gösterir</a:t>
             </a:r>
           </a:p>
@@ -9661,6 +11103,7 @@
               <a:defRPr sz="2000"/>
             </a:pPr>
             <a:r>
+              <a:rPr sz="1400"/>
               <a:t>Görüntü tanıma = AI'nın fotoğraflarda/videolarda nesneleri görmesi</a:t>
             </a:r>
           </a:p>
@@ -9680,6 +11123,7 @@
               <a:defRPr sz="2000" b="1"/>
             </a:pPr>
             <a:r>
+              <a:rPr sz="1400"/>
               <a:t>✅ Günlük Hayatta Kullanımı:</a:t>
             </a:r>
           </a:p>
@@ -9699,6 +11143,7 @@
               <a:defRPr sz="2000"/>
             </a:pPr>
             <a:r>
+              <a:rPr sz="1400"/>
               <a:t>📱 Telefon Kilit Açma:</a:t>
             </a:r>
           </a:p>
@@ -9710,6 +11155,7 @@
               <a:defRPr sz="1800"/>
             </a:pPr>
             <a:r>
+              <a:rPr sz="1400"/>
               <a:t>    • Yüz tanıma (Face ID)</a:t>
             </a:r>
           </a:p>
@@ -9721,6 +11167,7 @@
               <a:defRPr sz="1800"/>
             </a:pPr>
             <a:r>
+              <a:rPr sz="1400"/>
               <a:t>    • Parmak izi</a:t>
             </a:r>
           </a:p>
@@ -9740,6 +11187,7 @@
               <a:defRPr sz="2000"/>
             </a:pPr>
             <a:r>
+              <a:rPr sz="1400"/>
               <a:t>📷 Fotoğraf Düzenleme:</a:t>
             </a:r>
           </a:p>
@@ -9751,6 +11199,7 @@
               <a:defRPr sz="1800"/>
             </a:pPr>
             <a:r>
+              <a:rPr sz="1400"/>
               <a:t>    • Google Photos: 'kedi' ara → tüm kedi fotoğrafları</a:t>
             </a:r>
           </a:p>
@@ -9762,6 +11211,7 @@
               <a:defRPr sz="1800"/>
             </a:pPr>
             <a:r>
+              <a:rPr sz="1400"/>
               <a:t>    • Instagram filtreleri (yüzü bulur)</a:t>
             </a:r>
           </a:p>
@@ -9781,6 +11231,7 @@
               <a:defRPr sz="2000"/>
             </a:pPr>
             <a:r>
+              <a:rPr sz="1400"/>
               <a:t>🚗 Otonom Araçlar:</a:t>
             </a:r>
           </a:p>
@@ -9792,6 +11243,7 @@
               <a:defRPr sz="1800"/>
             </a:pPr>
             <a:r>
+              <a:rPr sz="1400"/>
               <a:t>    • Yayaları tanır</a:t>
             </a:r>
           </a:p>
@@ -9803,6 +11255,7 @@
               <a:defRPr sz="1800"/>
             </a:pPr>
             <a:r>
+              <a:rPr sz="1400"/>
               <a:t>    • Trafik işaretlerini okur</a:t>
             </a:r>
           </a:p>
@@ -9822,6 +11275,7 @@
               <a:defRPr sz="2000"/>
             </a:pPr>
             <a:r>
+              <a:rPr sz="1400"/>
               <a:t>🏥 Tıp:</a:t>
             </a:r>
           </a:p>
@@ -9833,6 +11287,7 @@
               <a:defRPr sz="1800"/>
             </a:pPr>
             <a:r>
+              <a:rPr sz="1400"/>
               <a:t>    • X-ray'de hastalık tespiti</a:t>
             </a:r>
           </a:p>
@@ -9852,6 +11307,7 @@
               <a:defRPr sz="2000"/>
             </a:pPr>
             <a:r>
+              <a:rPr sz="1400"/>
               <a:t>🔍 Güvenlik:</a:t>
             </a:r>
           </a:p>
@@ -9863,6 +11319,7 @@
               <a:defRPr sz="1800"/>
             </a:pPr>
             <a:r>
+              <a:rPr sz="1400"/>
               <a:t>    • Havalimanlarında yüz tanıma</a:t>
             </a:r>
           </a:p>
@@ -9882,6 +11339,7 @@
               <a:defRPr sz="2000" b="1"/>
             </a:pPr>
             <a:r>
+              <a:rPr sz="1400"/>
               <a:t>📌 Nasıl Çalışır?</a:t>
             </a:r>
           </a:p>
@@ -9893,6 +11351,7 @@
               <a:defRPr sz="1800"/>
             </a:pPr>
             <a:r>
+              <a:rPr sz="1400"/>
               <a:t>    • Milyonlarca fotoğraf ile eğitilir</a:t>
             </a:r>
           </a:p>
@@ -9904,6 +11363,7 @@
               <a:defRPr sz="1800"/>
             </a:pPr>
             <a:r>
+              <a:rPr sz="1400"/>
               <a:t>    • Pikselleri analiz eder</a:t>
             </a:r>
           </a:p>
@@ -9915,6 +11375,7 @@
               <a:defRPr sz="1800"/>
             </a:pPr>
             <a:r>
+              <a:rPr sz="1400"/>
               <a:t>    • Kalıpları bulur</a:t>
             </a:r>
           </a:p>
@@ -9926,6 +11387,7 @@
               <a:defRPr sz="1800"/>
             </a:pPr>
             <a:r>
+              <a:rPr sz="1400"/>
               <a:t>    • Nesneyi tanır</a:t>
             </a:r>
           </a:p>
@@ -9945,6 +11407,7 @@
               <a:defRPr sz="2000" b="1"/>
             </a:pPr>
             <a:r>
+              <a:rPr sz="1400"/>
               <a:t>💡 AI artık bazı şeyleri insandan daha iyi görüyor!</a:t>
             </a:r>
           </a:p>
@@ -10043,6 +11506,7 @@
               <a:defRPr sz="2000"/>
             </a:pPr>
             <a:r>
+              <a:rPr sz="1400"/>
               <a:t>Öneri sistemi = Senin için kişiselleştirilmiş öneriler</a:t>
             </a:r>
           </a:p>
@@ -10062,6 +11526,7 @@
               <a:defRPr sz="2000" b="1"/>
             </a:pPr>
             <a:r>
+              <a:rPr sz="1400"/>
               <a:t>✅ Nerede Kullanılıyor?</a:t>
             </a:r>
           </a:p>
@@ -10081,6 +11546,7 @@
               <a:defRPr sz="2000"/>
             </a:pPr>
             <a:r>
+              <a:rPr sz="1400"/>
               <a:t>📺 YouTube:</a:t>
             </a:r>
           </a:p>
@@ -10092,6 +11558,7 @@
               <a:defRPr sz="1800"/>
             </a:pPr>
             <a:r>
+              <a:rPr sz="1400"/>
               <a:t>    • 'Sana özel videolar'</a:t>
             </a:r>
           </a:p>
@@ -10103,6 +11570,7 @@
               <a:defRPr sz="1800"/>
             </a:pPr>
             <a:r>
+              <a:rPr sz="1400"/>
               <a:t>    • İzlediklerine göre öneri</a:t>
             </a:r>
           </a:p>
@@ -10122,6 +11590,7 @@
               <a:defRPr sz="2000"/>
             </a:pPr>
             <a:r>
+              <a:rPr sz="1400"/>
               <a:t>🎵 Spotify:</a:t>
             </a:r>
           </a:p>
@@ -10133,6 +11602,7 @@
               <a:defRPr sz="1800"/>
             </a:pPr>
             <a:r>
+              <a:rPr sz="1400"/>
               <a:t>    • 'Keşfet' çalma listesi</a:t>
             </a:r>
           </a:p>
@@ -10144,6 +11614,7 @@
               <a:defRPr sz="1800"/>
             </a:pPr>
             <a:r>
+              <a:rPr sz="1400"/>
               <a:t>    • Dinlediğin müziğe benzer şarkılar</a:t>
             </a:r>
           </a:p>
@@ -10163,6 +11634,7 @@
               <a:defRPr sz="2000"/>
             </a:pPr>
             <a:r>
+              <a:rPr sz="1400"/>
               <a:t>🛒 Amazon/Trendyol:</a:t>
             </a:r>
           </a:p>
@@ -10174,6 +11646,7 @@
               <a:defRPr sz="1800"/>
             </a:pPr>
             <a:r>
+              <a:rPr sz="1400"/>
               <a:t>    • 'Bunları da beğenebilirsin'</a:t>
             </a:r>
           </a:p>
@@ -10193,6 +11666,7 @@
               <a:defRPr sz="2000"/>
             </a:pPr>
             <a:r>
+              <a:rPr sz="1400"/>
               <a:t>🎮 Netflix:</a:t>
             </a:r>
           </a:p>
@@ -10204,6 +11678,7 @@
               <a:defRPr sz="1800"/>
             </a:pPr>
             <a:r>
+              <a:rPr sz="1400"/>
               <a:t>    • Film/dizi önerileri</a:t>
             </a:r>
           </a:p>
@@ -10223,6 +11698,7 @@
               <a:defRPr sz="2000"/>
             </a:pPr>
             <a:r>
+              <a:rPr sz="1400"/>
               <a:t>📱 Instagram/TikTok:</a:t>
             </a:r>
           </a:p>
@@ -10234,6 +11710,7 @@
               <a:defRPr sz="1800"/>
             </a:pPr>
             <a:r>
+              <a:rPr sz="1400"/>
               <a:t>    • 'Keşfet' sayfası</a:t>
             </a:r>
           </a:p>
@@ -10253,6 +11730,7 @@
               <a:defRPr sz="2000"/>
             </a:pPr>
             <a:r>
+              <a:rPr sz="1400"/>
               <a:t>⚙️ Nasıl Çalışır?</a:t>
             </a:r>
           </a:p>
@@ -10264,6 +11742,7 @@
               <a:defRPr sz="1800"/>
             </a:pPr>
             <a:r>
+              <a:rPr sz="1400"/>
               <a:t>    • İzlediklerini, beğendiklerini kaydeder</a:t>
             </a:r>
           </a:p>
@@ -10275,6 +11754,7 @@
               <a:defRPr sz="1800"/>
             </a:pPr>
             <a:r>
+              <a:rPr sz="1400"/>
               <a:t>    • Benzer kullanıcıları bulur</a:t>
             </a:r>
           </a:p>
@@ -10286,6 +11766,7 @@
               <a:defRPr sz="1800"/>
             </a:pPr>
             <a:r>
+              <a:rPr sz="1400"/>
               <a:t>    • Onların beğendiklerini sana önerir</a:t>
             </a:r>
           </a:p>
@@ -10305,6 +11786,7 @@
               <a:defRPr sz="2000" b="1"/>
             </a:pPr>
             <a:r>
+              <a:rPr sz="1400"/>
               <a:t>💡 Hem yararlı hem tehlikeli:</a:t>
             </a:r>
           </a:p>
@@ -10316,6 +11798,7 @@
               <a:defRPr sz="2000" b="1"/>
             </a:pPr>
             <a:r>
+              <a:rPr sz="1400"/>
               <a:t>✅ İstediğin içeriği bulursun</a:t>
             </a:r>
           </a:p>
@@ -10327,6 +11810,7 @@
               <a:defRPr sz="2000"/>
             </a:pPr>
             <a:r>
+              <a:rPr sz="1400"/>
               <a:t>❌ 'Filtre balonu' - Sadece benzer şeyler görürsün</a:t>
             </a:r>
           </a:p>

--- a/sunumlar/5-sinif-unite5-yapay-zeka-DETAYLI.pptx
+++ b/sunumlar/5-sinif-unite5-yapay-zeka-DETAYLI.pptx
@@ -5789,7 +5789,7 @@
           <a:noFill/>
         </p:spPr>
         <p:txBody>
-          <a:bodyPr wrap="none">
+          <a:bodyPr wrap="square">
             <a:spAutoFit/>
           </a:bodyPr>
           <a:lstStyle/>
@@ -5824,7 +5824,7 @@
           <a:noFill/>
         </p:spPr>
         <p:txBody>
-          <a:bodyPr wrap="none">
+          <a:bodyPr wrap="square">
             <a:spAutoFit/>
           </a:bodyPr>
           <a:lstStyle/>
@@ -5872,7 +5872,7 @@
         </p:nvSpPr>
         <p:spPr/>
         <p:txBody>
-          <a:bodyPr/>
+          <a:bodyPr wrap="square"/>
           <a:lstStyle/>
           <a:p>
             <a:pPr>
@@ -5926,308 +5926,401 @@
             <a:spAutoFit/>
           </a:bodyPr>
           <a:lstStyle/>
-          <a:p/>
-          <a:p>
-            <a:pPr>
-              <a:spcAft>
-                <a:spcPts val="1200"/>
-              </a:spcAft>
-              <a:defRPr sz="2000"/>
-            </a:pPr>
-            <a:r>
-              <a:rPr sz="1400"/>
+          <a:p>
+            <a:pPr>
+              <a:lnSpc>
+                <a:spcPct val="90000"/>
+              </a:lnSpc>
+              <a:spcAft>
+                <a:spcPts val="300"/>
+              </a:spcAft>
+            </a:pPr>
+          </a:p>
+          <a:p>
+            <a:pPr>
+              <a:lnSpc>
+                <a:spcPct val="90000"/>
+              </a:lnSpc>
+              <a:spcAft>
+                <a:spcPts val="300"/>
+              </a:spcAft>
+              <a:defRPr sz="2000"/>
+            </a:pPr>
+            <a:r>
+              <a:rPr sz="1300"/>
               <a:t>Oyunlarda AI = Rakip karakterlerin zeki davranması</a:t>
             </a:r>
           </a:p>
           <a:p>
             <a:pPr>
-              <a:spcAft>
-                <a:spcPts val="1200"/>
-              </a:spcAft>
-              <a:defRPr sz="2000"/>
-            </a:pPr>
-          </a:p>
-          <a:p>
-            <a:pPr>
-              <a:spcAft>
-                <a:spcPts val="1200"/>
+              <a:lnSpc>
+                <a:spcPct val="90000"/>
+              </a:lnSpc>
+              <a:spcAft>
+                <a:spcPts val="300"/>
+              </a:spcAft>
+              <a:defRPr sz="2000"/>
+            </a:pPr>
+          </a:p>
+          <a:p>
+            <a:pPr>
+              <a:lnSpc>
+                <a:spcPct val="90000"/>
+              </a:lnSpc>
+              <a:spcAft>
+                <a:spcPts val="300"/>
               </a:spcAft>
               <a:defRPr sz="2000" b="1"/>
             </a:pPr>
             <a:r>
-              <a:rPr sz="1400"/>
+              <a:rPr sz="1300"/>
               <a:t>✅ Oyun AI'sı Örnekleri:</a:t>
             </a:r>
           </a:p>
           <a:p>
             <a:pPr>
-              <a:spcAft>
-                <a:spcPts val="1200"/>
-              </a:spcAft>
-              <a:defRPr sz="2000"/>
-            </a:pPr>
-          </a:p>
-          <a:p>
-            <a:pPr>
-              <a:spcAft>
-                <a:spcPts val="1200"/>
+              <a:lnSpc>
+                <a:spcPct val="90000"/>
+              </a:lnSpc>
+              <a:spcAft>
+                <a:spcPts val="300"/>
+              </a:spcAft>
+              <a:defRPr sz="2000"/>
+            </a:pPr>
+          </a:p>
+          <a:p>
+            <a:pPr>
+              <a:lnSpc>
+                <a:spcPct val="90000"/>
+              </a:lnSpc>
+              <a:spcAft>
+                <a:spcPts val="300"/>
               </a:spcAft>
               <a:defRPr sz="2000" b="1"/>
             </a:pPr>
             <a:r>
-              <a:rPr sz="1400"/>
+              <a:rPr sz="1300"/>
               <a:t>🎯 NPC (Non-Player Character):</a:t>
             </a:r>
           </a:p>
           <a:p>
             <a:pPr lvl="1">
-              <a:spcAft>
-                <a:spcPts val="1200"/>
-              </a:spcAft>
-              <a:defRPr sz="1800"/>
-            </a:pPr>
-            <a:r>
-              <a:rPr sz="1400"/>
+              <a:lnSpc>
+                <a:spcPct val="90000"/>
+              </a:lnSpc>
+              <a:spcAft>
+                <a:spcPts val="300"/>
+              </a:spcAft>
+              <a:defRPr sz="1800"/>
+            </a:pPr>
+            <a:r>
+              <a:rPr sz="1300"/>
               <a:t>    • Düşmanlar</a:t>
             </a:r>
           </a:p>
           <a:p>
             <a:pPr lvl="1">
-              <a:spcAft>
-                <a:spcPts val="1200"/>
-              </a:spcAft>
-              <a:defRPr sz="1800"/>
-            </a:pPr>
-            <a:r>
-              <a:rPr sz="1400"/>
+              <a:lnSpc>
+                <a:spcPct val="90000"/>
+              </a:lnSpc>
+              <a:spcAft>
+                <a:spcPts val="300"/>
+              </a:spcAft>
+              <a:defRPr sz="1800"/>
+            </a:pPr>
+            <a:r>
+              <a:rPr sz="1300"/>
               <a:t>    • Takım arkadaşları</a:t>
             </a:r>
           </a:p>
           <a:p>
             <a:pPr lvl="1">
-              <a:spcAft>
-                <a:spcPts val="1200"/>
-              </a:spcAft>
-              <a:defRPr sz="1800"/>
-            </a:pPr>
-            <a:r>
-              <a:rPr sz="1400"/>
+              <a:lnSpc>
+                <a:spcPct val="90000"/>
+              </a:lnSpc>
+              <a:spcAft>
+                <a:spcPts val="300"/>
+              </a:spcAft>
+              <a:defRPr sz="1800"/>
+            </a:pPr>
+            <a:r>
+              <a:rPr sz="1300"/>
               <a:t>    • Köylüler, karakterler</a:t>
             </a:r>
           </a:p>
           <a:p>
             <a:pPr>
-              <a:spcAft>
-                <a:spcPts val="1200"/>
-              </a:spcAft>
-              <a:defRPr sz="2000"/>
-            </a:pPr>
-          </a:p>
-          <a:p>
-            <a:pPr>
-              <a:spcAft>
-                <a:spcPts val="1200"/>
+              <a:lnSpc>
+                <a:spcPct val="90000"/>
+              </a:lnSpc>
+              <a:spcAft>
+                <a:spcPts val="300"/>
+              </a:spcAft>
+              <a:defRPr sz="2000"/>
+            </a:pPr>
+          </a:p>
+          <a:p>
+            <a:pPr>
+              <a:lnSpc>
+                <a:spcPct val="90000"/>
+              </a:lnSpc>
+              <a:spcAft>
+                <a:spcPts val="300"/>
               </a:spcAft>
               <a:defRPr sz="2000" b="1"/>
             </a:pPr>
             <a:r>
-              <a:rPr sz="1400"/>
+              <a:rPr sz="1300"/>
               <a:t>📌 AI Ne Yapar?</a:t>
             </a:r>
           </a:p>
           <a:p>
             <a:pPr lvl="1">
-              <a:spcAft>
-                <a:spcPts val="1200"/>
-              </a:spcAft>
-              <a:defRPr sz="1800"/>
-            </a:pPr>
-            <a:r>
-              <a:rPr sz="1400"/>
+              <a:lnSpc>
+                <a:spcPct val="90000"/>
+              </a:lnSpc>
+              <a:spcAft>
+                <a:spcPts val="300"/>
+              </a:spcAft>
+              <a:defRPr sz="1800"/>
+            </a:pPr>
+            <a:r>
+              <a:rPr sz="1300"/>
               <a:t>    • Seni takip eder</a:t>
             </a:r>
           </a:p>
           <a:p>
             <a:pPr lvl="1">
-              <a:spcAft>
-                <a:spcPts val="1200"/>
-              </a:spcAft>
-              <a:defRPr sz="1800"/>
-            </a:pPr>
-            <a:r>
-              <a:rPr sz="1400"/>
+              <a:lnSpc>
+                <a:spcPct val="90000"/>
+              </a:lnSpc>
+              <a:spcAft>
+                <a:spcPts val="300"/>
+              </a:spcAft>
+              <a:defRPr sz="1800"/>
+            </a:pPr>
+            <a:r>
+              <a:rPr sz="1300"/>
               <a:t>    • Stratejik kararlar verir</a:t>
             </a:r>
           </a:p>
           <a:p>
             <a:pPr lvl="1">
-              <a:spcAft>
-                <a:spcPts val="1200"/>
-              </a:spcAft>
-              <a:defRPr sz="1800"/>
-            </a:pPr>
-            <a:r>
-              <a:rPr sz="1400"/>
+              <a:lnSpc>
+                <a:spcPct val="90000"/>
+              </a:lnSpc>
+              <a:spcAft>
+                <a:spcPts val="300"/>
+              </a:spcAft>
+              <a:defRPr sz="1800"/>
+            </a:pPr>
+            <a:r>
+              <a:rPr sz="1300"/>
               <a:t>    • Engelleri aşar</a:t>
             </a:r>
           </a:p>
           <a:p>
             <a:pPr lvl="1">
-              <a:spcAft>
-                <a:spcPts val="1200"/>
-              </a:spcAft>
-              <a:defRPr sz="1800"/>
-            </a:pPr>
-            <a:r>
-              <a:rPr sz="1400"/>
+              <a:lnSpc>
+                <a:spcPct val="90000"/>
+              </a:lnSpc>
+              <a:spcAft>
+                <a:spcPts val="300"/>
+              </a:spcAft>
+              <a:defRPr sz="1800"/>
+            </a:pPr>
+            <a:r>
+              <a:rPr sz="1300"/>
               <a:t>    • Zorluğa göre uyum sağlar</a:t>
             </a:r>
           </a:p>
           <a:p>
             <a:pPr>
-              <a:spcAft>
-                <a:spcPts val="1200"/>
-              </a:spcAft>
-              <a:defRPr sz="2000"/>
-            </a:pPr>
-          </a:p>
-          <a:p>
-            <a:pPr>
-              <a:spcAft>
-                <a:spcPts val="1200"/>
-              </a:spcAft>
-              <a:defRPr sz="2000"/>
-            </a:pPr>
-            <a:r>
-              <a:rPr sz="1400"/>
+              <a:lnSpc>
+                <a:spcPct val="90000"/>
+              </a:lnSpc>
+              <a:spcAft>
+                <a:spcPts val="300"/>
+              </a:spcAft>
+              <a:defRPr sz="2000"/>
+            </a:pPr>
+          </a:p>
+          <a:p>
+            <a:pPr>
+              <a:lnSpc>
+                <a:spcPct val="90000"/>
+              </a:lnSpc>
+              <a:spcAft>
+                <a:spcPts val="300"/>
+              </a:spcAft>
+              <a:defRPr sz="2000"/>
+            </a:pPr>
+            <a:r>
+              <a:rPr sz="1300"/>
               <a:t>🎮 Popüler Örnekler:</a:t>
             </a:r>
           </a:p>
           <a:p>
             <a:pPr>
-              <a:spcAft>
-                <a:spcPts val="1200"/>
-              </a:spcAft>
-              <a:defRPr sz="2000"/>
-            </a:pPr>
-          </a:p>
-          <a:p>
-            <a:pPr>
-              <a:spcAft>
-                <a:spcPts val="1200"/>
-              </a:spcAft>
-              <a:defRPr sz="2000"/>
-            </a:pPr>
-            <a:r>
-              <a:rPr sz="1400"/>
+              <a:lnSpc>
+                <a:spcPct val="90000"/>
+              </a:lnSpc>
+              <a:spcAft>
+                <a:spcPts val="300"/>
+              </a:spcAft>
+              <a:defRPr sz="2000"/>
+            </a:pPr>
+          </a:p>
+          <a:p>
+            <a:pPr>
+              <a:lnSpc>
+                <a:spcPct val="90000"/>
+              </a:lnSpc>
+              <a:spcAft>
+                <a:spcPts val="300"/>
+              </a:spcAft>
+              <a:defRPr sz="2000"/>
+            </a:pPr>
+            <a:r>
+              <a:rPr sz="1300"/>
               <a:t>♟️ Satranç/Dama:</a:t>
             </a:r>
           </a:p>
           <a:p>
             <a:pPr lvl="1">
-              <a:spcAft>
-                <a:spcPts val="1200"/>
-              </a:spcAft>
-              <a:defRPr sz="1800"/>
-            </a:pPr>
-            <a:r>
-              <a:rPr sz="1400"/>
+              <a:lnSpc>
+                <a:spcPct val="90000"/>
+              </a:lnSpc>
+              <a:spcAft>
+                <a:spcPts val="300"/>
+              </a:spcAft>
+              <a:defRPr sz="1800"/>
+            </a:pPr>
+            <a:r>
+              <a:rPr sz="1300"/>
               <a:t>    • Birkaç hamle önceden düşünür</a:t>
             </a:r>
           </a:p>
           <a:p>
             <a:pPr>
-              <a:spcAft>
-                <a:spcPts val="1200"/>
-              </a:spcAft>
-              <a:defRPr sz="2000"/>
-            </a:pPr>
-          </a:p>
-          <a:p>
-            <a:pPr>
-              <a:spcAft>
-                <a:spcPts val="1200"/>
-              </a:spcAft>
-              <a:defRPr sz="2000"/>
-            </a:pPr>
-            <a:r>
-              <a:rPr sz="1400"/>
+              <a:lnSpc>
+                <a:spcPct val="90000"/>
+              </a:lnSpc>
+              <a:spcAft>
+                <a:spcPts val="300"/>
+              </a:spcAft>
+              <a:defRPr sz="2000"/>
+            </a:pPr>
+          </a:p>
+          <a:p>
+            <a:pPr>
+              <a:lnSpc>
+                <a:spcPct val="90000"/>
+              </a:lnSpc>
+              <a:spcAft>
+                <a:spcPts val="300"/>
+              </a:spcAft>
+              <a:defRPr sz="2000"/>
+            </a:pPr>
+            <a:r>
+              <a:rPr sz="1300"/>
               <a:t>🧟 Minecraft Mob'ları:</a:t>
             </a:r>
           </a:p>
           <a:p>
             <a:pPr lvl="1">
-              <a:spcAft>
-                <a:spcPts val="1200"/>
-              </a:spcAft>
-              <a:defRPr sz="1800"/>
-            </a:pPr>
-            <a:r>
-              <a:rPr sz="1400"/>
+              <a:lnSpc>
+                <a:spcPct val="90000"/>
+              </a:lnSpc>
+              <a:spcAft>
+                <a:spcPts val="300"/>
+              </a:spcAft>
+              <a:defRPr sz="1800"/>
+            </a:pPr>
+            <a:r>
+              <a:rPr sz="1300"/>
               <a:t>    • Zombie seni bulur ve kovalar</a:t>
             </a:r>
           </a:p>
           <a:p>
             <a:pPr lvl="1">
-              <a:spcAft>
-                <a:spcPts val="1200"/>
-              </a:spcAft>
-              <a:defRPr sz="1800"/>
-            </a:pPr>
-            <a:r>
-              <a:rPr sz="1400"/>
+              <a:lnSpc>
+                <a:spcPct val="90000"/>
+              </a:lnSpc>
+              <a:spcAft>
+                <a:spcPts val="300"/>
+              </a:spcAft>
+              <a:defRPr sz="1800"/>
+            </a:pPr>
+            <a:r>
+              <a:rPr sz="1300"/>
               <a:t>    • Creeper yaklaşır ve patlar</a:t>
             </a:r>
           </a:p>
           <a:p>
             <a:pPr>
-              <a:spcAft>
-                <a:spcPts val="1200"/>
-              </a:spcAft>
-              <a:defRPr sz="2000"/>
-            </a:pPr>
-          </a:p>
-          <a:p>
-            <a:pPr>
-              <a:spcAft>
-                <a:spcPts val="1200"/>
-              </a:spcAft>
-              <a:defRPr sz="2000"/>
-            </a:pPr>
-            <a:r>
-              <a:rPr sz="1400"/>
+              <a:lnSpc>
+                <a:spcPct val="90000"/>
+              </a:lnSpc>
+              <a:spcAft>
+                <a:spcPts val="300"/>
+              </a:spcAft>
+              <a:defRPr sz="2000"/>
+            </a:pPr>
+          </a:p>
+          <a:p>
+            <a:pPr>
+              <a:lnSpc>
+                <a:spcPct val="90000"/>
+              </a:lnSpc>
+              <a:spcAft>
+                <a:spcPts val="300"/>
+              </a:spcAft>
+              <a:defRPr sz="2000"/>
+            </a:pPr>
+            <a:r>
+              <a:rPr sz="1300"/>
               <a:t>🏎️ Yarış Oyunları:</a:t>
             </a:r>
           </a:p>
           <a:p>
             <a:pPr lvl="1">
-              <a:spcAft>
-                <a:spcPts val="1200"/>
-              </a:spcAft>
-              <a:defRPr sz="1800"/>
-            </a:pPr>
-            <a:r>
-              <a:rPr sz="1400"/>
+              <a:lnSpc>
+                <a:spcPct val="90000"/>
+              </a:lnSpc>
+              <a:spcAft>
+                <a:spcPts val="300"/>
+              </a:spcAft>
+              <a:defRPr sz="1800"/>
+            </a:pPr>
+            <a:r>
+              <a:rPr sz="1300"/>
               <a:t>    • Rakip arabalar akıllıca yarışır</a:t>
             </a:r>
           </a:p>
           <a:p>
             <a:pPr>
-              <a:spcAft>
-                <a:spcPts val="1200"/>
-              </a:spcAft>
-              <a:defRPr sz="2000"/>
-            </a:pPr>
-          </a:p>
-          <a:p>
-            <a:pPr>
-              <a:spcAft>
-                <a:spcPts val="1200"/>
+              <a:lnSpc>
+                <a:spcPct val="90000"/>
+              </a:lnSpc>
+              <a:spcAft>
+                <a:spcPts val="300"/>
+              </a:spcAft>
+              <a:defRPr sz="2000"/>
+            </a:pPr>
+          </a:p>
+          <a:p>
+            <a:pPr>
+              <a:lnSpc>
+                <a:spcPct val="90000"/>
+              </a:lnSpc>
+              <a:spcAft>
+                <a:spcPts val="300"/>
               </a:spcAft>
               <a:defRPr sz="2000" b="1"/>
             </a:pPr>
             <a:r>
-              <a:rPr sz="1400"/>
+              <a:rPr sz="1300"/>
               <a:t>💡 Oyun AI'sı ne kadar iyi olursa, oyun o kadar eğlenceli!</a:t>
             </a:r>
           </a:p>
@@ -6263,7 +6356,7 @@
         </p:nvSpPr>
         <p:spPr/>
         <p:txBody>
-          <a:bodyPr/>
+          <a:bodyPr wrap="square"/>
           <a:lstStyle/>
           <a:p>
             <a:pPr>
@@ -6317,324 +6410,420 @@
             <a:spAutoFit/>
           </a:bodyPr>
           <a:lstStyle/>
-          <a:p/>
-          <a:p>
-            <a:pPr>
-              <a:spcAft>
-                <a:spcPts val="1200"/>
-              </a:spcAft>
-              <a:defRPr sz="2000"/>
-            </a:pPr>
-            <a:r>
-              <a:rPr sz="1400"/>
+          <a:p>
+            <a:pPr>
+              <a:lnSpc>
+                <a:spcPct val="90000"/>
+              </a:lnSpc>
+              <a:spcAft>
+                <a:spcPts val="300"/>
+              </a:spcAft>
+            </a:pPr>
+          </a:p>
+          <a:p>
+            <a:pPr>
+              <a:lnSpc>
+                <a:spcPct val="90000"/>
+              </a:lnSpc>
+              <a:spcAft>
+                <a:spcPts val="300"/>
+              </a:spcAft>
+              <a:defRPr sz="2000"/>
+            </a:pPr>
+            <a:r>
+              <a:rPr sz="1300"/>
               <a:t>AI artık sadece hesap yapmıyor, sanat da üretiyor!</a:t>
             </a:r>
           </a:p>
           <a:p>
             <a:pPr>
-              <a:spcAft>
-                <a:spcPts val="1200"/>
-              </a:spcAft>
-              <a:defRPr sz="2000"/>
-            </a:pPr>
-          </a:p>
-          <a:p>
-            <a:pPr>
-              <a:spcAft>
-                <a:spcPts val="1200"/>
+              <a:lnSpc>
+                <a:spcPct val="90000"/>
+              </a:lnSpc>
+              <a:spcAft>
+                <a:spcPts val="300"/>
+              </a:spcAft>
+              <a:defRPr sz="2000"/>
+            </a:pPr>
+          </a:p>
+          <a:p>
+            <a:pPr>
+              <a:lnSpc>
+                <a:spcPct val="90000"/>
+              </a:lnSpc>
+              <a:spcAft>
+                <a:spcPts val="300"/>
               </a:spcAft>
               <a:defRPr sz="2000" b="1"/>
             </a:pPr>
             <a:r>
-              <a:rPr sz="1400"/>
+              <a:rPr sz="1300"/>
               <a:t>✅ Yaratıcı AI Örnekleri:</a:t>
             </a:r>
           </a:p>
           <a:p>
             <a:pPr>
-              <a:spcAft>
-                <a:spcPts val="1200"/>
-              </a:spcAft>
-              <a:defRPr sz="2000"/>
-            </a:pPr>
-          </a:p>
-          <a:p>
-            <a:pPr>
-              <a:spcAft>
-                <a:spcPts val="1200"/>
-              </a:spcAft>
-              <a:defRPr sz="2000"/>
-            </a:pPr>
-            <a:r>
-              <a:rPr sz="1400"/>
+              <a:lnSpc>
+                <a:spcPct val="90000"/>
+              </a:lnSpc>
+              <a:spcAft>
+                <a:spcPts val="300"/>
+              </a:spcAft>
+              <a:defRPr sz="2000"/>
+            </a:pPr>
+          </a:p>
+          <a:p>
+            <a:pPr>
+              <a:lnSpc>
+                <a:spcPct val="90000"/>
+              </a:lnSpc>
+              <a:spcAft>
+                <a:spcPts val="300"/>
+              </a:spcAft>
+              <a:defRPr sz="2000"/>
+            </a:pPr>
+            <a:r>
+              <a:rPr sz="1300"/>
               <a:t>🎨 Görsel Üretme:</a:t>
             </a:r>
           </a:p>
           <a:p>
             <a:pPr lvl="1">
-              <a:spcAft>
-                <a:spcPts val="1200"/>
-              </a:spcAft>
-              <a:defRPr sz="1800"/>
-            </a:pPr>
-            <a:r>
-              <a:rPr sz="1400"/>
+              <a:lnSpc>
+                <a:spcPct val="90000"/>
+              </a:lnSpc>
+              <a:spcAft>
+                <a:spcPts val="300"/>
+              </a:spcAft>
+              <a:defRPr sz="1800"/>
+            </a:pPr>
+            <a:r>
+              <a:rPr sz="1300"/>
               <a:t>    • DALL-E, Midjourney, Stable Diffusion</a:t>
             </a:r>
           </a:p>
           <a:p>
             <a:pPr lvl="1">
-              <a:spcAft>
-                <a:spcPts val="1200"/>
-              </a:spcAft>
-              <a:defRPr sz="1800"/>
-            </a:pPr>
-            <a:r>
-              <a:rPr sz="1400"/>
+              <a:lnSpc>
+                <a:spcPct val="90000"/>
+              </a:lnSpc>
+              <a:spcAft>
+                <a:spcPts val="300"/>
+              </a:spcAft>
+              <a:defRPr sz="1800"/>
+            </a:pPr>
+            <a:r>
+              <a:rPr sz="1300"/>
               <a:t>    • Metin yazarsın → Resim oluşturur</a:t>
             </a:r>
           </a:p>
           <a:p>
             <a:pPr lvl="1">
-              <a:spcAft>
-                <a:spcPts val="1200"/>
-              </a:spcAft>
-              <a:defRPr sz="1800"/>
-            </a:pPr>
-            <a:r>
-              <a:rPr sz="1400"/>
+              <a:lnSpc>
+                <a:spcPct val="90000"/>
+              </a:lnSpc>
+              <a:spcAft>
+                <a:spcPts val="300"/>
+              </a:spcAft>
+              <a:defRPr sz="1800"/>
+            </a:pPr>
+            <a:r>
+              <a:rPr sz="1300"/>
               <a:t>    • Örnek: 'Uzayda yüzen kedi' → AI çizer</a:t>
             </a:r>
           </a:p>
           <a:p>
             <a:pPr>
-              <a:spcAft>
-                <a:spcPts val="1200"/>
-              </a:spcAft>
-              <a:defRPr sz="2000"/>
-            </a:pPr>
-          </a:p>
-          <a:p>
-            <a:pPr>
-              <a:spcAft>
-                <a:spcPts val="1200"/>
-              </a:spcAft>
-              <a:defRPr sz="2000"/>
-            </a:pPr>
-            <a:r>
-              <a:rPr sz="1400"/>
+              <a:lnSpc>
+                <a:spcPct val="90000"/>
+              </a:lnSpc>
+              <a:spcAft>
+                <a:spcPts val="300"/>
+              </a:spcAft>
+              <a:defRPr sz="2000"/>
+            </a:pPr>
+          </a:p>
+          <a:p>
+            <a:pPr>
+              <a:lnSpc>
+                <a:spcPct val="90000"/>
+              </a:lnSpc>
+              <a:spcAft>
+                <a:spcPts val="300"/>
+              </a:spcAft>
+              <a:defRPr sz="2000"/>
+            </a:pPr>
+            <a:r>
+              <a:rPr sz="1300"/>
               <a:t>✍️ Metin Üretme:</a:t>
             </a:r>
           </a:p>
           <a:p>
             <a:pPr lvl="1">
-              <a:spcAft>
-                <a:spcPts val="1200"/>
-              </a:spcAft>
-              <a:defRPr sz="1800"/>
-            </a:pPr>
-            <a:r>
-              <a:rPr sz="1400"/>
+              <a:lnSpc>
+                <a:spcPct val="90000"/>
+              </a:lnSpc>
+              <a:spcAft>
+                <a:spcPts val="300"/>
+              </a:spcAft>
+              <a:defRPr sz="1800"/>
+            </a:pPr>
+            <a:r>
+              <a:rPr sz="1300"/>
               <a:t>    • ChatGPT</a:t>
             </a:r>
           </a:p>
           <a:p>
             <a:pPr lvl="1">
-              <a:spcAft>
-                <a:spcPts val="1200"/>
-              </a:spcAft>
-              <a:defRPr sz="1800"/>
-            </a:pPr>
-            <a:r>
-              <a:rPr sz="1400"/>
+              <a:lnSpc>
+                <a:spcPct val="90000"/>
+              </a:lnSpc>
+              <a:spcAft>
+                <a:spcPts val="300"/>
+              </a:spcAft>
+              <a:defRPr sz="1800"/>
+            </a:pPr>
+            <a:r>
+              <a:rPr sz="1300"/>
               <a:t>    • Hikaye yazar, şiir oluşturur</a:t>
             </a:r>
           </a:p>
           <a:p>
             <a:pPr lvl="1">
-              <a:spcAft>
-                <a:spcPts val="1200"/>
-              </a:spcAft>
-              <a:defRPr sz="1800"/>
-            </a:pPr>
-            <a:r>
-              <a:rPr sz="1400"/>
+              <a:lnSpc>
+                <a:spcPct val="90000"/>
+              </a:lnSpc>
+              <a:spcAft>
+                <a:spcPts val="300"/>
+              </a:spcAft>
+              <a:defRPr sz="1800"/>
+            </a:pPr>
+            <a:r>
+              <a:rPr sz="1300"/>
               <a:t>    • Soru cevaplar</a:t>
             </a:r>
           </a:p>
           <a:p>
             <a:pPr>
-              <a:spcAft>
-                <a:spcPts val="1200"/>
-              </a:spcAft>
-              <a:defRPr sz="2000"/>
-            </a:pPr>
-          </a:p>
-          <a:p>
-            <a:pPr>
-              <a:spcAft>
-                <a:spcPts val="1200"/>
-              </a:spcAft>
-              <a:defRPr sz="2000"/>
-            </a:pPr>
-            <a:r>
-              <a:rPr sz="1400"/>
+              <a:lnSpc>
+                <a:spcPct val="90000"/>
+              </a:lnSpc>
+              <a:spcAft>
+                <a:spcPts val="300"/>
+              </a:spcAft>
+              <a:defRPr sz="2000"/>
+            </a:pPr>
+          </a:p>
+          <a:p>
+            <a:pPr>
+              <a:lnSpc>
+                <a:spcPct val="90000"/>
+              </a:lnSpc>
+              <a:spcAft>
+                <a:spcPts val="300"/>
+              </a:spcAft>
+              <a:defRPr sz="2000"/>
+            </a:pPr>
+            <a:r>
+              <a:rPr sz="1300"/>
               <a:t>🎵 Müzik Üretme:</a:t>
             </a:r>
           </a:p>
           <a:p>
             <a:pPr lvl="1">
-              <a:spcAft>
-                <a:spcPts val="1200"/>
-              </a:spcAft>
-              <a:defRPr sz="1800"/>
-            </a:pPr>
-            <a:r>
-              <a:rPr sz="1400"/>
+              <a:lnSpc>
+                <a:spcPct val="90000"/>
+              </a:lnSpc>
+              <a:spcAft>
+                <a:spcPts val="300"/>
+              </a:spcAft>
+              <a:defRPr sz="1800"/>
+            </a:pPr>
+            <a:r>
+              <a:rPr sz="1300"/>
               <a:t>    • AI besteler yapabilir</a:t>
             </a:r>
           </a:p>
           <a:p>
             <a:pPr lvl="1">
-              <a:spcAft>
-                <a:spcPts val="1200"/>
-              </a:spcAft>
-              <a:defRPr sz="1800"/>
-            </a:pPr>
-            <a:r>
-              <a:rPr sz="1400"/>
+              <a:lnSpc>
+                <a:spcPct val="90000"/>
+              </a:lnSpc>
+              <a:spcAft>
+                <a:spcPts val="300"/>
+              </a:spcAft>
+              <a:defRPr sz="1800"/>
+            </a:pPr>
+            <a:r>
+              <a:rPr sz="1300"/>
               <a:t>    • Suno, AIVA</a:t>
             </a:r>
           </a:p>
           <a:p>
             <a:pPr>
-              <a:spcAft>
-                <a:spcPts val="1200"/>
-              </a:spcAft>
-              <a:defRPr sz="2000"/>
-            </a:pPr>
-          </a:p>
-          <a:p>
-            <a:pPr>
-              <a:spcAft>
-                <a:spcPts val="1200"/>
-              </a:spcAft>
-              <a:defRPr sz="2000"/>
-            </a:pPr>
-            <a:r>
-              <a:rPr sz="1400"/>
+              <a:lnSpc>
+                <a:spcPct val="90000"/>
+              </a:lnSpc>
+              <a:spcAft>
+                <a:spcPts val="300"/>
+              </a:spcAft>
+              <a:defRPr sz="2000"/>
+            </a:pPr>
+          </a:p>
+          <a:p>
+            <a:pPr>
+              <a:lnSpc>
+                <a:spcPct val="90000"/>
+              </a:lnSpc>
+              <a:spcAft>
+                <a:spcPts val="300"/>
+              </a:spcAft>
+              <a:defRPr sz="2000"/>
+            </a:pPr>
+            <a:r>
+              <a:rPr sz="1300"/>
               <a:t>🎬 Video Üretme:</a:t>
             </a:r>
           </a:p>
           <a:p>
             <a:pPr lvl="1">
-              <a:spcAft>
-                <a:spcPts val="1200"/>
-              </a:spcAft>
-              <a:defRPr sz="1800"/>
-            </a:pPr>
-            <a:r>
-              <a:rPr sz="1400"/>
+              <a:lnSpc>
+                <a:spcPct val="90000"/>
+              </a:lnSpc>
+              <a:spcAft>
+                <a:spcPts val="300"/>
+              </a:spcAft>
+              <a:defRPr sz="1800"/>
+            </a:pPr>
+            <a:r>
+              <a:rPr sz="1300"/>
               <a:t>    • Kısa videolar oluşturabilir</a:t>
             </a:r>
           </a:p>
           <a:p>
             <a:pPr>
-              <a:spcAft>
-                <a:spcPts val="1200"/>
-              </a:spcAft>
-              <a:defRPr sz="2000"/>
-            </a:pPr>
-          </a:p>
-          <a:p>
-            <a:pPr>
-              <a:spcAft>
-                <a:spcPts val="1200"/>
+              <a:lnSpc>
+                <a:spcPct val="90000"/>
+              </a:lnSpc>
+              <a:spcAft>
+                <a:spcPts val="300"/>
+              </a:spcAft>
+              <a:defRPr sz="2000"/>
+            </a:pPr>
+          </a:p>
+          <a:p>
+            <a:pPr>
+              <a:lnSpc>
+                <a:spcPct val="90000"/>
+              </a:lnSpc>
+              <a:spcAft>
+                <a:spcPts val="300"/>
               </a:spcAft>
               <a:defRPr sz="2000" b="1"/>
             </a:pPr>
             <a:r>
-              <a:rPr sz="1400"/>
+              <a:rPr sz="1300"/>
               <a:t>📌 Nasıl Kullanılır?</a:t>
             </a:r>
           </a:p>
           <a:p>
             <a:pPr lvl="1">
-              <a:spcAft>
-                <a:spcPts val="1200"/>
-              </a:spcAft>
-              <a:defRPr sz="1800"/>
-            </a:pPr>
-            <a:r>
-              <a:rPr sz="1400"/>
+              <a:lnSpc>
+                <a:spcPct val="90000"/>
+              </a:lnSpc>
+              <a:spcAft>
+                <a:spcPts val="300"/>
+              </a:spcAft>
+              <a:defRPr sz="1800"/>
+            </a:pPr>
+            <a:r>
+              <a:rPr sz="1300"/>
               <a:t>    • Prompt (komut) yazarsın</a:t>
             </a:r>
           </a:p>
           <a:p>
             <a:pPr lvl="1">
-              <a:spcAft>
-                <a:spcPts val="1200"/>
-              </a:spcAft>
-              <a:defRPr sz="1800"/>
-            </a:pPr>
-            <a:r>
-              <a:rPr sz="1400"/>
+              <a:lnSpc>
+                <a:spcPct val="90000"/>
+              </a:lnSpc>
+              <a:spcAft>
+                <a:spcPts val="300"/>
+              </a:spcAft>
+              <a:defRPr sz="1800"/>
+            </a:pPr>
+            <a:r>
+              <a:rPr sz="1300"/>
               <a:t>    • AI üretir</a:t>
             </a:r>
           </a:p>
           <a:p>
             <a:pPr lvl="1">
-              <a:spcAft>
-                <a:spcPts val="1200"/>
-              </a:spcAft>
-              <a:defRPr sz="1800"/>
-            </a:pPr>
-            <a:r>
-              <a:rPr sz="1400"/>
+              <a:lnSpc>
+                <a:spcPct val="90000"/>
+              </a:lnSpc>
+              <a:spcAft>
+                <a:spcPts val="300"/>
+              </a:spcAft>
+              <a:defRPr sz="1800"/>
+            </a:pPr>
+            <a:r>
+              <a:rPr sz="1300"/>
               <a:t>    • Beğenmezsen tekrar dene</a:t>
             </a:r>
           </a:p>
           <a:p>
             <a:pPr>
-              <a:spcAft>
-                <a:spcPts val="1200"/>
-              </a:spcAft>
-              <a:defRPr sz="2000"/>
-            </a:pPr>
-          </a:p>
-          <a:p>
-            <a:pPr>
-              <a:spcAft>
-                <a:spcPts val="1200"/>
+              <a:lnSpc>
+                <a:spcPct val="90000"/>
+              </a:lnSpc>
+              <a:spcAft>
+                <a:spcPts val="300"/>
+              </a:spcAft>
+              <a:defRPr sz="2000"/>
+            </a:pPr>
+          </a:p>
+          <a:p>
+            <a:pPr>
+              <a:lnSpc>
+                <a:spcPct val="90000"/>
+              </a:lnSpc>
+              <a:spcAft>
+                <a:spcPts val="300"/>
               </a:spcAft>
               <a:defRPr sz="2000" b="1"/>
             </a:pPr>
             <a:r>
-              <a:rPr sz="1400"/>
+              <a:rPr sz="1300"/>
               <a:t>💡 Etik Soru:</a:t>
             </a:r>
           </a:p>
           <a:p>
             <a:pPr>
-              <a:spcAft>
-                <a:spcPts val="1200"/>
-              </a:spcAft>
-              <a:defRPr sz="2000"/>
-            </a:pPr>
-            <a:r>
-              <a:rPr sz="1400"/>
+              <a:lnSpc>
+                <a:spcPct val="90000"/>
+              </a:lnSpc>
+              <a:spcAft>
+                <a:spcPts val="300"/>
+              </a:spcAft>
+              <a:defRPr sz="2000"/>
+            </a:pPr>
+            <a:r>
+              <a:rPr sz="1300"/>
               <a:t>AI'nın ürettiği sanat, gerçek sanat mıdır?</a:t>
             </a:r>
           </a:p>
           <a:p>
             <a:pPr>
-              <a:spcAft>
-                <a:spcPts val="1200"/>
-              </a:spcAft>
-              <a:defRPr sz="2000"/>
-            </a:pPr>
-            <a:r>
-              <a:rPr sz="1400"/>
+              <a:lnSpc>
+                <a:spcPct val="90000"/>
+              </a:lnSpc>
+              <a:spcAft>
+                <a:spcPts val="300"/>
+              </a:spcAft>
+              <a:defRPr sz="2000"/>
+            </a:pPr>
+            <a:r>
+              <a:rPr sz="1300"/>
               <a:t>Kim sahibidir?</a:t>
             </a:r>
           </a:p>
@@ -6670,7 +6859,7 @@
         </p:nvSpPr>
         <p:spPr/>
         <p:txBody>
-          <a:bodyPr/>
+          <a:bodyPr wrap="square"/>
           <a:lstStyle/>
           <a:p>
             <a:pPr>
@@ -6724,288 +6913,375 @@
             <a:spAutoFit/>
           </a:bodyPr>
           <a:lstStyle/>
-          <a:p/>
-          <a:p>
-            <a:pPr>
-              <a:spcAft>
-                <a:spcPts val="1200"/>
-              </a:spcAft>
-              <a:defRPr sz="2000"/>
-            </a:pPr>
-            <a:r>
-              <a:rPr sz="1400"/>
+          <a:p>
+            <a:pPr>
+              <a:lnSpc>
+                <a:spcPct val="90000"/>
+              </a:lnSpc>
+              <a:spcAft>
+                <a:spcPts val="300"/>
+              </a:spcAft>
+            </a:pPr>
+          </a:p>
+          <a:p>
+            <a:pPr>
+              <a:lnSpc>
+                <a:spcPct val="90000"/>
+              </a:lnSpc>
+              <a:spcAft>
+                <a:spcPts val="300"/>
+              </a:spcAft>
+              <a:defRPr sz="2000"/>
+            </a:pPr>
+            <a:r>
+              <a:rPr sz="1300"/>
               <a:t>Yapay zeka güçlü bir araç ama bazı sorunları var</a:t>
             </a:r>
           </a:p>
           <a:p>
             <a:pPr>
-              <a:spcAft>
-                <a:spcPts val="1200"/>
-              </a:spcAft>
-              <a:defRPr sz="2000"/>
-            </a:pPr>
-          </a:p>
-          <a:p>
-            <a:pPr>
-              <a:spcAft>
-                <a:spcPts val="1200"/>
+              <a:lnSpc>
+                <a:spcPct val="90000"/>
+              </a:lnSpc>
+              <a:spcAft>
+                <a:spcPts val="300"/>
+              </a:spcAft>
+              <a:defRPr sz="2000"/>
+            </a:pPr>
+          </a:p>
+          <a:p>
+            <a:pPr>
+              <a:lnSpc>
+                <a:spcPct val="90000"/>
+              </a:lnSpc>
+              <a:spcAft>
+                <a:spcPts val="300"/>
               </a:spcAft>
               <a:defRPr sz="2000" b="1"/>
             </a:pPr>
             <a:r>
-              <a:rPr sz="1400"/>
+              <a:rPr sz="1300"/>
               <a:t>✅ Etik Sorunlar:</a:t>
             </a:r>
           </a:p>
           <a:p>
             <a:pPr>
-              <a:spcAft>
-                <a:spcPts val="1200"/>
-              </a:spcAft>
-              <a:defRPr sz="2000"/>
-            </a:pPr>
-          </a:p>
-          <a:p>
-            <a:pPr>
-              <a:spcAft>
-                <a:spcPts val="1200"/>
-              </a:spcAft>
-              <a:defRPr sz="2000"/>
-            </a:pPr>
-            <a:r>
-              <a:rPr sz="1400"/>
+              <a:lnSpc>
+                <a:spcPct val="90000"/>
+              </a:lnSpc>
+              <a:spcAft>
+                <a:spcPts val="300"/>
+              </a:spcAft>
+              <a:defRPr sz="2000"/>
+            </a:pPr>
+          </a:p>
+          <a:p>
+            <a:pPr>
+              <a:lnSpc>
+                <a:spcPct val="90000"/>
+              </a:lnSpc>
+              <a:spcAft>
+                <a:spcPts val="300"/>
+              </a:spcAft>
+              <a:defRPr sz="2000"/>
+            </a:pPr>
+            <a:r>
+              <a:rPr sz="1300"/>
               <a:t>🎭 Önyargı (Bias):</a:t>
             </a:r>
           </a:p>
           <a:p>
             <a:pPr lvl="1">
-              <a:spcAft>
-                <a:spcPts val="1200"/>
-              </a:spcAft>
-              <a:defRPr sz="1800"/>
-            </a:pPr>
-            <a:r>
-              <a:rPr sz="1400"/>
+              <a:lnSpc>
+                <a:spcPct val="90000"/>
+              </a:lnSpc>
+              <a:spcAft>
+                <a:spcPts val="300"/>
+              </a:spcAft>
+              <a:defRPr sz="1800"/>
+            </a:pPr>
+            <a:r>
+              <a:rPr sz="1300"/>
               <a:t>    • AI verilere göre öğrenir</a:t>
             </a:r>
           </a:p>
           <a:p>
             <a:pPr lvl="1">
-              <a:spcAft>
-                <a:spcPts val="1200"/>
-              </a:spcAft>
-              <a:defRPr sz="1800"/>
-            </a:pPr>
-            <a:r>
-              <a:rPr sz="1400"/>
+              <a:lnSpc>
+                <a:spcPct val="90000"/>
+              </a:lnSpc>
+              <a:spcAft>
+                <a:spcPts val="300"/>
+              </a:spcAft>
+              <a:defRPr sz="1800"/>
+            </a:pPr>
+            <a:r>
+              <a:rPr sz="1300"/>
               <a:t>    • Yanlış veri = Yanlış karar</a:t>
             </a:r>
           </a:p>
           <a:p>
             <a:pPr lvl="1">
-              <a:spcAft>
-                <a:spcPts val="1200"/>
-              </a:spcAft>
-              <a:defRPr sz="1800"/>
-            </a:pPr>
-            <a:r>
-              <a:rPr sz="1400"/>
+              <a:lnSpc>
+                <a:spcPct val="90000"/>
+              </a:lnSpc>
+              <a:spcAft>
+                <a:spcPts val="300"/>
+              </a:spcAft>
+              <a:defRPr sz="1800"/>
+            </a:pPr>
+            <a:r>
+              <a:rPr sz="1300"/>
               <a:t>    • Örnek: Sadece erkek doktor fotoğrafları → 'Doktor = Erkek' düşüncesi</a:t>
             </a:r>
           </a:p>
           <a:p>
             <a:pPr>
-              <a:spcAft>
-                <a:spcPts val="1200"/>
-              </a:spcAft>
-              <a:defRPr sz="2000"/>
-            </a:pPr>
-          </a:p>
-          <a:p>
-            <a:pPr>
-              <a:spcAft>
-                <a:spcPts val="1200"/>
-              </a:spcAft>
-              <a:defRPr sz="2000"/>
-            </a:pPr>
-            <a:r>
-              <a:rPr sz="1400"/>
+              <a:lnSpc>
+                <a:spcPct val="90000"/>
+              </a:lnSpc>
+              <a:spcAft>
+                <a:spcPts val="300"/>
+              </a:spcAft>
+              <a:defRPr sz="2000"/>
+            </a:pPr>
+          </a:p>
+          <a:p>
+            <a:pPr>
+              <a:lnSpc>
+                <a:spcPct val="90000"/>
+              </a:lnSpc>
+              <a:spcAft>
+                <a:spcPts val="300"/>
+              </a:spcAft>
+              <a:defRPr sz="2000"/>
+            </a:pPr>
+            <a:r>
+              <a:rPr sz="1300"/>
               <a:t>🔒 Gizlilik:</a:t>
             </a:r>
           </a:p>
           <a:p>
             <a:pPr lvl="1">
-              <a:spcAft>
-                <a:spcPts val="1200"/>
-              </a:spcAft>
-              <a:defRPr sz="1800"/>
-            </a:pPr>
-            <a:r>
-              <a:rPr sz="1400"/>
+              <a:lnSpc>
+                <a:spcPct val="90000"/>
+              </a:lnSpc>
+              <a:spcAft>
+                <a:spcPts val="300"/>
+              </a:spcAft>
+              <a:defRPr sz="1800"/>
+            </a:pPr>
+            <a:r>
+              <a:rPr sz="1300"/>
               <a:t>    • AI çok veri topluyor</a:t>
             </a:r>
           </a:p>
           <a:p>
             <a:pPr lvl="1">
-              <a:spcAft>
-                <a:spcPts val="1200"/>
-              </a:spcAft>
-              <a:defRPr sz="1800"/>
-            </a:pPr>
-            <a:r>
-              <a:rPr sz="1400"/>
+              <a:lnSpc>
+                <a:spcPct val="90000"/>
+              </a:lnSpc>
+              <a:spcAft>
+                <a:spcPts val="300"/>
+              </a:spcAft>
+              <a:defRPr sz="1800"/>
+            </a:pPr>
+            <a:r>
+              <a:rPr sz="1300"/>
               <a:t>    • Kişisel bilgiler tehlikede olabilir</a:t>
             </a:r>
           </a:p>
           <a:p>
             <a:pPr>
-              <a:spcAft>
-                <a:spcPts val="1200"/>
-              </a:spcAft>
-              <a:defRPr sz="2000"/>
-            </a:pPr>
-          </a:p>
-          <a:p>
-            <a:pPr>
-              <a:spcAft>
-                <a:spcPts val="1200"/>
-              </a:spcAft>
-              <a:defRPr sz="2000"/>
-            </a:pPr>
-            <a:r>
-              <a:rPr sz="1400"/>
+              <a:lnSpc>
+                <a:spcPct val="90000"/>
+              </a:lnSpc>
+              <a:spcAft>
+                <a:spcPts val="300"/>
+              </a:spcAft>
+              <a:defRPr sz="2000"/>
+            </a:pPr>
+          </a:p>
+          <a:p>
+            <a:pPr>
+              <a:lnSpc>
+                <a:spcPct val="90000"/>
+              </a:lnSpc>
+              <a:spcAft>
+                <a:spcPts val="300"/>
+              </a:spcAft>
+              <a:defRPr sz="2000"/>
+            </a:pPr>
+            <a:r>
+              <a:rPr sz="1300"/>
               <a:t>💼 İş Kaybı:</a:t>
             </a:r>
           </a:p>
           <a:p>
             <a:pPr lvl="1">
-              <a:spcAft>
-                <a:spcPts val="1200"/>
-              </a:spcAft>
-              <a:defRPr sz="1800"/>
-            </a:pPr>
-            <a:r>
-              <a:rPr sz="1400"/>
+              <a:lnSpc>
+                <a:spcPct val="90000"/>
+              </a:lnSpc>
+              <a:spcAft>
+                <a:spcPts val="300"/>
+              </a:spcAft>
+              <a:defRPr sz="1800"/>
+            </a:pPr>
+            <a:r>
+              <a:rPr sz="1300"/>
               <a:t>    • Bazı meslekler AI ile değiştirilebilir</a:t>
             </a:r>
           </a:p>
           <a:p>
             <a:pPr lvl="1">
-              <a:spcAft>
-                <a:spcPts val="1200"/>
-              </a:spcAft>
-              <a:defRPr sz="1800"/>
-            </a:pPr>
-            <a:r>
-              <a:rPr sz="1400"/>
+              <a:lnSpc>
+                <a:spcPct val="90000"/>
+              </a:lnSpc>
+              <a:spcAft>
+                <a:spcPts val="300"/>
+              </a:spcAft>
+              <a:defRPr sz="1800"/>
+            </a:pPr>
+            <a:r>
+              <a:rPr sz="1300"/>
               <a:t>    • Kasiyerlik, fabrika işleri</a:t>
             </a:r>
           </a:p>
           <a:p>
             <a:pPr>
-              <a:spcAft>
-                <a:spcPts val="1200"/>
-              </a:spcAft>
-              <a:defRPr sz="2000"/>
-            </a:pPr>
-          </a:p>
-          <a:p>
-            <a:pPr>
-              <a:spcAft>
-                <a:spcPts val="1200"/>
-              </a:spcAft>
-              <a:defRPr sz="2000"/>
-            </a:pPr>
-            <a:r>
-              <a:rPr sz="1400"/>
+              <a:lnSpc>
+                <a:spcPct val="90000"/>
+              </a:lnSpc>
+              <a:spcAft>
+                <a:spcPts val="300"/>
+              </a:spcAft>
+              <a:defRPr sz="2000"/>
+            </a:pPr>
+          </a:p>
+          <a:p>
+            <a:pPr>
+              <a:lnSpc>
+                <a:spcPct val="90000"/>
+              </a:lnSpc>
+              <a:spcAft>
+                <a:spcPts val="300"/>
+              </a:spcAft>
+              <a:defRPr sz="2000"/>
+            </a:pPr>
+            <a:r>
+              <a:rPr sz="1300"/>
               <a:t>🎭 Deepfake:</a:t>
             </a:r>
           </a:p>
           <a:p>
             <a:pPr lvl="1">
-              <a:spcAft>
-                <a:spcPts val="1200"/>
-              </a:spcAft>
-              <a:defRPr sz="1800"/>
-            </a:pPr>
-            <a:r>
-              <a:rPr sz="1400"/>
+              <a:lnSpc>
+                <a:spcPct val="90000"/>
+              </a:lnSpc>
+              <a:spcAft>
+                <a:spcPts val="300"/>
+              </a:spcAft>
+              <a:defRPr sz="1800"/>
+            </a:pPr>
+            <a:r>
+              <a:rPr sz="1300"/>
               <a:t>    • Sahte video/ses oluşturma</a:t>
             </a:r>
           </a:p>
           <a:p>
             <a:pPr lvl="1">
-              <a:spcAft>
-                <a:spcPts val="1200"/>
-              </a:spcAft>
-              <a:defRPr sz="1800"/>
-            </a:pPr>
-            <a:r>
-              <a:rPr sz="1400"/>
+              <a:lnSpc>
+                <a:spcPct val="90000"/>
+              </a:lnSpc>
+              <a:spcAft>
+                <a:spcPts val="300"/>
+              </a:spcAft>
+              <a:defRPr sz="1800"/>
+            </a:pPr>
+            <a:r>
+              <a:rPr sz="1300"/>
               <a:t>    • Yalan haber yayabilir</a:t>
             </a:r>
           </a:p>
           <a:p>
             <a:pPr>
-              <a:spcAft>
-                <a:spcPts val="1200"/>
-              </a:spcAft>
-              <a:defRPr sz="2000"/>
-            </a:pPr>
-          </a:p>
-          <a:p>
-            <a:pPr>
-              <a:spcAft>
-                <a:spcPts val="1200"/>
-              </a:spcAft>
-              <a:defRPr sz="2000"/>
-            </a:pPr>
-            <a:r>
-              <a:rPr sz="1400"/>
+              <a:lnSpc>
+                <a:spcPct val="90000"/>
+              </a:lnSpc>
+              <a:spcAft>
+                <a:spcPts val="300"/>
+              </a:spcAft>
+              <a:defRPr sz="2000"/>
+            </a:pPr>
+          </a:p>
+          <a:p>
+            <a:pPr>
+              <a:lnSpc>
+                <a:spcPct val="90000"/>
+              </a:lnSpc>
+              <a:spcAft>
+                <a:spcPts val="300"/>
+              </a:spcAft>
+              <a:defRPr sz="2000"/>
+            </a:pPr>
+            <a:r>
+              <a:rPr sz="1300"/>
               <a:t>⚖️ Sorumluluk:</a:t>
             </a:r>
           </a:p>
           <a:p>
             <a:pPr lvl="1">
-              <a:spcAft>
-                <a:spcPts val="1200"/>
-              </a:spcAft>
-              <a:defRPr sz="1800"/>
-            </a:pPr>
-            <a:r>
-              <a:rPr sz="1400"/>
+              <a:lnSpc>
+                <a:spcPct val="90000"/>
+              </a:lnSpc>
+              <a:spcAft>
+                <a:spcPts val="300"/>
+              </a:spcAft>
+              <a:defRPr sz="1800"/>
+            </a:pPr>
+            <a:r>
+              <a:rPr sz="1300"/>
               <a:t>    • AI hata yaparsa kim sorumlu?</a:t>
             </a:r>
           </a:p>
           <a:p>
             <a:pPr lvl="1">
-              <a:spcAft>
-                <a:spcPts val="1200"/>
-              </a:spcAft>
-              <a:defRPr sz="1800"/>
-            </a:pPr>
-            <a:r>
-              <a:rPr sz="1400"/>
+              <a:lnSpc>
+                <a:spcPct val="90000"/>
+              </a:lnSpc>
+              <a:spcAft>
+                <a:spcPts val="300"/>
+              </a:spcAft>
+              <a:defRPr sz="1800"/>
+            </a:pPr>
+            <a:r>
+              <a:rPr sz="1300"/>
               <a:t>    • Otonom araç kaza yaparsa?</a:t>
             </a:r>
           </a:p>
           <a:p>
             <a:pPr>
-              <a:spcAft>
-                <a:spcPts val="1200"/>
-              </a:spcAft>
-              <a:defRPr sz="2000"/>
-            </a:pPr>
-          </a:p>
-          <a:p>
-            <a:pPr>
-              <a:spcAft>
-                <a:spcPts val="1200"/>
+              <a:lnSpc>
+                <a:spcPct val="90000"/>
+              </a:lnSpc>
+              <a:spcAft>
+                <a:spcPts val="300"/>
+              </a:spcAft>
+              <a:defRPr sz="2000"/>
+            </a:pPr>
+          </a:p>
+          <a:p>
+            <a:pPr>
+              <a:lnSpc>
+                <a:spcPct val="90000"/>
+              </a:lnSpc>
+              <a:spcAft>
+                <a:spcPts val="300"/>
               </a:spcAft>
               <a:defRPr sz="2000" b="1"/>
             </a:pPr>
             <a:r>
-              <a:rPr sz="1400"/>
+              <a:rPr sz="1300"/>
               <a:t>💡 AI'yı etik ve sorumlu kullanmalıyız!</a:t>
             </a:r>
           </a:p>
@@ -7041,7 +7317,7 @@
         </p:nvSpPr>
         <p:spPr/>
         <p:txBody>
-          <a:bodyPr/>
+          <a:bodyPr wrap="square"/>
           <a:lstStyle/>
           <a:p>
             <a:pPr>
@@ -7095,308 +7371,398 @@
             <a:spAutoFit/>
           </a:bodyPr>
           <a:lstStyle/>
-          <a:p/>
-          <a:p>
-            <a:pPr>
-              <a:spcAft>
-                <a:spcPts val="1200"/>
-              </a:spcAft>
-              <a:defRPr sz="2000"/>
-            </a:pPr>
-            <a:r>
-              <a:rPr sz="1400"/>
+          <a:p>
+            <a:pPr>
+              <a:lnSpc>
+                <a:spcPct val="90000"/>
+              </a:lnSpc>
+              <a:spcAft>
+                <a:spcPts val="300"/>
+              </a:spcAft>
+            </a:pPr>
+          </a:p>
+          <a:p>
+            <a:pPr>
+              <a:lnSpc>
+                <a:spcPct val="90000"/>
+              </a:lnSpc>
+              <a:spcAft>
+                <a:spcPts val="300"/>
+              </a:spcAft>
+              <a:defRPr sz="2000"/>
+            </a:pPr>
+            <a:r>
+              <a:rPr sz="1200"/>
               <a:t>Yapay zeka bazı meslekleri değiştirecek, bazılarını yaratacak!</a:t>
             </a:r>
           </a:p>
           <a:p>
             <a:pPr>
-              <a:spcAft>
-                <a:spcPts val="1200"/>
-              </a:spcAft>
-              <a:defRPr sz="2000"/>
-            </a:pPr>
-          </a:p>
-          <a:p>
-            <a:pPr>
-              <a:spcAft>
-                <a:spcPts val="1200"/>
+              <a:lnSpc>
+                <a:spcPct val="90000"/>
+              </a:lnSpc>
+              <a:spcAft>
+                <a:spcPts val="300"/>
+              </a:spcAft>
+              <a:defRPr sz="2000"/>
+            </a:pPr>
+          </a:p>
+          <a:p>
+            <a:pPr>
+              <a:lnSpc>
+                <a:spcPct val="90000"/>
+              </a:lnSpc>
+              <a:spcAft>
+                <a:spcPts val="300"/>
               </a:spcAft>
               <a:defRPr sz="2000" b="1"/>
             </a:pPr>
             <a:r>
-              <a:rPr sz="1400"/>
+              <a:rPr sz="1200"/>
               <a:t>✅ Yok Olabilecek Meslekler:</a:t>
             </a:r>
           </a:p>
           <a:p>
             <a:pPr lvl="1">
-              <a:spcAft>
-                <a:spcPts val="1200"/>
-              </a:spcAft>
-              <a:defRPr sz="1800"/>
-            </a:pPr>
-            <a:r>
-              <a:rPr sz="1400"/>
+              <a:lnSpc>
+                <a:spcPct val="90000"/>
+              </a:lnSpc>
+              <a:spcAft>
+                <a:spcPts val="300"/>
+              </a:spcAft>
+              <a:defRPr sz="1800"/>
+            </a:pPr>
+            <a:r>
+              <a:rPr sz="1200"/>
               <a:t>    • Fabrika işçileri (robotlar yapacak)</a:t>
             </a:r>
           </a:p>
           <a:p>
             <a:pPr lvl="1">
-              <a:spcAft>
-                <a:spcPts val="1200"/>
-              </a:spcAft>
-              <a:defRPr sz="1800"/>
-            </a:pPr>
-            <a:r>
-              <a:rPr sz="1400"/>
+              <a:lnSpc>
+                <a:spcPct val="90000"/>
+              </a:lnSpc>
+              <a:spcAft>
+                <a:spcPts val="300"/>
+              </a:spcAft>
+              <a:defRPr sz="1800"/>
+            </a:pPr>
+            <a:r>
+              <a:rPr sz="1200"/>
               <a:t>    • Kasiyerler (otomasyon)</a:t>
             </a:r>
           </a:p>
           <a:p>
             <a:pPr lvl="1">
-              <a:spcAft>
-                <a:spcPts val="1200"/>
-              </a:spcAft>
-              <a:defRPr sz="1800"/>
-            </a:pPr>
-            <a:r>
-              <a:rPr sz="1400"/>
+              <a:lnSpc>
+                <a:spcPct val="90000"/>
+              </a:lnSpc>
+              <a:spcAft>
+                <a:spcPts val="300"/>
+              </a:spcAft>
+              <a:defRPr sz="1800"/>
+            </a:pPr>
+            <a:r>
+              <a:rPr sz="1200"/>
               <a:t>    • Veri giriş elemanları</a:t>
             </a:r>
           </a:p>
           <a:p>
             <a:pPr>
-              <a:spcAft>
-                <a:spcPts val="1200"/>
-              </a:spcAft>
-              <a:defRPr sz="2000"/>
-            </a:pPr>
-          </a:p>
-          <a:p>
-            <a:pPr>
-              <a:spcAft>
-                <a:spcPts val="1200"/>
+              <a:lnSpc>
+                <a:spcPct val="90000"/>
+              </a:lnSpc>
+              <a:spcAft>
+                <a:spcPts val="300"/>
+              </a:spcAft>
+              <a:defRPr sz="2000"/>
+            </a:pPr>
+          </a:p>
+          <a:p>
+            <a:pPr>
+              <a:lnSpc>
+                <a:spcPct val="90000"/>
+              </a:lnSpc>
+              <a:spcAft>
+                <a:spcPts val="300"/>
               </a:spcAft>
               <a:defRPr sz="2000" b="1"/>
             </a:pPr>
             <a:r>
-              <a:rPr sz="1400"/>
+              <a:rPr sz="1200"/>
               <a:t>✅ Değişecek Meslekler:</a:t>
             </a:r>
           </a:p>
           <a:p>
             <a:pPr lvl="1">
-              <a:spcAft>
-                <a:spcPts val="1200"/>
-              </a:spcAft>
-              <a:defRPr sz="1800"/>
-            </a:pPr>
-            <a:r>
-              <a:rPr sz="1400"/>
+              <a:lnSpc>
+                <a:spcPct val="90000"/>
+              </a:lnSpc>
+              <a:spcAft>
+                <a:spcPts val="300"/>
+              </a:spcAft>
+              <a:defRPr sz="1800"/>
+            </a:pPr>
+            <a:r>
+              <a:rPr sz="1200"/>
               <a:t>    • Öğretmenler (AI yardımcı olacak)</a:t>
             </a:r>
           </a:p>
           <a:p>
             <a:pPr lvl="1">
-              <a:spcAft>
-                <a:spcPts val="1200"/>
-              </a:spcAft>
-              <a:defRPr sz="1800"/>
-            </a:pPr>
-            <a:r>
-              <a:rPr sz="1400"/>
+              <a:lnSpc>
+                <a:spcPct val="90000"/>
+              </a:lnSpc>
+              <a:spcAft>
+                <a:spcPts val="300"/>
+              </a:spcAft>
+              <a:defRPr sz="1800"/>
+            </a:pPr>
+            <a:r>
+              <a:rPr sz="1200"/>
               <a:t>    • Doktorlar (AI teşhis yardımcısı)</a:t>
             </a:r>
           </a:p>
           <a:p>
             <a:pPr lvl="1">
-              <a:spcAft>
-                <a:spcPts val="1200"/>
-              </a:spcAft>
-              <a:defRPr sz="1800"/>
-            </a:pPr>
-            <a:r>
-              <a:rPr sz="1400"/>
+              <a:lnSpc>
+                <a:spcPct val="90000"/>
+              </a:lnSpc>
+              <a:spcAft>
+                <a:spcPts val="300"/>
+              </a:spcAft>
+              <a:defRPr sz="1800"/>
+            </a:pPr>
+            <a:r>
+              <a:rPr sz="1200"/>
               <a:t>    • Sanatçılar (AI araçlarını kullanacak)</a:t>
             </a:r>
           </a:p>
           <a:p>
             <a:pPr>
-              <a:spcAft>
-                <a:spcPts val="1200"/>
-              </a:spcAft>
-              <a:defRPr sz="2000"/>
-            </a:pPr>
-          </a:p>
-          <a:p>
-            <a:pPr>
-              <a:spcAft>
-                <a:spcPts val="1200"/>
+              <a:lnSpc>
+                <a:spcPct val="90000"/>
+              </a:lnSpc>
+              <a:spcAft>
+                <a:spcPts val="300"/>
+              </a:spcAft>
+              <a:defRPr sz="2000"/>
+            </a:pPr>
+          </a:p>
+          <a:p>
+            <a:pPr>
+              <a:lnSpc>
+                <a:spcPct val="90000"/>
+              </a:lnSpc>
+              <a:spcAft>
+                <a:spcPts val="300"/>
               </a:spcAft>
               <a:defRPr sz="2000" b="1"/>
             </a:pPr>
             <a:r>
-              <a:rPr sz="1400"/>
+              <a:rPr sz="1200"/>
               <a:t>✅ Yeni Meslekler:</a:t>
             </a:r>
           </a:p>
           <a:p>
             <a:pPr lvl="1">
-              <a:spcAft>
-                <a:spcPts val="1200"/>
-              </a:spcAft>
-              <a:defRPr sz="1800"/>
-            </a:pPr>
-            <a:r>
-              <a:rPr sz="1400"/>
+              <a:lnSpc>
+                <a:spcPct val="90000"/>
+              </a:lnSpc>
+              <a:spcAft>
+                <a:spcPts val="300"/>
+              </a:spcAft>
+              <a:defRPr sz="1800"/>
+            </a:pPr>
+            <a:r>
+              <a:rPr sz="1200"/>
               <a:t>    • AI Eğitim Uzmanı</a:t>
             </a:r>
           </a:p>
           <a:p>
             <a:pPr lvl="1">
-              <a:spcAft>
-                <a:spcPts val="1200"/>
-              </a:spcAft>
-              <a:defRPr sz="1800"/>
-            </a:pPr>
-            <a:r>
-              <a:rPr sz="1400"/>
+              <a:lnSpc>
+                <a:spcPct val="90000"/>
+              </a:lnSpc>
+              <a:spcAft>
+                <a:spcPts val="300"/>
+              </a:spcAft>
+              <a:defRPr sz="1800"/>
+            </a:pPr>
+            <a:r>
+              <a:rPr sz="1200"/>
               <a:t>    • Veri Bilimcisi</a:t>
             </a:r>
           </a:p>
           <a:p>
             <a:pPr lvl="1">
-              <a:spcAft>
-                <a:spcPts val="1200"/>
-              </a:spcAft>
-              <a:defRPr sz="1800"/>
-            </a:pPr>
-            <a:r>
-              <a:rPr sz="1400"/>
+              <a:lnSpc>
+                <a:spcPct val="90000"/>
+              </a:lnSpc>
+              <a:spcAft>
+                <a:spcPts val="300"/>
+              </a:spcAft>
+              <a:defRPr sz="1800"/>
+            </a:pPr>
+            <a:r>
+              <a:rPr sz="1200"/>
               <a:t>    • Makine Öğrenmesi Mühendisi</a:t>
             </a:r>
           </a:p>
           <a:p>
             <a:pPr lvl="1">
-              <a:spcAft>
-                <a:spcPts val="1200"/>
-              </a:spcAft>
-              <a:defRPr sz="1800"/>
-            </a:pPr>
-            <a:r>
-              <a:rPr sz="1400"/>
+              <a:lnSpc>
+                <a:spcPct val="90000"/>
+              </a:lnSpc>
+              <a:spcAft>
+                <a:spcPts val="300"/>
+              </a:spcAft>
+              <a:defRPr sz="1800"/>
+            </a:pPr>
+            <a:r>
+              <a:rPr sz="1200"/>
               <a:t>    • AI Etik Uzmanı</a:t>
             </a:r>
           </a:p>
           <a:p>
             <a:pPr lvl="1">
-              <a:spcAft>
-                <a:spcPts val="1200"/>
-              </a:spcAft>
-              <a:defRPr sz="1800"/>
-            </a:pPr>
-            <a:r>
-              <a:rPr sz="1400"/>
+              <a:lnSpc>
+                <a:spcPct val="90000"/>
+              </a:lnSpc>
+              <a:spcAft>
+                <a:spcPts val="300"/>
+              </a:spcAft>
+              <a:defRPr sz="1800"/>
+            </a:pPr>
+            <a:r>
+              <a:rPr sz="1200"/>
               <a:t>    • Robot Tasarımcısı</a:t>
             </a:r>
           </a:p>
           <a:p>
             <a:pPr>
-              <a:spcAft>
-                <a:spcPts val="1200"/>
-              </a:spcAft>
-              <a:defRPr sz="2000"/>
-            </a:pPr>
-          </a:p>
-          <a:p>
-            <a:pPr>
-              <a:spcAft>
-                <a:spcPts val="1200"/>
+              <a:lnSpc>
+                <a:spcPct val="90000"/>
+              </a:lnSpc>
+              <a:spcAft>
+                <a:spcPts val="300"/>
+              </a:spcAft>
+              <a:defRPr sz="2000"/>
+            </a:pPr>
+          </a:p>
+          <a:p>
+            <a:pPr>
+              <a:lnSpc>
+                <a:spcPct val="90000"/>
+              </a:lnSpc>
+              <a:spcAft>
+                <a:spcPts val="300"/>
               </a:spcAft>
               <a:defRPr sz="2000" b="1"/>
             </a:pPr>
             <a:r>
-              <a:rPr sz="1400"/>
+              <a:rPr sz="1200"/>
               <a:t>💡 Gelecekte Önemli Beceriler:</a:t>
             </a:r>
           </a:p>
           <a:p>
             <a:pPr lvl="1">
-              <a:spcAft>
-                <a:spcPts val="1200"/>
-              </a:spcAft>
-              <a:defRPr sz="1800"/>
-            </a:pPr>
-            <a:r>
-              <a:rPr sz="1400"/>
+              <a:lnSpc>
+                <a:spcPct val="90000"/>
+              </a:lnSpc>
+              <a:spcAft>
+                <a:spcPts val="300"/>
+              </a:spcAft>
+              <a:defRPr sz="1800"/>
+            </a:pPr>
+            <a:r>
+              <a:rPr sz="1200"/>
               <a:t>    • Yaratıcılık</a:t>
             </a:r>
           </a:p>
           <a:p>
             <a:pPr lvl="1">
-              <a:spcAft>
-                <a:spcPts val="1200"/>
-              </a:spcAft>
-              <a:defRPr sz="1800"/>
-            </a:pPr>
-            <a:r>
-              <a:rPr sz="1400"/>
+              <a:lnSpc>
+                <a:spcPct val="90000"/>
+              </a:lnSpc>
+              <a:spcAft>
+                <a:spcPts val="300"/>
+              </a:spcAft>
+              <a:defRPr sz="1800"/>
+            </a:pPr>
+            <a:r>
+              <a:rPr sz="1200"/>
               <a:t>    • Eleştirel düşünme</a:t>
             </a:r>
           </a:p>
           <a:p>
             <a:pPr lvl="1">
-              <a:spcAft>
-                <a:spcPts val="1200"/>
-              </a:spcAft>
-              <a:defRPr sz="1800"/>
-            </a:pPr>
-            <a:r>
-              <a:rPr sz="1400"/>
+              <a:lnSpc>
+                <a:spcPct val="90000"/>
+              </a:lnSpc>
+              <a:spcAft>
+                <a:spcPts val="300"/>
+              </a:spcAft>
+              <a:defRPr sz="1800"/>
+            </a:pPr>
+            <a:r>
+              <a:rPr sz="1200"/>
               <a:t>    • Kodlama</a:t>
             </a:r>
           </a:p>
           <a:p>
             <a:pPr lvl="1">
-              <a:spcAft>
-                <a:spcPts val="1200"/>
-              </a:spcAft>
-              <a:defRPr sz="1800"/>
-            </a:pPr>
-            <a:r>
-              <a:rPr sz="1400"/>
+              <a:lnSpc>
+                <a:spcPct val="90000"/>
+              </a:lnSpc>
+              <a:spcAft>
+                <a:spcPts val="300"/>
+              </a:spcAft>
+              <a:defRPr sz="1800"/>
+            </a:pPr>
+            <a:r>
+              <a:rPr sz="1200"/>
               <a:t>    • Problem çözme</a:t>
             </a:r>
           </a:p>
           <a:p>
             <a:pPr lvl="1">
-              <a:spcAft>
-                <a:spcPts val="1200"/>
-              </a:spcAft>
-              <a:defRPr sz="1800"/>
-            </a:pPr>
-            <a:r>
-              <a:rPr sz="1400"/>
+              <a:lnSpc>
+                <a:spcPct val="90000"/>
+              </a:lnSpc>
+              <a:spcAft>
+                <a:spcPts val="300"/>
+              </a:spcAft>
+              <a:defRPr sz="1800"/>
+            </a:pPr>
+            <a:r>
+              <a:rPr sz="1200"/>
               <a:t>    • İşbirliği</a:t>
             </a:r>
           </a:p>
           <a:p>
             <a:pPr>
-              <a:spcAft>
-                <a:spcPts val="1200"/>
-              </a:spcAft>
-              <a:defRPr sz="2000"/>
-            </a:pPr>
-          </a:p>
-          <a:p>
-            <a:pPr>
-              <a:spcAft>
-                <a:spcPts val="1200"/>
+              <a:lnSpc>
+                <a:spcPct val="90000"/>
+              </a:lnSpc>
+              <a:spcAft>
+                <a:spcPts val="300"/>
+              </a:spcAft>
+              <a:defRPr sz="2000"/>
+            </a:pPr>
+          </a:p>
+          <a:p>
+            <a:pPr>
+              <a:lnSpc>
+                <a:spcPct val="90000"/>
+              </a:lnSpc>
+              <a:spcAft>
+                <a:spcPts val="300"/>
               </a:spcAft>
               <a:defRPr sz="2000" b="1"/>
             </a:pPr>
             <a:r>
-              <a:rPr sz="1400"/>
+              <a:rPr sz="1200"/>
               <a:t>🎯 AI ile rekabet etme, AI ile işbirliği yap!</a:t>
             </a:r>
           </a:p>
@@ -7432,7 +7798,7 @@
         </p:nvSpPr>
         <p:spPr/>
         <p:txBody>
-          <a:bodyPr/>
+          <a:bodyPr wrap="square"/>
           <a:lstStyle/>
           <a:p>
             <a:pPr>
@@ -7486,292 +7852,379 @@
             <a:spAutoFit/>
           </a:bodyPr>
           <a:lstStyle/>
-          <a:p/>
-          <a:p>
-            <a:pPr>
-              <a:spcAft>
-                <a:spcPts val="1200"/>
-              </a:spcAft>
-              <a:defRPr sz="2000"/>
-            </a:pPr>
-            <a:r>
-              <a:rPr sz="1400"/>
+          <a:p>
+            <a:pPr>
+              <a:lnSpc>
+                <a:spcPct val="90000"/>
+              </a:lnSpc>
+              <a:spcAft>
+                <a:spcPts val="300"/>
+              </a:spcAft>
+            </a:pPr>
+          </a:p>
+          <a:p>
+            <a:pPr>
+              <a:lnSpc>
+                <a:spcPct val="90000"/>
+              </a:lnSpc>
+              <a:spcAft>
+                <a:spcPts val="300"/>
+              </a:spcAft>
+              <a:defRPr sz="2000"/>
+            </a:pPr>
+            <a:r>
+              <a:rPr sz="1300"/>
               <a:t>Sen de yapay zekayı öğrenebilir ve kullanabilirsin!</a:t>
             </a:r>
           </a:p>
           <a:p>
             <a:pPr>
-              <a:spcAft>
-                <a:spcPts val="1200"/>
-              </a:spcAft>
-              <a:defRPr sz="2000"/>
-            </a:pPr>
-          </a:p>
-          <a:p>
-            <a:pPr>
-              <a:spcAft>
-                <a:spcPts val="1200"/>
+              <a:lnSpc>
+                <a:spcPct val="90000"/>
+              </a:lnSpc>
+              <a:spcAft>
+                <a:spcPts val="300"/>
+              </a:spcAft>
+              <a:defRPr sz="2000"/>
+            </a:pPr>
+          </a:p>
+          <a:p>
+            <a:pPr>
+              <a:lnSpc>
+                <a:spcPct val="90000"/>
+              </a:lnSpc>
+              <a:spcAft>
+                <a:spcPts val="300"/>
               </a:spcAft>
               <a:defRPr sz="2000" b="1"/>
             </a:pPr>
             <a:r>
-              <a:rPr sz="1400"/>
+              <a:rPr sz="1300"/>
               <a:t>✅ Başlangıç Seviyesi:</a:t>
             </a:r>
           </a:p>
           <a:p>
             <a:pPr>
-              <a:spcAft>
-                <a:spcPts val="1200"/>
-              </a:spcAft>
-              <a:defRPr sz="2000"/>
-            </a:pPr>
-          </a:p>
-          <a:p>
-            <a:pPr>
-              <a:spcAft>
-                <a:spcPts val="1200"/>
-              </a:spcAft>
-              <a:defRPr sz="2000"/>
-            </a:pPr>
-            <a:r>
-              <a:rPr sz="1400"/>
+              <a:lnSpc>
+                <a:spcPct val="90000"/>
+              </a:lnSpc>
+              <a:spcAft>
+                <a:spcPts val="300"/>
+              </a:spcAft>
+              <a:defRPr sz="2000"/>
+            </a:pPr>
+          </a:p>
+          <a:p>
+            <a:pPr>
+              <a:lnSpc>
+                <a:spcPct val="90000"/>
+              </a:lnSpc>
+              <a:spcAft>
+                <a:spcPts val="300"/>
+              </a:spcAft>
+              <a:defRPr sz="2000"/>
+            </a:pPr>
+            <a:r>
+              <a:rPr sz="1300"/>
               <a:t>🎨 Görsel Oluşturma:</a:t>
             </a:r>
           </a:p>
           <a:p>
             <a:pPr lvl="1">
-              <a:spcAft>
-                <a:spcPts val="1200"/>
-              </a:spcAft>
-              <a:defRPr sz="1800"/>
-            </a:pPr>
-            <a:r>
-              <a:rPr sz="1400"/>
+              <a:lnSpc>
+                <a:spcPct val="90000"/>
+              </a:lnSpc>
+              <a:spcAft>
+                <a:spcPts val="300"/>
+              </a:spcAft>
+              <a:defRPr sz="1800"/>
+            </a:pPr>
+            <a:r>
+              <a:rPr sz="1300"/>
               <a:t>    • Bing Image Creator</a:t>
             </a:r>
           </a:p>
           <a:p>
             <a:pPr lvl="1">
-              <a:spcAft>
-                <a:spcPts val="1200"/>
-              </a:spcAft>
-              <a:defRPr sz="1800"/>
-            </a:pPr>
-            <a:r>
-              <a:rPr sz="1400"/>
+              <a:lnSpc>
+                <a:spcPct val="90000"/>
+              </a:lnSpc>
+              <a:spcAft>
+                <a:spcPts val="300"/>
+              </a:spcAft>
+              <a:defRPr sz="1800"/>
+            </a:pPr>
+            <a:r>
+              <a:rPr sz="1300"/>
               <a:t>    • Craiyon (Ücretsiz)</a:t>
             </a:r>
           </a:p>
           <a:p>
             <a:pPr>
-              <a:spcAft>
-                <a:spcPts val="1200"/>
-              </a:spcAft>
-              <a:defRPr sz="2000"/>
-            </a:pPr>
-          </a:p>
-          <a:p>
-            <a:pPr>
-              <a:spcAft>
-                <a:spcPts val="1200"/>
-              </a:spcAft>
-              <a:defRPr sz="2000"/>
-            </a:pPr>
-            <a:r>
-              <a:rPr sz="1400"/>
+              <a:lnSpc>
+                <a:spcPct val="90000"/>
+              </a:lnSpc>
+              <a:spcAft>
+                <a:spcPts val="300"/>
+              </a:spcAft>
+              <a:defRPr sz="2000"/>
+            </a:pPr>
+          </a:p>
+          <a:p>
+            <a:pPr>
+              <a:lnSpc>
+                <a:spcPct val="90000"/>
+              </a:lnSpc>
+              <a:spcAft>
+                <a:spcPts val="300"/>
+              </a:spcAft>
+              <a:defRPr sz="2000"/>
+            </a:pPr>
+            <a:r>
+              <a:rPr sz="1300"/>
               <a:t>🤖 Chatbot ile Konuşma:</a:t>
             </a:r>
           </a:p>
           <a:p>
             <a:pPr lvl="1">
-              <a:spcAft>
-                <a:spcPts val="1200"/>
-              </a:spcAft>
-              <a:defRPr sz="1800"/>
-            </a:pPr>
-            <a:r>
-              <a:rPr sz="1400"/>
+              <a:lnSpc>
+                <a:spcPct val="90000"/>
+              </a:lnSpc>
+              <a:spcAft>
+                <a:spcPts val="300"/>
+              </a:spcAft>
+              <a:defRPr sz="1800"/>
+            </a:pPr>
+            <a:r>
+              <a:rPr sz="1300"/>
               <a:t>    • ChatGPT (Ebeveyn izni ile)</a:t>
             </a:r>
           </a:p>
           <a:p>
             <a:pPr lvl="1">
-              <a:spcAft>
-                <a:spcPts val="1200"/>
-              </a:spcAft>
-              <a:defRPr sz="1800"/>
-            </a:pPr>
-            <a:r>
-              <a:rPr sz="1400"/>
+              <a:lnSpc>
+                <a:spcPct val="90000"/>
+              </a:lnSpc>
+              <a:spcAft>
+                <a:spcPts val="300"/>
+              </a:spcAft>
+              <a:defRPr sz="1800"/>
+            </a:pPr>
+            <a:r>
+              <a:rPr sz="1300"/>
               <a:t>    • Soru sor, öğren</a:t>
             </a:r>
           </a:p>
           <a:p>
             <a:pPr>
-              <a:spcAft>
-                <a:spcPts val="1200"/>
-              </a:spcAft>
-              <a:defRPr sz="2000"/>
-            </a:pPr>
-          </a:p>
-          <a:p>
-            <a:pPr>
-              <a:spcAft>
-                <a:spcPts val="1200"/>
-              </a:spcAft>
-              <a:defRPr sz="2000"/>
-            </a:pPr>
-            <a:r>
-              <a:rPr sz="1400"/>
+              <a:lnSpc>
+                <a:spcPct val="90000"/>
+              </a:lnSpc>
+              <a:spcAft>
+                <a:spcPts val="300"/>
+              </a:spcAft>
+              <a:defRPr sz="2000"/>
+            </a:pPr>
+          </a:p>
+          <a:p>
+            <a:pPr>
+              <a:lnSpc>
+                <a:spcPct val="90000"/>
+              </a:lnSpc>
+              <a:spcAft>
+                <a:spcPts val="300"/>
+              </a:spcAft>
+              <a:defRPr sz="2000"/>
+            </a:pPr>
+            <a:r>
+              <a:rPr sz="1300"/>
               <a:t>🎮 Scratch ile AI:</a:t>
             </a:r>
           </a:p>
           <a:p>
             <a:pPr lvl="1">
-              <a:spcAft>
-                <a:spcPts val="1200"/>
-              </a:spcAft>
-              <a:defRPr sz="1800"/>
-            </a:pPr>
-            <a:r>
-              <a:rPr sz="1400"/>
+              <a:lnSpc>
+                <a:spcPct val="90000"/>
+              </a:lnSpc>
+              <a:spcAft>
+                <a:spcPts val="300"/>
+              </a:spcAft>
+              <a:defRPr sz="1800"/>
+            </a:pPr>
+            <a:r>
+              <a:rPr sz="1300"/>
               <a:t>    • Makine öğrenmesi blokları</a:t>
             </a:r>
           </a:p>
           <a:p>
             <a:pPr lvl="1">
-              <a:spcAft>
-                <a:spcPts val="1200"/>
-              </a:spcAft>
-              <a:defRPr sz="1800"/>
-            </a:pPr>
-            <a:r>
-              <a:rPr sz="1400"/>
+              <a:lnSpc>
+                <a:spcPct val="90000"/>
+              </a:lnSpc>
+              <a:spcAft>
+                <a:spcPts val="300"/>
+              </a:spcAft>
+              <a:defRPr sz="1800"/>
+            </a:pPr>
+            <a:r>
+              <a:rPr sz="1300"/>
               <a:t>    • Basit AI projeleri</a:t>
             </a:r>
           </a:p>
           <a:p>
             <a:pPr>
-              <a:spcAft>
-                <a:spcPts val="1200"/>
-              </a:spcAft>
-              <a:defRPr sz="2000"/>
-            </a:pPr>
-          </a:p>
-          <a:p>
-            <a:pPr>
-              <a:spcAft>
-                <a:spcPts val="1200"/>
-              </a:spcAft>
-              <a:defRPr sz="2000"/>
-            </a:pPr>
-            <a:r>
-              <a:rPr sz="1400"/>
+              <a:lnSpc>
+                <a:spcPct val="90000"/>
+              </a:lnSpc>
+              <a:spcAft>
+                <a:spcPts val="300"/>
+              </a:spcAft>
+              <a:defRPr sz="2000"/>
+            </a:pPr>
+          </a:p>
+          <a:p>
+            <a:pPr>
+              <a:lnSpc>
+                <a:spcPct val="90000"/>
+              </a:lnSpc>
+              <a:spcAft>
+                <a:spcPts val="300"/>
+              </a:spcAft>
+              <a:defRPr sz="2000"/>
+            </a:pPr>
+            <a:r>
+              <a:rPr sz="1300"/>
               <a:t>📚 Google Teachable Machine:</a:t>
             </a:r>
           </a:p>
           <a:p>
             <a:pPr lvl="1">
-              <a:spcAft>
-                <a:spcPts val="1200"/>
-              </a:spcAft>
-              <a:defRPr sz="1800"/>
-            </a:pPr>
-            <a:r>
-              <a:rPr sz="1400"/>
+              <a:lnSpc>
+                <a:spcPct val="90000"/>
+              </a:lnSpc>
+              <a:spcAft>
+                <a:spcPts val="300"/>
+              </a:spcAft>
+              <a:defRPr sz="1800"/>
+            </a:pPr>
+            <a:r>
+              <a:rPr sz="1300"/>
               <a:t>    • Kendi AI modelini eğit</a:t>
             </a:r>
           </a:p>
           <a:p>
             <a:pPr lvl="1">
-              <a:spcAft>
-                <a:spcPts val="1200"/>
-              </a:spcAft>
-              <a:defRPr sz="1800"/>
-            </a:pPr>
-            <a:r>
-              <a:rPr sz="1400"/>
+              <a:lnSpc>
+                <a:spcPct val="90000"/>
+              </a:lnSpc>
+              <a:spcAft>
+                <a:spcPts val="300"/>
+              </a:spcAft>
+              <a:defRPr sz="1800"/>
+            </a:pPr>
+            <a:r>
+              <a:rPr sz="1300"/>
               <a:t>    • Görüntü, ses, pozisyon tanıma</a:t>
             </a:r>
           </a:p>
           <a:p>
             <a:pPr lvl="1">
-              <a:spcAft>
-                <a:spcPts val="1200"/>
-              </a:spcAft>
-              <a:defRPr sz="1800"/>
-            </a:pPr>
-            <a:r>
-              <a:rPr sz="1400"/>
+              <a:lnSpc>
+                <a:spcPct val="90000"/>
+              </a:lnSpc>
+              <a:spcAft>
+                <a:spcPts val="300"/>
+              </a:spcAft>
+              <a:defRPr sz="1800"/>
+            </a:pPr>
+            <a:r>
+              <a:rPr sz="1300"/>
               <a:t>    • Kodlama bilmeden yapabilirsin!</a:t>
             </a:r>
           </a:p>
           <a:p>
             <a:pPr>
-              <a:spcAft>
-                <a:spcPts val="1200"/>
-              </a:spcAft>
-              <a:defRPr sz="2000"/>
-            </a:pPr>
-          </a:p>
-          <a:p>
-            <a:pPr>
-              <a:spcAft>
-                <a:spcPts val="1200"/>
+              <a:lnSpc>
+                <a:spcPct val="90000"/>
+              </a:lnSpc>
+              <a:spcAft>
+                <a:spcPts val="300"/>
+              </a:spcAft>
+              <a:defRPr sz="2000"/>
+            </a:pPr>
+          </a:p>
+          <a:p>
+            <a:pPr>
+              <a:lnSpc>
+                <a:spcPct val="90000"/>
+              </a:lnSpc>
+              <a:spcAft>
+                <a:spcPts val="300"/>
               </a:spcAft>
               <a:defRPr sz="2000" b="1"/>
             </a:pPr>
             <a:r>
-              <a:rPr sz="1400"/>
+              <a:rPr sz="1300"/>
               <a:t>💡 Nasıl Başlarsın?</a:t>
             </a:r>
           </a:p>
           <a:p>
             <a:pPr>
-              <a:spcAft>
-                <a:spcPts val="1200"/>
-              </a:spcAft>
-              <a:defRPr sz="2000"/>
-            </a:pPr>
-            <a:r>
-              <a:rPr sz="1400"/>
+              <a:lnSpc>
+                <a:spcPct val="90000"/>
+              </a:lnSpc>
+              <a:spcAft>
+                <a:spcPts val="300"/>
+              </a:spcAft>
+              <a:defRPr sz="2000"/>
+            </a:pPr>
+            <a:r>
+              <a:rPr sz="1300"/>
               <a:t>1️⃣ Merak et ve araştır</a:t>
             </a:r>
           </a:p>
           <a:p>
             <a:pPr>
-              <a:spcAft>
-                <a:spcPts val="1200"/>
-              </a:spcAft>
-              <a:defRPr sz="2000"/>
-            </a:pPr>
-            <a:r>
-              <a:rPr sz="1400"/>
+              <a:lnSpc>
+                <a:spcPct val="90000"/>
+              </a:lnSpc>
+              <a:spcAft>
+                <a:spcPts val="300"/>
+              </a:spcAft>
+              <a:defRPr sz="2000"/>
+            </a:pPr>
+            <a:r>
+              <a:rPr sz="1300"/>
               <a:t>2️⃣ Basit projelerle başla</a:t>
             </a:r>
           </a:p>
           <a:p>
             <a:pPr>
-              <a:spcAft>
-                <a:spcPts val="1200"/>
-              </a:spcAft>
-              <a:defRPr sz="2000"/>
-            </a:pPr>
-            <a:r>
-              <a:rPr sz="1400"/>
+              <a:lnSpc>
+                <a:spcPct val="90000"/>
+              </a:lnSpc>
+              <a:spcAft>
+                <a:spcPts val="300"/>
+              </a:spcAft>
+              <a:defRPr sz="2000"/>
+            </a:pPr>
+            <a:r>
+              <a:rPr sz="1300"/>
               <a:t>3️⃣ Deneme yanılma yap</a:t>
             </a:r>
           </a:p>
           <a:p>
             <a:pPr>
-              <a:spcAft>
-                <a:spcPts val="1200"/>
-              </a:spcAft>
-              <a:defRPr sz="2000"/>
-            </a:pPr>
-            <a:r>
-              <a:rPr sz="1400"/>
+              <a:lnSpc>
+                <a:spcPct val="90000"/>
+              </a:lnSpc>
+              <a:spcAft>
+                <a:spcPts val="300"/>
+              </a:spcAft>
+              <a:defRPr sz="2000"/>
+            </a:pPr>
+            <a:r>
+              <a:rPr sz="1300"/>
               <a:t>4️⃣ Ebeveyn/öğretmen gözetiminde kullan</a:t>
             </a:r>
           </a:p>
@@ -7807,7 +8260,7 @@
         </p:nvSpPr>
         <p:spPr/>
         <p:txBody>
-          <a:bodyPr/>
+          <a:bodyPr wrap="square"/>
           <a:lstStyle/>
           <a:p>
             <a:pPr>
@@ -7861,320 +8314,416 @@
             <a:spAutoFit/>
           </a:bodyPr>
           <a:lstStyle/>
-          <a:p/>
-          <a:p>
-            <a:pPr>
-              <a:spcAft>
-                <a:spcPts val="1200"/>
-              </a:spcAft>
-              <a:defRPr sz="2000"/>
-            </a:pPr>
-            <a:r>
-              <a:rPr sz="1400"/>
+          <a:p>
+            <a:pPr>
+              <a:lnSpc>
+                <a:spcPct val="90000"/>
+              </a:lnSpc>
+              <a:spcAft>
+                <a:spcPts val="300"/>
+              </a:spcAft>
+            </a:pPr>
+          </a:p>
+          <a:p>
+            <a:pPr>
+              <a:lnSpc>
+                <a:spcPct val="90000"/>
+              </a:lnSpc>
+              <a:spcAft>
+                <a:spcPts val="300"/>
+              </a:spcAft>
+              <a:defRPr sz="2000"/>
+            </a:pPr>
+            <a:r>
+              <a:rPr sz="1300"/>
               <a:t>Yapay zeka gelecekte nasıl olacak?</a:t>
             </a:r>
           </a:p>
           <a:p>
             <a:pPr>
-              <a:spcAft>
-                <a:spcPts val="1200"/>
-              </a:spcAft>
-              <a:defRPr sz="2000"/>
-            </a:pPr>
-          </a:p>
-          <a:p>
-            <a:pPr>
-              <a:spcAft>
-                <a:spcPts val="1200"/>
+              <a:lnSpc>
+                <a:spcPct val="90000"/>
+              </a:lnSpc>
+              <a:spcAft>
+                <a:spcPts val="300"/>
+              </a:spcAft>
+              <a:defRPr sz="2000"/>
+            </a:pPr>
+          </a:p>
+          <a:p>
+            <a:pPr>
+              <a:lnSpc>
+                <a:spcPct val="90000"/>
+              </a:lnSpc>
+              <a:spcAft>
+                <a:spcPts val="300"/>
               </a:spcAft>
               <a:defRPr sz="2000" b="1"/>
             </a:pPr>
             <a:r>
-              <a:rPr sz="1400"/>
+              <a:rPr sz="1300"/>
               <a:t>✅ Gelecekteki AI Uygulamaları:</a:t>
             </a:r>
           </a:p>
           <a:p>
             <a:pPr>
-              <a:spcAft>
-                <a:spcPts val="1200"/>
-              </a:spcAft>
-              <a:defRPr sz="2000"/>
-            </a:pPr>
-          </a:p>
-          <a:p>
-            <a:pPr>
-              <a:spcAft>
-                <a:spcPts val="1200"/>
-              </a:spcAft>
-              <a:defRPr sz="2000"/>
-            </a:pPr>
-            <a:r>
-              <a:rPr sz="1400"/>
+              <a:lnSpc>
+                <a:spcPct val="90000"/>
+              </a:lnSpc>
+              <a:spcAft>
+                <a:spcPts val="300"/>
+              </a:spcAft>
+              <a:defRPr sz="2000"/>
+            </a:pPr>
+          </a:p>
+          <a:p>
+            <a:pPr>
+              <a:lnSpc>
+                <a:spcPct val="90000"/>
+              </a:lnSpc>
+              <a:spcAft>
+                <a:spcPts val="300"/>
+              </a:spcAft>
+              <a:defRPr sz="2000"/>
+            </a:pPr>
+            <a:r>
+              <a:rPr sz="1300"/>
               <a:t>🚗 Otonom Araçlar:</a:t>
             </a:r>
           </a:p>
           <a:p>
             <a:pPr lvl="1">
-              <a:spcAft>
-                <a:spcPts val="1200"/>
-              </a:spcAft>
-              <a:defRPr sz="1800"/>
-            </a:pPr>
-            <a:r>
-              <a:rPr sz="1400"/>
+              <a:lnSpc>
+                <a:spcPct val="90000"/>
+              </a:lnSpc>
+              <a:spcAft>
+                <a:spcPts val="300"/>
+              </a:spcAft>
+              <a:defRPr sz="1800"/>
+            </a:pPr>
+            <a:r>
+              <a:rPr sz="1300"/>
               <a:t>    • Kendi kendine giden arabalar</a:t>
             </a:r>
           </a:p>
           <a:p>
             <a:pPr lvl="1">
-              <a:spcAft>
-                <a:spcPts val="1200"/>
-              </a:spcAft>
-              <a:defRPr sz="1800"/>
-            </a:pPr>
-            <a:r>
-              <a:rPr sz="1400"/>
+              <a:lnSpc>
+                <a:spcPct val="90000"/>
+              </a:lnSpc>
+              <a:spcAft>
+                <a:spcPts val="300"/>
+              </a:spcAft>
+              <a:defRPr sz="1800"/>
+            </a:pPr>
+            <a:r>
+              <a:rPr sz="1300"/>
               <a:t>    • Trafik kazaları azalacak</a:t>
             </a:r>
           </a:p>
           <a:p>
             <a:pPr>
-              <a:spcAft>
-                <a:spcPts val="1200"/>
-              </a:spcAft>
-              <a:defRPr sz="2000"/>
-            </a:pPr>
-          </a:p>
-          <a:p>
-            <a:pPr>
-              <a:spcAft>
-                <a:spcPts val="1200"/>
-              </a:spcAft>
-              <a:defRPr sz="2000"/>
-            </a:pPr>
-            <a:r>
-              <a:rPr sz="1400"/>
+              <a:lnSpc>
+                <a:spcPct val="90000"/>
+              </a:lnSpc>
+              <a:spcAft>
+                <a:spcPts val="300"/>
+              </a:spcAft>
+              <a:defRPr sz="2000"/>
+            </a:pPr>
+          </a:p>
+          <a:p>
+            <a:pPr>
+              <a:lnSpc>
+                <a:spcPct val="90000"/>
+              </a:lnSpc>
+              <a:spcAft>
+                <a:spcPts val="300"/>
+              </a:spcAft>
+              <a:defRPr sz="2000"/>
+            </a:pPr>
+            <a:r>
+              <a:rPr sz="1300"/>
               <a:t>🏥 Gelişmiş Sağlık:</a:t>
             </a:r>
           </a:p>
           <a:p>
             <a:pPr lvl="1">
-              <a:spcAft>
-                <a:spcPts val="1200"/>
-              </a:spcAft>
-              <a:defRPr sz="1800"/>
-            </a:pPr>
-            <a:r>
-              <a:rPr sz="1400"/>
+              <a:lnSpc>
+                <a:spcPct val="90000"/>
+              </a:lnSpc>
+              <a:spcAft>
+                <a:spcPts val="300"/>
+              </a:spcAft>
+              <a:defRPr sz="1800"/>
+            </a:pPr>
+            <a:r>
+              <a:rPr sz="1300"/>
               <a:t>    • Hastalık teşhisi</a:t>
             </a:r>
           </a:p>
           <a:p>
             <a:pPr lvl="1">
-              <a:spcAft>
-                <a:spcPts val="1200"/>
-              </a:spcAft>
-              <a:defRPr sz="1800"/>
-            </a:pPr>
-            <a:r>
-              <a:rPr sz="1400"/>
+              <a:lnSpc>
+                <a:spcPct val="90000"/>
+              </a:lnSpc>
+              <a:spcAft>
+                <a:spcPts val="300"/>
+              </a:spcAft>
+              <a:defRPr sz="1800"/>
+            </a:pPr>
+            <a:r>
+              <a:rPr sz="1300"/>
               <a:t>    • Kişiselleştirilmiş tedavi</a:t>
             </a:r>
           </a:p>
           <a:p>
             <a:pPr>
-              <a:spcAft>
-                <a:spcPts val="1200"/>
-              </a:spcAft>
-              <a:defRPr sz="2000"/>
-            </a:pPr>
-          </a:p>
-          <a:p>
-            <a:pPr>
-              <a:spcAft>
-                <a:spcPts val="1200"/>
-              </a:spcAft>
-              <a:defRPr sz="2000"/>
-            </a:pPr>
-            <a:r>
-              <a:rPr sz="1400"/>
+              <a:lnSpc>
+                <a:spcPct val="90000"/>
+              </a:lnSpc>
+              <a:spcAft>
+                <a:spcPts val="300"/>
+              </a:spcAft>
+              <a:defRPr sz="2000"/>
+            </a:pPr>
+          </a:p>
+          <a:p>
+            <a:pPr>
+              <a:lnSpc>
+                <a:spcPct val="90000"/>
+              </a:lnSpc>
+              <a:spcAft>
+                <a:spcPts val="300"/>
+              </a:spcAft>
+              <a:defRPr sz="2000"/>
+            </a:pPr>
+            <a:r>
+              <a:rPr sz="1300"/>
               <a:t>🏠 Akıllı Şehirler:</a:t>
             </a:r>
           </a:p>
           <a:p>
             <a:pPr lvl="1">
-              <a:spcAft>
-                <a:spcPts val="1200"/>
-              </a:spcAft>
-              <a:defRPr sz="1800"/>
-            </a:pPr>
-            <a:r>
-              <a:rPr sz="1400"/>
+              <a:lnSpc>
+                <a:spcPct val="90000"/>
+              </a:lnSpc>
+              <a:spcAft>
+                <a:spcPts val="300"/>
+              </a:spcAft>
+              <a:defRPr sz="1800"/>
+            </a:pPr>
+            <a:r>
+              <a:rPr sz="1300"/>
               <a:t>    • Trafik yönetimi</a:t>
             </a:r>
           </a:p>
           <a:p>
             <a:pPr lvl="1">
-              <a:spcAft>
-                <a:spcPts val="1200"/>
-              </a:spcAft>
-              <a:defRPr sz="1800"/>
-            </a:pPr>
-            <a:r>
-              <a:rPr sz="1400"/>
+              <a:lnSpc>
+                <a:spcPct val="90000"/>
+              </a:lnSpc>
+              <a:spcAft>
+                <a:spcPts val="300"/>
+              </a:spcAft>
+              <a:defRPr sz="1800"/>
+            </a:pPr>
+            <a:r>
+              <a:rPr sz="1300"/>
               <a:t>    • Enerji tasarrufu</a:t>
             </a:r>
           </a:p>
           <a:p>
             <a:pPr>
-              <a:spcAft>
-                <a:spcPts val="1200"/>
-              </a:spcAft>
-              <a:defRPr sz="2000"/>
-            </a:pPr>
-          </a:p>
-          <a:p>
-            <a:pPr>
-              <a:spcAft>
-                <a:spcPts val="1200"/>
-              </a:spcAft>
-              <a:defRPr sz="2000"/>
-            </a:pPr>
-            <a:r>
-              <a:rPr sz="1400"/>
+              <a:lnSpc>
+                <a:spcPct val="90000"/>
+              </a:lnSpc>
+              <a:spcAft>
+                <a:spcPts val="300"/>
+              </a:spcAft>
+              <a:defRPr sz="2000"/>
+            </a:pPr>
+          </a:p>
+          <a:p>
+            <a:pPr>
+              <a:lnSpc>
+                <a:spcPct val="90000"/>
+              </a:lnSpc>
+              <a:spcAft>
+                <a:spcPts val="300"/>
+              </a:spcAft>
+              <a:defRPr sz="2000"/>
+            </a:pPr>
+            <a:r>
+              <a:rPr sz="1300"/>
               <a:t>🌱 Çevre Koruma:</a:t>
             </a:r>
           </a:p>
           <a:p>
             <a:pPr lvl="1">
-              <a:spcAft>
-                <a:spcPts val="1200"/>
-              </a:spcAft>
-              <a:defRPr sz="1800"/>
-            </a:pPr>
-            <a:r>
-              <a:rPr sz="1400"/>
+              <a:lnSpc>
+                <a:spcPct val="90000"/>
+              </a:lnSpc>
+              <a:spcAft>
+                <a:spcPts val="300"/>
+              </a:spcAft>
+              <a:defRPr sz="1800"/>
+            </a:pPr>
+            <a:r>
+              <a:rPr sz="1300"/>
               <a:t>    • İklim değişikliği tahmini</a:t>
             </a:r>
           </a:p>
           <a:p>
             <a:pPr lvl="1">
-              <a:spcAft>
-                <a:spcPts val="1200"/>
-              </a:spcAft>
-              <a:defRPr sz="1800"/>
-            </a:pPr>
-            <a:r>
-              <a:rPr sz="1400"/>
+              <a:lnSpc>
+                <a:spcPct val="90000"/>
+              </a:lnSpc>
+              <a:spcAft>
+                <a:spcPts val="300"/>
+              </a:spcAft>
+              <a:defRPr sz="1800"/>
+            </a:pPr>
+            <a:r>
+              <a:rPr sz="1300"/>
               <a:t>    • Geri dönüşüm optimizasyonu</a:t>
             </a:r>
           </a:p>
           <a:p>
             <a:pPr>
-              <a:spcAft>
-                <a:spcPts val="1200"/>
-              </a:spcAft>
-              <a:defRPr sz="2000"/>
-            </a:pPr>
-          </a:p>
-          <a:p>
-            <a:pPr>
-              <a:spcAft>
-                <a:spcPts val="1200"/>
-              </a:spcAft>
-              <a:defRPr sz="2000"/>
-            </a:pPr>
-            <a:r>
-              <a:rPr sz="1400"/>
+              <a:lnSpc>
+                <a:spcPct val="90000"/>
+              </a:lnSpc>
+              <a:spcAft>
+                <a:spcPts val="300"/>
+              </a:spcAft>
+              <a:defRPr sz="2000"/>
+            </a:pPr>
+          </a:p>
+          <a:p>
+            <a:pPr>
+              <a:lnSpc>
+                <a:spcPct val="90000"/>
+              </a:lnSpc>
+              <a:spcAft>
+                <a:spcPts val="300"/>
+              </a:spcAft>
+              <a:defRPr sz="2000"/>
+            </a:pPr>
+            <a:r>
+              <a:rPr sz="1300"/>
               <a:t>🎓 Eğitim:</a:t>
             </a:r>
           </a:p>
           <a:p>
             <a:pPr lvl="1">
-              <a:spcAft>
-                <a:spcPts val="1200"/>
-              </a:spcAft>
-              <a:defRPr sz="1800"/>
-            </a:pPr>
-            <a:r>
-              <a:rPr sz="1400"/>
+              <a:lnSpc>
+                <a:spcPct val="90000"/>
+              </a:lnSpc>
+              <a:spcAft>
+                <a:spcPts val="300"/>
+              </a:spcAft>
+              <a:defRPr sz="1800"/>
+            </a:pPr>
+            <a:r>
+              <a:rPr sz="1300"/>
               <a:t>    • Kişiselleştirilmiş öğrenme</a:t>
             </a:r>
           </a:p>
           <a:p>
             <a:pPr lvl="1">
-              <a:spcAft>
-                <a:spcPts val="1200"/>
-              </a:spcAft>
-              <a:defRPr sz="1800"/>
-            </a:pPr>
-            <a:r>
-              <a:rPr sz="1400"/>
+              <a:lnSpc>
+                <a:spcPct val="90000"/>
+              </a:lnSpc>
+              <a:spcAft>
+                <a:spcPts val="300"/>
+              </a:spcAft>
+              <a:defRPr sz="1800"/>
+            </a:pPr>
+            <a:r>
+              <a:rPr sz="1300"/>
               <a:t>    • AI öğretmen yardımcıları</a:t>
             </a:r>
           </a:p>
           <a:p>
             <a:pPr>
-              <a:spcAft>
-                <a:spcPts val="1200"/>
-              </a:spcAft>
-              <a:defRPr sz="2000"/>
-            </a:pPr>
-          </a:p>
-          <a:p>
-            <a:pPr>
-              <a:spcAft>
-                <a:spcPts val="1200"/>
-              </a:spcAft>
-              <a:defRPr sz="2000"/>
-            </a:pPr>
-            <a:r>
-              <a:rPr sz="1400"/>
+              <a:lnSpc>
+                <a:spcPct val="90000"/>
+              </a:lnSpc>
+              <a:spcAft>
+                <a:spcPts val="300"/>
+              </a:spcAft>
+              <a:defRPr sz="2000"/>
+            </a:pPr>
+          </a:p>
+          <a:p>
+            <a:pPr>
+              <a:lnSpc>
+                <a:spcPct val="90000"/>
+              </a:lnSpc>
+              <a:spcAft>
+                <a:spcPts val="300"/>
+              </a:spcAft>
+              <a:defRPr sz="2000"/>
+            </a:pPr>
+            <a:r>
+              <a:rPr sz="1300"/>
               <a:t>🤖 Genel Yapay Zeka (AGI)?</a:t>
             </a:r>
           </a:p>
           <a:p>
             <a:pPr lvl="1">
-              <a:spcAft>
-                <a:spcPts val="1200"/>
-              </a:spcAft>
-              <a:defRPr sz="1800"/>
-            </a:pPr>
-            <a:r>
-              <a:rPr sz="1400"/>
+              <a:lnSpc>
+                <a:spcPct val="90000"/>
+              </a:lnSpc>
+              <a:spcAft>
+                <a:spcPts val="300"/>
+              </a:spcAft>
+              <a:defRPr sz="1800"/>
+            </a:pPr>
+            <a:r>
+              <a:rPr sz="1300"/>
               <a:t>    • Her alanda insan seviyesinde AI</a:t>
             </a:r>
           </a:p>
           <a:p>
             <a:pPr lvl="1">
-              <a:spcAft>
-                <a:spcPts val="1200"/>
-              </a:spcAft>
-              <a:defRPr sz="1800"/>
-            </a:pPr>
-            <a:r>
-              <a:rPr sz="1400"/>
+              <a:lnSpc>
+                <a:spcPct val="90000"/>
+              </a:lnSpc>
+              <a:spcAft>
+                <a:spcPts val="300"/>
+              </a:spcAft>
+              <a:defRPr sz="1800"/>
+            </a:pPr>
+            <a:r>
+              <a:rPr sz="1300"/>
               <a:t>    • Henüz çok uzak!</a:t>
             </a:r>
           </a:p>
           <a:p>
             <a:pPr>
-              <a:spcAft>
-                <a:spcPts val="1200"/>
-              </a:spcAft>
-              <a:defRPr sz="2000"/>
-            </a:pPr>
-          </a:p>
-          <a:p>
-            <a:pPr>
-              <a:spcAft>
-                <a:spcPts val="1200"/>
+              <a:lnSpc>
+                <a:spcPct val="90000"/>
+              </a:lnSpc>
+              <a:spcAft>
+                <a:spcPts val="300"/>
+              </a:spcAft>
+              <a:defRPr sz="2000"/>
+            </a:pPr>
+          </a:p>
+          <a:p>
+            <a:pPr>
+              <a:lnSpc>
+                <a:spcPct val="90000"/>
+              </a:lnSpc>
+              <a:spcAft>
+                <a:spcPts val="300"/>
               </a:spcAft>
               <a:defRPr sz="2000" b="1"/>
             </a:pPr>
             <a:r>
-              <a:rPr sz="1400"/>
+              <a:rPr sz="1300"/>
               <a:t>💡 Sen bu geleceği şekillendireceksin!</a:t>
             </a:r>
           </a:p>
@@ -8210,7 +8759,7 @@
         </p:nvSpPr>
         <p:spPr/>
         <p:txBody>
-          <a:bodyPr/>
+          <a:bodyPr wrap="square"/>
           <a:lstStyle/>
           <a:p>
             <a:pPr>
@@ -8264,232 +8813,301 @@
             <a:spAutoFit/>
           </a:bodyPr>
           <a:lstStyle/>
-          <a:p/>
-          <a:p>
-            <a:pPr>
-              <a:spcAft>
-                <a:spcPts val="1200"/>
-              </a:spcAft>
-              <a:defRPr sz="2000"/>
-            </a:pPr>
-            <a:r>
-              <a:rPr sz="1400"/>
+          <a:p>
+            <a:pPr>
+              <a:lnSpc>
+                <a:spcPct val="90000"/>
+              </a:lnSpc>
+              <a:spcAft>
+                <a:spcPts val="300"/>
+              </a:spcAft>
+            </a:pPr>
+          </a:p>
+          <a:p>
+            <a:pPr>
+              <a:lnSpc>
+                <a:spcPct val="90000"/>
+              </a:lnSpc>
+              <a:spcAft>
+                <a:spcPts val="300"/>
+              </a:spcAft>
+              <a:defRPr sz="2000"/>
+            </a:pPr>
+            <a:r>
+              <a:rPr sz="1300"/>
               <a:t>Bu ünitede neler öğrendik?</a:t>
             </a:r>
           </a:p>
           <a:p>
             <a:pPr>
-              <a:spcAft>
-                <a:spcPts val="1200"/>
-              </a:spcAft>
-              <a:defRPr sz="2000"/>
-            </a:pPr>
-          </a:p>
-          <a:p>
-            <a:pPr>
-              <a:spcAft>
-                <a:spcPts val="1200"/>
+              <a:lnSpc>
+                <a:spcPct val="90000"/>
+              </a:lnSpc>
+              <a:spcAft>
+                <a:spcPts val="300"/>
+              </a:spcAft>
+              <a:defRPr sz="2000"/>
+            </a:pPr>
+          </a:p>
+          <a:p>
+            <a:pPr>
+              <a:lnSpc>
+                <a:spcPct val="90000"/>
+              </a:lnSpc>
+              <a:spcAft>
+                <a:spcPts val="300"/>
               </a:spcAft>
               <a:defRPr sz="2000" b="1"/>
             </a:pPr>
             <a:r>
-              <a:rPr sz="1400"/>
+              <a:rPr sz="1300"/>
               <a:t>✅ Yapay zeka nedir, nasıl çalışır</a:t>
             </a:r>
           </a:p>
           <a:p>
             <a:pPr>
-              <a:spcAft>
-                <a:spcPts val="1200"/>
+              <a:lnSpc>
+                <a:spcPct val="90000"/>
+              </a:lnSpc>
+              <a:spcAft>
+                <a:spcPts val="300"/>
               </a:spcAft>
               <a:defRPr sz="2000" b="1"/>
             </a:pPr>
             <a:r>
-              <a:rPr sz="1400"/>
+              <a:rPr sz="1300"/>
               <a:t>✅ Yapay zekanın tarihi</a:t>
             </a:r>
           </a:p>
           <a:p>
             <a:pPr>
-              <a:spcAft>
-                <a:spcPts val="1200"/>
+              <a:lnSpc>
+                <a:spcPct val="90000"/>
+              </a:lnSpc>
+              <a:spcAft>
+                <a:spcPts val="300"/>
               </a:spcAft>
               <a:defRPr sz="2000" b="1"/>
             </a:pPr>
             <a:r>
-              <a:rPr sz="1400"/>
+              <a:rPr sz="1300"/>
               <a:t>✅ Makine öğrenmesi ve derin öğrenme</a:t>
             </a:r>
           </a:p>
           <a:p>
             <a:pPr>
-              <a:spcAft>
-                <a:spcPts val="1200"/>
+              <a:lnSpc>
+                <a:spcPct val="90000"/>
+              </a:lnSpc>
+              <a:spcAft>
+                <a:spcPts val="300"/>
               </a:spcAft>
               <a:defRPr sz="2000" b="1"/>
             </a:pPr>
             <a:r>
-              <a:rPr sz="1400"/>
+              <a:rPr sz="1300"/>
               <a:t>✅ Sesli asistanlar ve günlük kullanım</a:t>
             </a:r>
           </a:p>
           <a:p>
             <a:pPr>
-              <a:spcAft>
-                <a:spcPts val="1200"/>
+              <a:lnSpc>
+                <a:spcPct val="90000"/>
+              </a:lnSpc>
+              <a:spcAft>
+                <a:spcPts val="300"/>
               </a:spcAft>
               <a:defRPr sz="2000" b="1"/>
             </a:pPr>
             <a:r>
-              <a:rPr sz="1400"/>
+              <a:rPr sz="1300"/>
               <a:t>✅ Görüntü tanıma teknolojisi</a:t>
             </a:r>
           </a:p>
           <a:p>
             <a:pPr>
-              <a:spcAft>
-                <a:spcPts val="1200"/>
+              <a:lnSpc>
+                <a:spcPct val="90000"/>
+              </a:lnSpc>
+              <a:spcAft>
+                <a:spcPts val="300"/>
               </a:spcAft>
               <a:defRPr sz="2000" b="1"/>
             </a:pPr>
             <a:r>
-              <a:rPr sz="1400"/>
+              <a:rPr sz="1300"/>
               <a:t>✅ Öneri sistemleri</a:t>
             </a:r>
           </a:p>
           <a:p>
             <a:pPr>
-              <a:spcAft>
-                <a:spcPts val="1200"/>
+              <a:lnSpc>
+                <a:spcPct val="90000"/>
+              </a:lnSpc>
+              <a:spcAft>
+                <a:spcPts val="300"/>
               </a:spcAft>
               <a:defRPr sz="2000" b="1"/>
             </a:pPr>
             <a:r>
-              <a:rPr sz="1400"/>
+              <a:rPr sz="1300"/>
               <a:t>✅ Oyunlarda yapay zeka</a:t>
             </a:r>
           </a:p>
           <a:p>
             <a:pPr>
-              <a:spcAft>
-                <a:spcPts val="1200"/>
+              <a:lnSpc>
+                <a:spcPct val="90000"/>
+              </a:lnSpc>
+              <a:spcAft>
+                <a:spcPts val="300"/>
               </a:spcAft>
               <a:defRPr sz="2000" b="1"/>
             </a:pPr>
             <a:r>
-              <a:rPr sz="1400"/>
+              <a:rPr sz="1300"/>
               <a:t>✅ Yaratıcı AI (sanat, müzik, metin)</a:t>
             </a:r>
           </a:p>
           <a:p>
             <a:pPr>
-              <a:spcAft>
-                <a:spcPts val="1200"/>
+              <a:lnSpc>
+                <a:spcPct val="90000"/>
+              </a:lnSpc>
+              <a:spcAft>
+                <a:spcPts val="300"/>
               </a:spcAft>
               <a:defRPr sz="2000" b="1"/>
             </a:pPr>
             <a:r>
-              <a:rPr sz="1400"/>
+              <a:rPr sz="1300"/>
               <a:t>✅ Yapay zekanın etik sorunları</a:t>
             </a:r>
           </a:p>
           <a:p>
             <a:pPr>
-              <a:spcAft>
-                <a:spcPts val="1200"/>
+              <a:lnSpc>
+                <a:spcPct val="90000"/>
+              </a:lnSpc>
+              <a:spcAft>
+                <a:spcPts val="300"/>
               </a:spcAft>
               <a:defRPr sz="2000" b="1"/>
             </a:pPr>
             <a:r>
-              <a:rPr sz="1400"/>
+              <a:rPr sz="1300"/>
               <a:t>✅ Geleceğin meslekleri</a:t>
             </a:r>
           </a:p>
           <a:p>
             <a:pPr>
-              <a:spcAft>
-                <a:spcPts val="1200"/>
+              <a:lnSpc>
+                <a:spcPct val="90000"/>
+              </a:lnSpc>
+              <a:spcAft>
+                <a:spcPts val="300"/>
               </a:spcAft>
               <a:defRPr sz="2000" b="1"/>
             </a:pPr>
             <a:r>
-              <a:rPr sz="1400"/>
+              <a:rPr sz="1300"/>
               <a:t>✅ AI ile neler yapabilirsin</a:t>
             </a:r>
           </a:p>
           <a:p>
             <a:pPr>
-              <a:spcAft>
-                <a:spcPts val="1200"/>
-              </a:spcAft>
-              <a:defRPr sz="2000"/>
-            </a:pPr>
-          </a:p>
-          <a:p>
-            <a:pPr>
-              <a:spcAft>
-                <a:spcPts val="1200"/>
+              <a:lnSpc>
+                <a:spcPct val="90000"/>
+              </a:lnSpc>
+              <a:spcAft>
+                <a:spcPts val="300"/>
+              </a:spcAft>
+              <a:defRPr sz="2000"/>
+            </a:pPr>
+          </a:p>
+          <a:p>
+            <a:pPr>
+              <a:lnSpc>
+                <a:spcPct val="90000"/>
+              </a:lnSpc>
+              <a:spcAft>
+                <a:spcPts val="300"/>
               </a:spcAft>
               <a:defRPr sz="2000" b="1"/>
             </a:pPr>
             <a:r>
-              <a:rPr sz="1400"/>
+              <a:rPr sz="1300"/>
               <a:t>💡 Anahtar Mesaj:</a:t>
             </a:r>
           </a:p>
           <a:p>
             <a:pPr>
-              <a:spcAft>
-                <a:spcPts val="1200"/>
-              </a:spcAft>
-              <a:defRPr sz="2000"/>
-            </a:pPr>
-            <a:r>
-              <a:rPr sz="1400"/>
+              <a:lnSpc>
+                <a:spcPct val="90000"/>
+              </a:lnSpc>
+              <a:spcAft>
+                <a:spcPts val="300"/>
+              </a:spcAft>
+              <a:defRPr sz="2000"/>
+            </a:pPr>
+            <a:r>
+              <a:rPr sz="1300"/>
               <a:t>Yapay zeka geleceğin en önemli teknolojilerinden biri!</a:t>
             </a:r>
           </a:p>
           <a:p>
             <a:pPr>
-              <a:spcAft>
-                <a:spcPts val="1200"/>
-              </a:spcAft>
-              <a:defRPr sz="2000"/>
-            </a:pPr>
-            <a:r>
-              <a:rPr sz="1400"/>
+              <a:lnSpc>
+                <a:spcPct val="90000"/>
+              </a:lnSpc>
+              <a:spcAft>
+                <a:spcPts val="300"/>
+              </a:spcAft>
+              <a:defRPr sz="2000"/>
+            </a:pPr>
+            <a:r>
+              <a:rPr sz="1300"/>
               <a:t>Sen de AI ile çalışmayı öğrenebilirsin.</a:t>
             </a:r>
           </a:p>
           <a:p>
             <a:pPr>
-              <a:spcAft>
-                <a:spcPts val="1200"/>
-              </a:spcAft>
-              <a:defRPr sz="2000"/>
-            </a:pPr>
-          </a:p>
-          <a:p>
-            <a:pPr>
-              <a:spcAft>
-                <a:spcPts val="1200"/>
+              <a:lnSpc>
+                <a:spcPct val="90000"/>
+              </a:lnSpc>
+              <a:spcAft>
+                <a:spcPts val="300"/>
+              </a:spcAft>
+              <a:defRPr sz="2000"/>
+            </a:pPr>
+          </a:p>
+          <a:p>
+            <a:pPr>
+              <a:lnSpc>
+                <a:spcPct val="90000"/>
+              </a:lnSpc>
+              <a:spcAft>
+                <a:spcPts val="300"/>
               </a:spcAft>
               <a:defRPr sz="2000" b="1"/>
             </a:pPr>
             <a:r>
-              <a:rPr sz="1400"/>
+              <a:rPr sz="1300"/>
               <a:t>🎯 Artık yapay zeka konusunda bilinçlisin!</a:t>
             </a:r>
           </a:p>
           <a:p>
             <a:pPr>
-              <a:spcAft>
-                <a:spcPts val="1200"/>
-              </a:spcAft>
-              <a:defRPr sz="2000"/>
-            </a:pPr>
-            <a:r>
-              <a:rPr sz="1400"/>
+              <a:lnSpc>
+                <a:spcPct val="90000"/>
+              </a:lnSpc>
+              <a:spcAft>
+                <a:spcPts val="300"/>
+              </a:spcAft>
+              <a:defRPr sz="2000"/>
+            </a:pPr>
+            <a:r>
+              <a:rPr sz="1300"/>
               <a:t>🤖 Geleceği sen şekillendir!</a:t>
             </a:r>
           </a:p>
@@ -8525,7 +9143,7 @@
         </p:nvSpPr>
         <p:spPr/>
         <p:txBody>
-          <a:bodyPr/>
+          <a:bodyPr wrap="square"/>
           <a:lstStyle/>
           <a:p>
             <a:pPr>
@@ -8579,240 +9197,312 @@
             <a:spAutoFit/>
           </a:bodyPr>
           <a:lstStyle/>
-          <a:p/>
-          <a:p>
-            <a:pPr>
-              <a:spcAft>
-                <a:spcPts val="1200"/>
-              </a:spcAft>
-              <a:defRPr sz="2000"/>
-            </a:pPr>
-            <a:r>
-              <a:rPr sz="1400"/>
+          <a:p>
+            <a:pPr>
+              <a:lnSpc>
+                <a:spcPct val="90000"/>
+              </a:lnSpc>
+              <a:spcAft>
+                <a:spcPts val="300"/>
+              </a:spcAft>
+            </a:pPr>
+          </a:p>
+          <a:p>
+            <a:pPr>
+              <a:lnSpc>
+                <a:spcPct val="90000"/>
+              </a:lnSpc>
+              <a:spcAft>
+                <a:spcPts val="300"/>
+              </a:spcAft>
+              <a:defRPr sz="2000"/>
+            </a:pPr>
+            <a:r>
+              <a:rPr sz="1300"/>
               <a:t>🎥 İzlenecek Videolar:</a:t>
             </a:r>
           </a:p>
           <a:p>
             <a:pPr lvl="1">
-              <a:spcAft>
-                <a:spcPts val="1200"/>
-              </a:spcAft>
-              <a:defRPr sz="1800"/>
-            </a:pPr>
-            <a:r>
-              <a:rPr sz="1400"/>
+              <a:lnSpc>
+                <a:spcPct val="90000"/>
+              </a:lnSpc>
+              <a:spcAft>
+                <a:spcPts val="300"/>
+              </a:spcAft>
+              <a:defRPr sz="1800"/>
+            </a:pPr>
+            <a:r>
+              <a:rPr sz="1300"/>
               <a:t>    • 'Yapay Zeka Nedir?' - TRT Okul</a:t>
             </a:r>
           </a:p>
           <a:p>
             <a:pPr lvl="1">
-              <a:spcAft>
-                <a:spcPts val="1200"/>
-              </a:spcAft>
-              <a:defRPr sz="1800"/>
-            </a:pPr>
-            <a:r>
-              <a:rPr sz="1400"/>
+              <a:lnSpc>
+                <a:spcPct val="90000"/>
+              </a:lnSpc>
+              <a:spcAft>
+                <a:spcPts val="300"/>
+              </a:spcAft>
+              <a:defRPr sz="1800"/>
+            </a:pPr>
+            <a:r>
+              <a:rPr sz="1300"/>
               <a:t>    • 'Makine Öğrenmesi Animasyon'</a:t>
             </a:r>
           </a:p>
           <a:p>
             <a:pPr lvl="1">
-              <a:spcAft>
-                <a:spcPts val="1200"/>
-              </a:spcAft>
-              <a:defRPr sz="1800"/>
-            </a:pPr>
-            <a:r>
-              <a:rPr sz="1400"/>
+              <a:lnSpc>
+                <a:spcPct val="90000"/>
+              </a:lnSpc>
+              <a:spcAft>
+                <a:spcPts val="300"/>
+              </a:spcAft>
+              <a:defRPr sz="1800"/>
+            </a:pPr>
+            <a:r>
+              <a:rPr sz="1300"/>
               <a:t>    • 'AI'nın Tarihi' - Kısa belgesel</a:t>
             </a:r>
           </a:p>
           <a:p>
             <a:pPr lvl="1">
-              <a:spcAft>
-                <a:spcPts val="1200"/>
-              </a:spcAft>
-              <a:defRPr sz="1800"/>
-            </a:pPr>
-            <a:r>
-              <a:rPr sz="1400"/>
+              <a:lnSpc>
+                <a:spcPct val="90000"/>
+              </a:lnSpc>
+              <a:spcAft>
+                <a:spcPts val="300"/>
+              </a:spcAft>
+              <a:defRPr sz="1800"/>
+            </a:pPr>
+            <a:r>
+              <a:rPr sz="1300"/>
               <a:t>    • 'Geleceğin Dünyası' - Bilim kurgu</a:t>
             </a:r>
           </a:p>
           <a:p>
             <a:pPr>
-              <a:spcAft>
-                <a:spcPts val="1200"/>
-              </a:spcAft>
-              <a:defRPr sz="2000"/>
-            </a:pPr>
-          </a:p>
-          <a:p>
-            <a:pPr>
-              <a:spcAft>
-                <a:spcPts val="1200"/>
-              </a:spcAft>
-              <a:defRPr sz="2000"/>
-            </a:pPr>
-            <a:r>
-              <a:rPr sz="1400"/>
+              <a:lnSpc>
+                <a:spcPct val="90000"/>
+              </a:lnSpc>
+              <a:spcAft>
+                <a:spcPts val="300"/>
+              </a:spcAft>
+              <a:defRPr sz="2000"/>
+            </a:pPr>
+          </a:p>
+          <a:p>
+            <a:pPr>
+              <a:lnSpc>
+                <a:spcPct val="90000"/>
+              </a:lnSpc>
+              <a:spcAft>
+                <a:spcPts val="300"/>
+              </a:spcAft>
+              <a:defRPr sz="2000"/>
+            </a:pPr>
+            <a:r>
+              <a:rPr sz="1300"/>
               <a:t>🌐 Keşfedilecek Siteler:</a:t>
             </a:r>
           </a:p>
           <a:p>
             <a:pPr lvl="1">
-              <a:spcAft>
-                <a:spcPts val="1200"/>
-              </a:spcAft>
-              <a:defRPr sz="1800"/>
-            </a:pPr>
-            <a:r>
-              <a:rPr sz="1400"/>
+              <a:lnSpc>
+                <a:spcPct val="90000"/>
+              </a:lnSpc>
+              <a:spcAft>
+                <a:spcPts val="300"/>
+              </a:spcAft>
+              <a:defRPr sz="1800"/>
+            </a:pPr>
+            <a:r>
+              <a:rPr sz="1300"/>
               <a:t>    • https://teachablemachine.withgoogle.com</a:t>
             </a:r>
           </a:p>
           <a:p>
             <a:pPr lvl="1">
-              <a:spcAft>
-                <a:spcPts val="1200"/>
-              </a:spcAft>
-              <a:defRPr sz="1800"/>
-            </a:pPr>
-            <a:r>
-              <a:rPr sz="1400"/>
+              <a:lnSpc>
+                <a:spcPct val="90000"/>
+              </a:lnSpc>
+              <a:spcAft>
+                <a:spcPts val="300"/>
+              </a:spcAft>
+              <a:defRPr sz="1800"/>
+            </a:pPr>
+            <a:r>
+              <a:rPr sz="1300"/>
               <a:t>    • Scratch AI blokları</a:t>
             </a:r>
           </a:p>
           <a:p>
             <a:pPr lvl="1">
-              <a:spcAft>
-                <a:spcPts val="1200"/>
-              </a:spcAft>
-              <a:defRPr sz="1800"/>
-            </a:pPr>
-            <a:r>
-              <a:rPr sz="1400"/>
+              <a:lnSpc>
+                <a:spcPct val="90000"/>
+              </a:lnSpc>
+              <a:spcAft>
+                <a:spcPts val="300"/>
+              </a:spcAft>
+              <a:defRPr sz="1800"/>
+            </a:pPr>
+            <a:r>
+              <a:rPr sz="1300"/>
               <a:t>    • https://quickdraw.withgoogle.com (AI çizim oyunu)</a:t>
             </a:r>
           </a:p>
           <a:p>
             <a:pPr>
-              <a:spcAft>
-                <a:spcPts val="1200"/>
-              </a:spcAft>
-              <a:defRPr sz="2000"/>
-            </a:pPr>
-          </a:p>
-          <a:p>
-            <a:pPr>
-              <a:spcAft>
-                <a:spcPts val="1200"/>
-              </a:spcAft>
-              <a:defRPr sz="2000"/>
-            </a:pPr>
-            <a:r>
-              <a:rPr sz="1400"/>
+              <a:lnSpc>
+                <a:spcPct val="90000"/>
+              </a:lnSpc>
+              <a:spcAft>
+                <a:spcPts val="300"/>
+              </a:spcAft>
+              <a:defRPr sz="2000"/>
+            </a:pPr>
+          </a:p>
+          <a:p>
+            <a:pPr>
+              <a:lnSpc>
+                <a:spcPct val="90000"/>
+              </a:lnSpc>
+              <a:spcAft>
+                <a:spcPts val="300"/>
+              </a:spcAft>
+              <a:defRPr sz="2000"/>
+            </a:pPr>
+            <a:r>
+              <a:rPr sz="1300"/>
               <a:t>🎮 Oyunlar:</a:t>
             </a:r>
           </a:p>
           <a:p>
             <a:pPr lvl="1">
-              <a:spcAft>
-                <a:spcPts val="1200"/>
-              </a:spcAft>
-              <a:defRPr sz="1800"/>
-            </a:pPr>
-            <a:r>
-              <a:rPr sz="1400"/>
+              <a:lnSpc>
+                <a:spcPct val="90000"/>
+              </a:lnSpc>
+              <a:spcAft>
+                <a:spcPts val="300"/>
+              </a:spcAft>
+              <a:defRPr sz="1800"/>
+            </a:pPr>
+            <a:r>
+              <a:rPr sz="1300"/>
               <a:t>    • 'Quick, Draw!' - Google AI oyunu</a:t>
             </a:r>
           </a:p>
           <a:p>
             <a:pPr lvl="1">
-              <a:spcAft>
-                <a:spcPts val="1200"/>
-              </a:spcAft>
-              <a:defRPr sz="1800"/>
-            </a:pPr>
-            <a:r>
-              <a:rPr sz="1400"/>
+              <a:lnSpc>
+                <a:spcPct val="90000"/>
+              </a:lnSpc>
+              <a:spcAft>
+                <a:spcPts val="300"/>
+              </a:spcAft>
+              <a:defRPr sz="1800"/>
+            </a:pPr>
+            <a:r>
+              <a:rPr sz="1300"/>
               <a:t>    • 'Akinator' - Tahmin oyunu</a:t>
             </a:r>
           </a:p>
           <a:p>
             <a:pPr>
-              <a:spcAft>
-                <a:spcPts val="1200"/>
-              </a:spcAft>
-              <a:defRPr sz="2000"/>
-            </a:pPr>
-          </a:p>
-          <a:p>
-            <a:pPr>
-              <a:spcAft>
-                <a:spcPts val="1200"/>
-              </a:spcAft>
-              <a:defRPr sz="2000"/>
-            </a:pPr>
-            <a:r>
-              <a:rPr sz="1400"/>
+              <a:lnSpc>
+                <a:spcPct val="90000"/>
+              </a:lnSpc>
+              <a:spcAft>
+                <a:spcPts val="300"/>
+              </a:spcAft>
+              <a:defRPr sz="2000"/>
+            </a:pPr>
+          </a:p>
+          <a:p>
+            <a:pPr>
+              <a:lnSpc>
+                <a:spcPct val="90000"/>
+              </a:lnSpc>
+              <a:spcAft>
+                <a:spcPts val="300"/>
+              </a:spcAft>
+              <a:defRPr sz="2000"/>
+            </a:pPr>
+            <a:r>
+              <a:rPr sz="1300"/>
               <a:t>📖 Projeler:</a:t>
             </a:r>
           </a:p>
           <a:p>
             <a:pPr lvl="1">
-              <a:spcAft>
-                <a:spcPts val="1200"/>
-              </a:spcAft>
-              <a:defRPr sz="1800"/>
-            </a:pPr>
-            <a:r>
-              <a:rPr sz="1400"/>
+              <a:lnSpc>
+                <a:spcPct val="90000"/>
+              </a:lnSpc>
+              <a:spcAft>
+                <a:spcPts val="300"/>
+              </a:spcAft>
+              <a:defRPr sz="1800"/>
+            </a:pPr>
+            <a:r>
+              <a:rPr sz="1300"/>
               <a:t>    • Teachable Machine ile el hareketi tanıma</a:t>
             </a:r>
           </a:p>
           <a:p>
             <a:pPr lvl="1">
-              <a:spcAft>
-                <a:spcPts val="1200"/>
-              </a:spcAft>
-              <a:defRPr sz="1800"/>
-            </a:pPr>
-            <a:r>
-              <a:rPr sz="1400"/>
+              <a:lnSpc>
+                <a:spcPct val="90000"/>
+              </a:lnSpc>
+              <a:spcAft>
+                <a:spcPts val="300"/>
+              </a:spcAft>
+              <a:defRPr sz="1800"/>
+            </a:pPr>
+            <a:r>
+              <a:rPr sz="1300"/>
               <a:t>    • AI chatbot ile röportaj</a:t>
             </a:r>
           </a:p>
           <a:p>
             <a:pPr lvl="1">
-              <a:spcAft>
-                <a:spcPts val="1200"/>
-              </a:spcAft>
-              <a:defRPr sz="1800"/>
-            </a:pPr>
-            <a:r>
-              <a:rPr sz="1400"/>
+              <a:lnSpc>
+                <a:spcPct val="90000"/>
+              </a:lnSpc>
+              <a:spcAft>
+                <a:spcPts val="300"/>
+              </a:spcAft>
+              <a:defRPr sz="1800"/>
+            </a:pPr>
+            <a:r>
+              <a:rPr sz="1300"/>
               <a:t>    • AI görsel oluşturma projesi</a:t>
             </a:r>
           </a:p>
           <a:p>
             <a:pPr>
-              <a:spcAft>
-                <a:spcPts val="1200"/>
-              </a:spcAft>
-              <a:defRPr sz="2000"/>
-            </a:pPr>
-          </a:p>
-          <a:p>
-            <a:pPr>
-              <a:spcAft>
-                <a:spcPts val="1200"/>
+              <a:lnSpc>
+                <a:spcPct val="90000"/>
+              </a:lnSpc>
+              <a:spcAft>
+                <a:spcPts val="300"/>
+              </a:spcAft>
+              <a:defRPr sz="2000"/>
+            </a:pPr>
+          </a:p>
+          <a:p>
+            <a:pPr>
+              <a:lnSpc>
+                <a:spcPct val="90000"/>
+              </a:lnSpc>
+              <a:spcAft>
+                <a:spcPts val="300"/>
               </a:spcAft>
               <a:defRPr sz="2000" b="1"/>
             </a:pPr>
             <a:r>
-              <a:rPr sz="1400"/>
+              <a:rPr sz="1300"/>
               <a:t>💡 Yapay zeka ile geleceği keşfet!</a:t>
             </a:r>
           </a:p>
@@ -8861,7 +9551,7 @@
           <a:noFill/>
         </p:spPr>
         <p:txBody>
-          <a:bodyPr wrap="none">
+          <a:bodyPr wrap="square">
             <a:spAutoFit/>
           </a:bodyPr>
           <a:lstStyle/>
@@ -8896,7 +9586,7 @@
           <a:noFill/>
         </p:spPr>
         <p:txBody>
-          <a:bodyPr wrap="none">
+          <a:bodyPr wrap="square">
             <a:spAutoFit/>
           </a:bodyPr>
           <a:lstStyle/>
@@ -8944,7 +9634,7 @@
         </p:nvSpPr>
         <p:spPr/>
         <p:txBody>
-          <a:bodyPr/>
+          <a:bodyPr wrap="square"/>
           <a:lstStyle/>
           <a:p>
             <a:pPr>
@@ -8998,174 +9688,245 @@
             <a:spAutoFit/>
           </a:bodyPr>
           <a:lstStyle/>
-          <a:p/>
-          <a:p>
-            <a:pPr>
-              <a:spcAft>
-                <a:spcPts val="1200"/>
-              </a:spcAft>
-              <a:defRPr sz="2000"/>
-            </a:pPr>
-            <a:r>
+          <a:p>
+            <a:pPr>
+              <a:lnSpc>
+                <a:spcPct val="90000"/>
+              </a:lnSpc>
+              <a:spcAft>
+                <a:spcPts val="300"/>
+              </a:spcAft>
+            </a:pPr>
+          </a:p>
+          <a:p>
+            <a:pPr>
+              <a:lnSpc>
+                <a:spcPct val="90000"/>
+              </a:lnSpc>
+              <a:spcAft>
+                <a:spcPts val="300"/>
+              </a:spcAft>
+              <a:defRPr sz="2000"/>
+            </a:pPr>
+            <a:r>
+              <a:rPr sz="1500"/>
               <a:t>Bu ünitede neler öğreneceğiz?</a:t>
             </a:r>
           </a:p>
           <a:p>
             <a:pPr>
-              <a:spcAft>
-                <a:spcPts val="1200"/>
-              </a:spcAft>
-              <a:defRPr sz="2000"/>
-            </a:pPr>
-          </a:p>
-          <a:p>
-            <a:pPr>
-              <a:spcAft>
-                <a:spcPts val="1200"/>
+              <a:lnSpc>
+                <a:spcPct val="90000"/>
+              </a:lnSpc>
+              <a:spcAft>
+                <a:spcPts val="300"/>
+              </a:spcAft>
+              <a:defRPr sz="2000"/>
+            </a:pPr>
+          </a:p>
+          <a:p>
+            <a:pPr>
+              <a:lnSpc>
+                <a:spcPct val="90000"/>
+              </a:lnSpc>
+              <a:spcAft>
+                <a:spcPts val="300"/>
               </a:spcAft>
               <a:defRPr sz="2000" b="1"/>
             </a:pPr>
             <a:r>
+              <a:rPr sz="1500"/>
               <a:t>✅ 1. Yapay Zeka Nedir?</a:t>
             </a:r>
           </a:p>
           <a:p>
             <a:pPr>
-              <a:spcAft>
-                <a:spcPts val="1200"/>
+              <a:lnSpc>
+                <a:spcPct val="90000"/>
+              </a:lnSpc>
+              <a:spcAft>
+                <a:spcPts val="300"/>
               </a:spcAft>
               <a:defRPr sz="2000" b="1"/>
             </a:pPr>
             <a:r>
+              <a:rPr sz="1500"/>
               <a:t>✅ 2. Yapay Zekanın Tarihçesi</a:t>
             </a:r>
           </a:p>
           <a:p>
             <a:pPr>
-              <a:spcAft>
-                <a:spcPts val="1200"/>
+              <a:lnSpc>
+                <a:spcPct val="90000"/>
+              </a:lnSpc>
+              <a:spcAft>
+                <a:spcPts val="300"/>
               </a:spcAft>
               <a:defRPr sz="2000" b="1"/>
             </a:pPr>
             <a:r>
+              <a:rPr sz="1500"/>
               <a:t>✅ 3. Makine Öğrenmesi</a:t>
             </a:r>
           </a:p>
           <a:p>
             <a:pPr>
-              <a:spcAft>
-                <a:spcPts val="1200"/>
+              <a:lnSpc>
+                <a:spcPct val="90000"/>
+              </a:lnSpc>
+              <a:spcAft>
+                <a:spcPts val="300"/>
               </a:spcAft>
               <a:defRPr sz="2000" b="1"/>
             </a:pPr>
             <a:r>
+              <a:rPr sz="1500"/>
               <a:t>✅ 4. Derin Öğrenme</a:t>
             </a:r>
           </a:p>
           <a:p>
             <a:pPr>
-              <a:spcAft>
-                <a:spcPts val="1200"/>
+              <a:lnSpc>
+                <a:spcPct val="90000"/>
+              </a:lnSpc>
+              <a:spcAft>
+                <a:spcPts val="300"/>
               </a:spcAft>
               <a:defRPr sz="2000" b="1"/>
             </a:pPr>
             <a:r>
+              <a:rPr sz="1500"/>
               <a:t>✅ 5. Yapay Zeka Günlük Hayatta</a:t>
             </a:r>
           </a:p>
           <a:p>
             <a:pPr>
-              <a:spcAft>
-                <a:spcPts val="1200"/>
+              <a:lnSpc>
+                <a:spcPct val="90000"/>
+              </a:lnSpc>
+              <a:spcAft>
+                <a:spcPts val="300"/>
               </a:spcAft>
               <a:defRPr sz="2000" b="1"/>
             </a:pPr>
             <a:r>
+              <a:rPr sz="1500"/>
               <a:t>✅ 6. Sesli Asistanlar (Siri, Alexa, Google Asistan)</a:t>
             </a:r>
           </a:p>
           <a:p>
             <a:pPr>
-              <a:spcAft>
-                <a:spcPts val="1200"/>
+              <a:lnSpc>
+                <a:spcPct val="90000"/>
+              </a:lnSpc>
+              <a:spcAft>
+                <a:spcPts val="300"/>
               </a:spcAft>
               <a:defRPr sz="2000" b="1"/>
             </a:pPr>
             <a:r>
+              <a:rPr sz="1500"/>
               <a:t>✅ 7. Görüntü Tanıma</a:t>
             </a:r>
           </a:p>
           <a:p>
             <a:pPr>
-              <a:spcAft>
-                <a:spcPts val="1200"/>
+              <a:lnSpc>
+                <a:spcPct val="90000"/>
+              </a:lnSpc>
+              <a:spcAft>
+                <a:spcPts val="300"/>
               </a:spcAft>
               <a:defRPr sz="2000" b="1"/>
             </a:pPr>
             <a:r>
+              <a:rPr sz="1500"/>
               <a:t>✅ 8. Öneri Sistemleri</a:t>
             </a:r>
           </a:p>
           <a:p>
             <a:pPr>
-              <a:spcAft>
-                <a:spcPts val="1200"/>
+              <a:lnSpc>
+                <a:spcPct val="90000"/>
+              </a:lnSpc>
+              <a:spcAft>
+                <a:spcPts val="300"/>
               </a:spcAft>
               <a:defRPr sz="2000" b="1"/>
             </a:pPr>
             <a:r>
+              <a:rPr sz="1500"/>
               <a:t>✅ 9. Oyunlarda Yapay Zeka</a:t>
             </a:r>
           </a:p>
           <a:p>
             <a:pPr>
-              <a:spcAft>
-                <a:spcPts val="1200"/>
+              <a:lnSpc>
+                <a:spcPct val="90000"/>
+              </a:lnSpc>
+              <a:spcAft>
+                <a:spcPts val="300"/>
               </a:spcAft>
               <a:defRPr sz="2000" b="1"/>
             </a:pPr>
             <a:r>
+              <a:rPr sz="1500"/>
               <a:t>✅ 10. Yapay Zekanın Etik Sorunları</a:t>
             </a:r>
           </a:p>
           <a:p>
             <a:pPr>
-              <a:spcAft>
-                <a:spcPts val="1200"/>
+              <a:lnSpc>
+                <a:spcPct val="90000"/>
+              </a:lnSpc>
+              <a:spcAft>
+                <a:spcPts val="300"/>
               </a:spcAft>
               <a:defRPr sz="2000" b="1"/>
             </a:pPr>
             <a:r>
+              <a:rPr sz="1500"/>
               <a:t>✅ 11. Geleceğin Meslekleri ve Yapay Zeka</a:t>
             </a:r>
           </a:p>
           <a:p>
             <a:pPr>
-              <a:spcAft>
-                <a:spcPts val="1200"/>
-              </a:spcAft>
-              <a:defRPr sz="2000"/>
-            </a:pPr>
-          </a:p>
-          <a:p>
-            <a:pPr>
-              <a:spcAft>
-                <a:spcPts val="1200"/>
-              </a:spcAft>
-              <a:defRPr sz="2000"/>
-            </a:pPr>
-            <a:r>
+              <a:lnSpc>
+                <a:spcPct val="90000"/>
+              </a:lnSpc>
+              <a:spcAft>
+                <a:spcPts val="300"/>
+              </a:spcAft>
+              <a:defRPr sz="2000"/>
+            </a:pPr>
+          </a:p>
+          <a:p>
+            <a:pPr>
+              <a:lnSpc>
+                <a:spcPct val="90000"/>
+              </a:lnSpc>
+              <a:spcAft>
+                <a:spcPts val="300"/>
+              </a:spcAft>
+              <a:defRPr sz="2000"/>
+            </a:pPr>
+            <a:r>
+              <a:rPr sz="1500"/>
               <a:t>⏰ Süre: 4 Hafta</a:t>
             </a:r>
           </a:p>
           <a:p>
             <a:pPr>
-              <a:spcAft>
-                <a:spcPts val="1200"/>
+              <a:lnSpc>
+                <a:spcPct val="90000"/>
+              </a:lnSpc>
+              <a:spcAft>
+                <a:spcPts val="300"/>
               </a:spcAft>
               <a:defRPr sz="2000" b="1"/>
             </a:pPr>
             <a:r>
+              <a:rPr sz="1500"/>
               <a:t>🎯 Amaç: Yapay zekayı anlamak ve kullanmak!</a:t>
             </a:r>
           </a:p>
@@ -9201,7 +9962,7 @@
         </p:nvSpPr>
         <p:spPr/>
         <p:txBody>
-          <a:bodyPr/>
+          <a:bodyPr wrap="square"/>
           <a:lstStyle/>
           <a:p>
             <a:pPr>
@@ -9255,272 +10016,353 @@
             <a:spAutoFit/>
           </a:bodyPr>
           <a:lstStyle/>
-          <a:p/>
-          <a:p>
-            <a:pPr>
-              <a:spcAft>
-                <a:spcPts val="1200"/>
-              </a:spcAft>
-              <a:defRPr sz="2000"/>
-            </a:pPr>
-            <a:r>
-              <a:rPr sz="1600"/>
+          <a:p>
+            <a:pPr>
+              <a:lnSpc>
+                <a:spcPct val="90000"/>
+              </a:lnSpc>
+              <a:spcAft>
+                <a:spcPts val="300"/>
+              </a:spcAft>
+            </a:pPr>
+          </a:p>
+          <a:p>
+            <a:pPr>
+              <a:lnSpc>
+                <a:spcPct val="90000"/>
+              </a:lnSpc>
+              <a:spcAft>
+                <a:spcPts val="300"/>
+              </a:spcAft>
+              <a:defRPr sz="2000"/>
+            </a:pPr>
+            <a:r>
+              <a:rPr sz="1400"/>
               <a:t>Yapay Zeka (AI - Artificial Intelligence)</a:t>
             </a:r>
           </a:p>
           <a:p>
             <a:pPr>
-              <a:spcAft>
-                <a:spcPts val="1200"/>
-              </a:spcAft>
-              <a:defRPr sz="2000"/>
-            </a:pPr>
-            <a:r>
-              <a:rPr sz="1600"/>
+              <a:lnSpc>
+                <a:spcPct val="90000"/>
+              </a:lnSpc>
+              <a:spcAft>
+                <a:spcPts val="300"/>
+              </a:spcAft>
+              <a:defRPr sz="2000"/>
+            </a:pPr>
+            <a:r>
+              <a:rPr sz="1400"/>
               <a:t>= Makinelerin insan gibi düşünmesi ve öğrenmesi</a:t>
             </a:r>
           </a:p>
           <a:p>
             <a:pPr>
-              <a:spcAft>
-                <a:spcPts val="1200"/>
-              </a:spcAft>
-              <a:defRPr sz="2000"/>
-            </a:pPr>
-          </a:p>
-          <a:p>
-            <a:pPr>
-              <a:spcAft>
-                <a:spcPts val="1200"/>
+              <a:lnSpc>
+                <a:spcPct val="90000"/>
+              </a:lnSpc>
+              <a:spcAft>
+                <a:spcPts val="300"/>
+              </a:spcAft>
+              <a:defRPr sz="2000"/>
+            </a:pPr>
+          </a:p>
+          <a:p>
+            <a:pPr>
+              <a:lnSpc>
+                <a:spcPct val="90000"/>
+              </a:lnSpc>
+              <a:spcAft>
+                <a:spcPts val="300"/>
               </a:spcAft>
               <a:defRPr sz="2000" b="1"/>
             </a:pPr>
             <a:r>
-              <a:rPr sz="1600"/>
+              <a:rPr sz="1400"/>
               <a:t>✅ Yapay Zekanın Özellikleri:</a:t>
             </a:r>
           </a:p>
           <a:p>
             <a:pPr lvl="1">
-              <a:spcAft>
-                <a:spcPts val="1200"/>
-              </a:spcAft>
-              <a:defRPr sz="1800"/>
-            </a:pPr>
-            <a:r>
-              <a:rPr sz="1600"/>
+              <a:lnSpc>
+                <a:spcPct val="90000"/>
+              </a:lnSpc>
+              <a:spcAft>
+                <a:spcPts val="300"/>
+              </a:spcAft>
+              <a:defRPr sz="1800"/>
+            </a:pPr>
+            <a:r>
+              <a:rPr sz="1400"/>
               <a:t>    • Öğrenir</a:t>
             </a:r>
           </a:p>
           <a:p>
             <a:pPr lvl="1">
-              <a:spcAft>
-                <a:spcPts val="1200"/>
-              </a:spcAft>
-              <a:defRPr sz="1800"/>
-            </a:pPr>
-            <a:r>
-              <a:rPr sz="1600"/>
+              <a:lnSpc>
+                <a:spcPct val="90000"/>
+              </a:lnSpc>
+              <a:spcAft>
+                <a:spcPts val="300"/>
+              </a:spcAft>
+              <a:defRPr sz="1800"/>
+            </a:pPr>
+            <a:r>
+              <a:rPr sz="1400"/>
               <a:t>    • Problem çözer</a:t>
             </a:r>
           </a:p>
           <a:p>
             <a:pPr lvl="1">
-              <a:spcAft>
-                <a:spcPts val="1200"/>
-              </a:spcAft>
-              <a:defRPr sz="1800"/>
-            </a:pPr>
-            <a:r>
-              <a:rPr sz="1600"/>
+              <a:lnSpc>
+                <a:spcPct val="90000"/>
+              </a:lnSpc>
+              <a:spcAft>
+                <a:spcPts val="300"/>
+              </a:spcAft>
+              <a:defRPr sz="1800"/>
+            </a:pPr>
+            <a:r>
+              <a:rPr sz="1400"/>
               <a:t>    • Karar verir</a:t>
             </a:r>
           </a:p>
           <a:p>
             <a:pPr lvl="1">
-              <a:spcAft>
-                <a:spcPts val="1200"/>
-              </a:spcAft>
-              <a:defRPr sz="1800"/>
-            </a:pPr>
-            <a:r>
-              <a:rPr sz="1600"/>
+              <a:lnSpc>
+                <a:spcPct val="90000"/>
+              </a:lnSpc>
+              <a:spcAft>
+                <a:spcPts val="300"/>
+              </a:spcAft>
+              <a:defRPr sz="1800"/>
+            </a:pPr>
+            <a:r>
+              <a:rPr sz="1400"/>
               <a:t>    • Uyum sağlar</a:t>
             </a:r>
           </a:p>
           <a:p>
             <a:pPr>
-              <a:spcAft>
-                <a:spcPts val="1200"/>
-              </a:spcAft>
-              <a:defRPr sz="2000"/>
-            </a:pPr>
-          </a:p>
-          <a:p>
-            <a:pPr>
-              <a:spcAft>
-                <a:spcPts val="1200"/>
+              <a:lnSpc>
+                <a:spcPct val="90000"/>
+              </a:lnSpc>
+              <a:spcAft>
+                <a:spcPts val="300"/>
+              </a:spcAft>
+              <a:defRPr sz="2000"/>
+            </a:pPr>
+          </a:p>
+          <a:p>
+            <a:pPr>
+              <a:lnSpc>
+                <a:spcPct val="90000"/>
+              </a:lnSpc>
+              <a:spcAft>
+                <a:spcPts val="300"/>
               </a:spcAft>
               <a:defRPr sz="2000" b="1"/>
             </a:pPr>
             <a:r>
-              <a:rPr sz="1600"/>
+              <a:rPr sz="1400"/>
               <a:t>📌 İnsan Zekası vs Yapay Zeka:</a:t>
             </a:r>
           </a:p>
           <a:p>
             <a:pPr>
-              <a:spcAft>
-                <a:spcPts val="1200"/>
-              </a:spcAft>
-              <a:defRPr sz="2000"/>
-            </a:pPr>
-          </a:p>
-          <a:p>
-            <a:pPr>
-              <a:spcAft>
-                <a:spcPts val="1200"/>
-              </a:spcAft>
-              <a:defRPr sz="2000"/>
-            </a:pPr>
-            <a:r>
-              <a:rPr sz="1600"/>
+              <a:lnSpc>
+                <a:spcPct val="90000"/>
+              </a:lnSpc>
+              <a:spcAft>
+                <a:spcPts val="300"/>
+              </a:spcAft>
+              <a:defRPr sz="2000"/>
+            </a:pPr>
+          </a:p>
+          <a:p>
+            <a:pPr>
+              <a:lnSpc>
+                <a:spcPct val="90000"/>
+              </a:lnSpc>
+              <a:spcAft>
+                <a:spcPts val="300"/>
+              </a:spcAft>
+              <a:defRPr sz="2000"/>
+            </a:pPr>
+            <a:r>
+              <a:rPr sz="1400"/>
               <a:t>🧠 İnsan Zekası:</a:t>
             </a:r>
           </a:p>
           <a:p>
             <a:pPr lvl="1">
-              <a:spcAft>
-                <a:spcPts val="1200"/>
-              </a:spcAft>
-              <a:defRPr sz="1800"/>
-            </a:pPr>
-            <a:r>
-              <a:rPr sz="1600"/>
+              <a:lnSpc>
+                <a:spcPct val="90000"/>
+              </a:lnSpc>
+              <a:spcAft>
+                <a:spcPts val="300"/>
+              </a:spcAft>
+              <a:defRPr sz="1800"/>
+            </a:pPr>
+            <a:r>
+              <a:rPr sz="1400"/>
               <a:t>    • Duygular hisseder</a:t>
             </a:r>
           </a:p>
           <a:p>
             <a:pPr lvl="1">
-              <a:spcAft>
-                <a:spcPts val="1200"/>
-              </a:spcAft>
-              <a:defRPr sz="1800"/>
-            </a:pPr>
-            <a:r>
-              <a:rPr sz="1600"/>
+              <a:lnSpc>
+                <a:spcPct val="90000"/>
+              </a:lnSpc>
+              <a:spcAft>
+                <a:spcPts val="300"/>
+              </a:spcAft>
+              <a:defRPr sz="1800"/>
+            </a:pPr>
+            <a:r>
+              <a:rPr sz="1400"/>
               <a:t>    • Yaratıcı düşünür</a:t>
             </a:r>
           </a:p>
           <a:p>
             <a:pPr lvl="1">
-              <a:spcAft>
-                <a:spcPts val="1200"/>
-              </a:spcAft>
-              <a:defRPr sz="1800"/>
-            </a:pPr>
-            <a:r>
-              <a:rPr sz="1600"/>
+              <a:lnSpc>
+                <a:spcPct val="90000"/>
+              </a:lnSpc>
+              <a:spcAft>
+                <a:spcPts val="300"/>
+              </a:spcAft>
+              <a:defRPr sz="1800"/>
+            </a:pPr>
+            <a:r>
+              <a:rPr sz="1400"/>
               <a:t>    • Sosyal etkileşim</a:t>
             </a:r>
           </a:p>
           <a:p>
             <a:pPr lvl="1">
-              <a:spcAft>
-                <a:spcPts val="1200"/>
-              </a:spcAft>
-              <a:defRPr sz="1800"/>
-            </a:pPr>
-            <a:r>
-              <a:rPr sz="1600"/>
+              <a:lnSpc>
+                <a:spcPct val="90000"/>
+              </a:lnSpc>
+              <a:spcAft>
+                <a:spcPts val="300"/>
+              </a:spcAft>
+              <a:defRPr sz="1800"/>
+            </a:pPr>
+            <a:r>
+              <a:rPr sz="1400"/>
               <a:t>    • Genel zeka</a:t>
             </a:r>
           </a:p>
           <a:p>
             <a:pPr>
-              <a:spcAft>
-                <a:spcPts val="1200"/>
-              </a:spcAft>
-              <a:defRPr sz="2000"/>
-            </a:pPr>
-          </a:p>
-          <a:p>
-            <a:pPr>
-              <a:spcAft>
-                <a:spcPts val="1200"/>
-              </a:spcAft>
-              <a:defRPr sz="2000"/>
-            </a:pPr>
-            <a:r>
-              <a:rPr sz="1600"/>
+              <a:lnSpc>
+                <a:spcPct val="90000"/>
+              </a:lnSpc>
+              <a:spcAft>
+                <a:spcPts val="300"/>
+              </a:spcAft>
+              <a:defRPr sz="2000"/>
+            </a:pPr>
+          </a:p>
+          <a:p>
+            <a:pPr>
+              <a:lnSpc>
+                <a:spcPct val="90000"/>
+              </a:lnSpc>
+              <a:spcAft>
+                <a:spcPts val="300"/>
+              </a:spcAft>
+              <a:defRPr sz="2000"/>
+            </a:pPr>
+            <a:r>
+              <a:rPr sz="1400"/>
               <a:t>🤖 Yapay Zeka:</a:t>
             </a:r>
           </a:p>
           <a:p>
             <a:pPr lvl="1">
-              <a:spcAft>
-                <a:spcPts val="1200"/>
-              </a:spcAft>
-              <a:defRPr sz="1800"/>
-            </a:pPr>
-            <a:r>
-              <a:rPr sz="1600"/>
+              <a:lnSpc>
+                <a:spcPct val="90000"/>
+              </a:lnSpc>
+              <a:spcAft>
+                <a:spcPts val="300"/>
+              </a:spcAft>
+              <a:defRPr sz="1800"/>
+            </a:pPr>
+            <a:r>
+              <a:rPr sz="1400"/>
               <a:t>    • Duyguları yoktur</a:t>
             </a:r>
           </a:p>
           <a:p>
             <a:pPr lvl="1">
-              <a:spcAft>
-                <a:spcPts val="1200"/>
-              </a:spcAft>
-              <a:defRPr sz="1800"/>
-            </a:pPr>
-            <a:r>
-              <a:rPr sz="1600"/>
+              <a:lnSpc>
+                <a:spcPct val="90000"/>
+              </a:lnSpc>
+              <a:spcAft>
+                <a:spcPts val="300"/>
+              </a:spcAft>
+              <a:defRPr sz="1800"/>
+            </a:pPr>
+            <a:r>
+              <a:rPr sz="1400"/>
               <a:t>    • Veri analiz eder</a:t>
             </a:r>
           </a:p>
           <a:p>
             <a:pPr lvl="1">
-              <a:spcAft>
-                <a:spcPts val="1200"/>
-              </a:spcAft>
-              <a:defRPr sz="1800"/>
-            </a:pPr>
-            <a:r>
-              <a:rPr sz="1600"/>
+              <a:lnSpc>
+                <a:spcPct val="90000"/>
+              </a:lnSpc>
+              <a:spcAft>
+                <a:spcPts val="300"/>
+              </a:spcAft>
+              <a:defRPr sz="1800"/>
+            </a:pPr>
+            <a:r>
+              <a:rPr sz="1400"/>
               <a:t>    • Belirli görevlerde uzman</a:t>
             </a:r>
           </a:p>
           <a:p>
             <a:pPr lvl="1">
-              <a:spcAft>
-                <a:spcPts val="1200"/>
-              </a:spcAft>
-              <a:defRPr sz="1800"/>
-            </a:pPr>
-            <a:r>
-              <a:rPr sz="1600"/>
+              <a:lnSpc>
+                <a:spcPct val="90000"/>
+              </a:lnSpc>
+              <a:spcAft>
+                <a:spcPts val="300"/>
+              </a:spcAft>
+              <a:defRPr sz="1800"/>
+            </a:pPr>
+            <a:r>
+              <a:rPr sz="1400"/>
               <a:t>    • Dar (spesifik) zeka</a:t>
             </a:r>
           </a:p>
           <a:p>
             <a:pPr>
-              <a:spcAft>
-                <a:spcPts val="1200"/>
-              </a:spcAft>
-              <a:defRPr sz="2000"/>
-            </a:pPr>
-          </a:p>
-          <a:p>
-            <a:pPr>
-              <a:spcAft>
-                <a:spcPts val="1200"/>
+              <a:lnSpc>
+                <a:spcPct val="90000"/>
+              </a:lnSpc>
+              <a:spcAft>
+                <a:spcPts val="300"/>
+              </a:spcAft>
+              <a:defRPr sz="2000"/>
+            </a:pPr>
+          </a:p>
+          <a:p>
+            <a:pPr>
+              <a:lnSpc>
+                <a:spcPct val="90000"/>
+              </a:lnSpc>
+              <a:spcAft>
+                <a:spcPts val="300"/>
               </a:spcAft>
               <a:defRPr sz="2000" b="1"/>
             </a:pPr>
             <a:r>
-              <a:rPr sz="1600"/>
+              <a:rPr sz="1400"/>
               <a:t>💡 Yapay zeka insan zekasını taklit etmeye çalışır ama aynısı değildir!</a:t>
             </a:r>
           </a:p>
@@ -9556,7 +10398,7 @@
         </p:nvSpPr>
         <p:spPr/>
         <p:txBody>
-          <a:bodyPr/>
+          <a:bodyPr wrap="square"/>
           <a:lstStyle/>
           <a:p>
             <a:pPr>
@@ -9610,284 +10452,371 @@
             <a:spAutoFit/>
           </a:bodyPr>
           <a:lstStyle/>
-          <a:p/>
-          <a:p>
-            <a:pPr>
-              <a:spcAft>
-                <a:spcPts val="1200"/>
-              </a:spcAft>
-              <a:defRPr sz="2000"/>
-            </a:pPr>
-            <a:r>
-              <a:rPr sz="1600"/>
+          <a:p>
+            <a:pPr>
+              <a:lnSpc>
+                <a:spcPct val="90000"/>
+              </a:lnSpc>
+              <a:spcAft>
+                <a:spcPts val="300"/>
+              </a:spcAft>
+            </a:pPr>
+          </a:p>
+          <a:p>
+            <a:pPr>
+              <a:lnSpc>
+                <a:spcPct val="90000"/>
+              </a:lnSpc>
+              <a:spcAft>
+                <a:spcPts val="300"/>
+              </a:spcAft>
+              <a:defRPr sz="2000"/>
+            </a:pPr>
+            <a:r>
+              <a:rPr sz="1400"/>
               <a:t>Yapay zeka fikri çok eski!</a:t>
             </a:r>
           </a:p>
           <a:p>
             <a:pPr>
-              <a:spcAft>
-                <a:spcPts val="1200"/>
-              </a:spcAft>
-              <a:defRPr sz="2000"/>
-            </a:pPr>
-          </a:p>
-          <a:p>
-            <a:pPr>
-              <a:spcAft>
-                <a:spcPts val="1200"/>
+              <a:lnSpc>
+                <a:spcPct val="90000"/>
+              </a:lnSpc>
+              <a:spcAft>
+                <a:spcPts val="300"/>
+              </a:spcAft>
+              <a:defRPr sz="2000"/>
+            </a:pPr>
+          </a:p>
+          <a:p>
+            <a:pPr>
+              <a:lnSpc>
+                <a:spcPct val="90000"/>
+              </a:lnSpc>
+              <a:spcAft>
+                <a:spcPts val="300"/>
               </a:spcAft>
               <a:defRPr sz="2000" b="1"/>
             </a:pPr>
             <a:r>
-              <a:rPr sz="1600"/>
+              <a:rPr sz="1400"/>
               <a:t>✅ Önemli Tarihler:</a:t>
             </a:r>
           </a:p>
           <a:p>
             <a:pPr>
-              <a:spcAft>
-                <a:spcPts val="1200"/>
-              </a:spcAft>
-              <a:defRPr sz="2000"/>
-            </a:pPr>
-          </a:p>
-          <a:p>
-            <a:pPr>
-              <a:spcAft>
-                <a:spcPts val="1200"/>
-              </a:spcAft>
-              <a:defRPr sz="2000"/>
-            </a:pPr>
-            <a:r>
-              <a:rPr sz="1600"/>
+              <a:lnSpc>
+                <a:spcPct val="90000"/>
+              </a:lnSpc>
+              <a:spcAft>
+                <a:spcPts val="300"/>
+              </a:spcAft>
+              <a:defRPr sz="2000"/>
+            </a:pPr>
+          </a:p>
+          <a:p>
+            <a:pPr>
+              <a:lnSpc>
+                <a:spcPct val="90000"/>
+              </a:lnSpc>
+              <a:spcAft>
+                <a:spcPts val="300"/>
+              </a:spcAft>
+              <a:defRPr sz="2000"/>
+            </a:pPr>
+            <a:r>
+              <a:rPr sz="1400"/>
               <a:t>1950 📝 Alan Turing:</a:t>
             </a:r>
           </a:p>
           <a:p>
             <a:pPr lvl="1">
-              <a:spcAft>
-                <a:spcPts val="1200"/>
-              </a:spcAft>
-              <a:defRPr sz="1800"/>
-            </a:pPr>
-            <a:r>
-              <a:rPr sz="1600"/>
+              <a:lnSpc>
+                <a:spcPct val="90000"/>
+              </a:lnSpc>
+              <a:spcAft>
+                <a:spcPts val="300"/>
+              </a:spcAft>
+              <a:defRPr sz="1800"/>
+            </a:pPr>
+            <a:r>
+              <a:rPr sz="1400"/>
               <a:t>    • 'Makineler düşünebilir mi?' sorusu</a:t>
             </a:r>
           </a:p>
           <a:p>
             <a:pPr lvl="1">
-              <a:spcAft>
-                <a:spcPts val="1200"/>
-              </a:spcAft>
-              <a:defRPr sz="1800"/>
-            </a:pPr>
-            <a:r>
-              <a:rPr sz="1600"/>
+              <a:lnSpc>
+                <a:spcPct val="90000"/>
+              </a:lnSpc>
+              <a:spcAft>
+                <a:spcPts val="300"/>
+              </a:spcAft>
+              <a:defRPr sz="1800"/>
+            </a:pPr>
+            <a:r>
+              <a:rPr sz="1400"/>
               <a:t>    • Turing Testi</a:t>
             </a:r>
           </a:p>
           <a:p>
             <a:pPr>
-              <a:spcAft>
-                <a:spcPts val="1200"/>
-              </a:spcAft>
-              <a:defRPr sz="2000"/>
-            </a:pPr>
-          </a:p>
-          <a:p>
-            <a:pPr>
-              <a:spcAft>
-                <a:spcPts val="1200"/>
+              <a:lnSpc>
+                <a:spcPct val="90000"/>
+              </a:lnSpc>
+              <a:spcAft>
+                <a:spcPts val="300"/>
+              </a:spcAft>
+              <a:defRPr sz="2000"/>
+            </a:pPr>
+          </a:p>
+          <a:p>
+            <a:pPr>
+              <a:lnSpc>
+                <a:spcPct val="90000"/>
+              </a:lnSpc>
+              <a:spcAft>
+                <a:spcPts val="300"/>
               </a:spcAft>
               <a:defRPr sz="2000" b="1"/>
             </a:pPr>
             <a:r>
-              <a:rPr sz="1600"/>
+              <a:rPr sz="1400"/>
               <a:t>1956 🎯 'Yapay Zeka' terimi:</a:t>
             </a:r>
           </a:p>
           <a:p>
             <a:pPr lvl="1">
-              <a:spcAft>
-                <a:spcPts val="1200"/>
-              </a:spcAft>
-              <a:defRPr sz="1800"/>
-            </a:pPr>
-            <a:r>
-              <a:rPr sz="1600"/>
+              <a:lnSpc>
+                <a:spcPct val="90000"/>
+              </a:lnSpc>
+              <a:spcAft>
+                <a:spcPts val="300"/>
+              </a:spcAft>
+              <a:defRPr sz="1800"/>
+            </a:pPr>
+            <a:r>
+              <a:rPr sz="1400"/>
               <a:t>    • Dartmouth Konferansı</a:t>
             </a:r>
           </a:p>
           <a:p>
             <a:pPr lvl="1">
-              <a:spcAft>
-                <a:spcPts val="1200"/>
-              </a:spcAft>
-              <a:defRPr sz="1800"/>
-            </a:pPr>
-            <a:r>
-              <a:rPr sz="1600"/>
+              <a:lnSpc>
+                <a:spcPct val="90000"/>
+              </a:lnSpc>
+              <a:spcAft>
+                <a:spcPts val="300"/>
+              </a:spcAft>
+              <a:defRPr sz="1800"/>
+            </a:pPr>
+            <a:r>
+              <a:rPr sz="1400"/>
               <a:t>    • İlk AI programları</a:t>
             </a:r>
           </a:p>
           <a:p>
             <a:pPr>
-              <a:spcAft>
-                <a:spcPts val="1200"/>
-              </a:spcAft>
-              <a:defRPr sz="2000"/>
-            </a:pPr>
-          </a:p>
-          <a:p>
-            <a:pPr>
-              <a:spcAft>
-                <a:spcPts val="1200"/>
-              </a:spcAft>
-              <a:defRPr sz="2000"/>
-            </a:pPr>
-            <a:r>
-              <a:rPr sz="1600"/>
+              <a:lnSpc>
+                <a:spcPct val="90000"/>
+              </a:lnSpc>
+              <a:spcAft>
+                <a:spcPts val="300"/>
+              </a:spcAft>
+              <a:defRPr sz="2000"/>
+            </a:pPr>
+          </a:p>
+          <a:p>
+            <a:pPr>
+              <a:lnSpc>
+                <a:spcPct val="90000"/>
+              </a:lnSpc>
+              <a:spcAft>
+                <a:spcPts val="300"/>
+              </a:spcAft>
+              <a:defRPr sz="2000"/>
+            </a:pPr>
+            <a:r>
+              <a:rPr sz="1400"/>
               <a:t>1997 ♟️ Deep Blue:</a:t>
             </a:r>
           </a:p>
           <a:p>
             <a:pPr lvl="1">
-              <a:spcAft>
-                <a:spcPts val="1200"/>
-              </a:spcAft>
-              <a:defRPr sz="1800"/>
-            </a:pPr>
-            <a:r>
-              <a:rPr sz="1600"/>
+              <a:lnSpc>
+                <a:spcPct val="90000"/>
+              </a:lnSpc>
+              <a:spcAft>
+                <a:spcPts val="300"/>
+              </a:spcAft>
+              <a:defRPr sz="1800"/>
+            </a:pPr>
+            <a:r>
+              <a:rPr sz="1400"/>
               <a:t>    • IBM'in satranç bilgisayarı</a:t>
             </a:r>
           </a:p>
           <a:p>
             <a:pPr lvl="1">
-              <a:spcAft>
-                <a:spcPts val="1200"/>
-              </a:spcAft>
-              <a:defRPr sz="1800"/>
-            </a:pPr>
-            <a:r>
-              <a:rPr sz="1600"/>
+              <a:lnSpc>
+                <a:spcPct val="90000"/>
+              </a:lnSpc>
+              <a:spcAft>
+                <a:spcPts val="300"/>
+              </a:spcAft>
+              <a:defRPr sz="1800"/>
+            </a:pPr>
+            <a:r>
+              <a:rPr sz="1400"/>
               <a:t>    • Dünya şampiyonunu yendi</a:t>
             </a:r>
           </a:p>
           <a:p>
             <a:pPr>
-              <a:spcAft>
-                <a:spcPts val="1200"/>
-              </a:spcAft>
-              <a:defRPr sz="2000"/>
-            </a:pPr>
-          </a:p>
-          <a:p>
-            <a:pPr>
-              <a:spcAft>
-                <a:spcPts val="1200"/>
-              </a:spcAft>
-              <a:defRPr sz="2000"/>
-            </a:pPr>
-            <a:r>
-              <a:rPr sz="1600"/>
+              <a:lnSpc>
+                <a:spcPct val="90000"/>
+              </a:lnSpc>
+              <a:spcAft>
+                <a:spcPts val="300"/>
+              </a:spcAft>
+              <a:defRPr sz="2000"/>
+            </a:pPr>
+          </a:p>
+          <a:p>
+            <a:pPr>
+              <a:lnSpc>
+                <a:spcPct val="90000"/>
+              </a:lnSpc>
+              <a:spcAft>
+                <a:spcPts val="300"/>
+              </a:spcAft>
+              <a:defRPr sz="2000"/>
+            </a:pPr>
+            <a:r>
+              <a:rPr sz="1400"/>
               <a:t>2011 🎤 Siri:</a:t>
             </a:r>
           </a:p>
           <a:p>
             <a:pPr lvl="1">
-              <a:spcAft>
-                <a:spcPts val="1200"/>
-              </a:spcAft>
-              <a:defRPr sz="1800"/>
-            </a:pPr>
-            <a:r>
-              <a:rPr sz="1600"/>
+              <a:lnSpc>
+                <a:spcPct val="90000"/>
+              </a:lnSpc>
+              <a:spcAft>
+                <a:spcPts val="300"/>
+              </a:spcAft>
+              <a:defRPr sz="1800"/>
+            </a:pPr>
+            <a:r>
+              <a:rPr sz="1400"/>
               <a:t>    • İlk popüler sesli asistan</a:t>
             </a:r>
           </a:p>
           <a:p>
             <a:pPr>
-              <a:spcAft>
-                <a:spcPts val="1200"/>
-              </a:spcAft>
-              <a:defRPr sz="2000"/>
-            </a:pPr>
-          </a:p>
-          <a:p>
-            <a:pPr>
-              <a:spcAft>
-                <a:spcPts val="1200"/>
-              </a:spcAft>
-              <a:defRPr sz="2000"/>
-            </a:pPr>
-            <a:r>
-              <a:rPr sz="1600"/>
+              <a:lnSpc>
+                <a:spcPct val="90000"/>
+              </a:lnSpc>
+              <a:spcAft>
+                <a:spcPts val="300"/>
+              </a:spcAft>
+              <a:defRPr sz="2000"/>
+            </a:pPr>
+          </a:p>
+          <a:p>
+            <a:pPr>
+              <a:lnSpc>
+                <a:spcPct val="90000"/>
+              </a:lnSpc>
+              <a:spcAft>
+                <a:spcPts val="300"/>
+              </a:spcAft>
+              <a:defRPr sz="2000"/>
+            </a:pPr>
+            <a:r>
+              <a:rPr sz="1400"/>
               <a:t>2016 🎮 AlphaGo:</a:t>
             </a:r>
           </a:p>
           <a:p>
             <a:pPr lvl="1">
-              <a:spcAft>
-                <a:spcPts val="1200"/>
-              </a:spcAft>
-              <a:defRPr sz="1800"/>
-            </a:pPr>
-            <a:r>
-              <a:rPr sz="1600"/>
+              <a:lnSpc>
+                <a:spcPct val="90000"/>
+              </a:lnSpc>
+              <a:spcAft>
+                <a:spcPts val="300"/>
+              </a:spcAft>
+              <a:defRPr sz="1800"/>
+            </a:pPr>
+            <a:r>
+              <a:rPr sz="1400"/>
               <a:t>    • Go oyununda dünya şampiyonunu yendi</a:t>
             </a:r>
           </a:p>
           <a:p>
             <a:pPr>
-              <a:spcAft>
-                <a:spcPts val="1200"/>
-              </a:spcAft>
-              <a:defRPr sz="2000"/>
-            </a:pPr>
-          </a:p>
-          <a:p>
-            <a:pPr>
-              <a:spcAft>
-                <a:spcPts val="1200"/>
-              </a:spcAft>
-              <a:defRPr sz="2000"/>
-            </a:pPr>
-            <a:r>
-              <a:rPr sz="1600"/>
+              <a:lnSpc>
+                <a:spcPct val="90000"/>
+              </a:lnSpc>
+              <a:spcAft>
+                <a:spcPts val="300"/>
+              </a:spcAft>
+              <a:defRPr sz="2000"/>
+            </a:pPr>
+          </a:p>
+          <a:p>
+            <a:pPr>
+              <a:lnSpc>
+                <a:spcPct val="90000"/>
+              </a:lnSpc>
+              <a:spcAft>
+                <a:spcPts val="300"/>
+              </a:spcAft>
+              <a:defRPr sz="2000"/>
+            </a:pPr>
+            <a:r>
+              <a:rPr sz="1400"/>
               <a:t>2022 🎨 ChatGPT, DALL-E:</a:t>
             </a:r>
           </a:p>
           <a:p>
             <a:pPr lvl="1">
-              <a:spcAft>
-                <a:spcPts val="1200"/>
-              </a:spcAft>
-              <a:defRPr sz="1800"/>
-            </a:pPr>
-            <a:r>
-              <a:rPr sz="1600"/>
+              <a:lnSpc>
+                <a:spcPct val="90000"/>
+              </a:lnSpc>
+              <a:spcAft>
+                <a:spcPts val="300"/>
+              </a:spcAft>
+              <a:defRPr sz="1800"/>
+            </a:pPr>
+            <a:r>
+              <a:rPr sz="1400"/>
               <a:t>    • Metin ve görsel üreten AI</a:t>
             </a:r>
           </a:p>
           <a:p>
             <a:pPr>
-              <a:spcAft>
-                <a:spcPts val="1200"/>
-              </a:spcAft>
-              <a:defRPr sz="2000"/>
-            </a:pPr>
-          </a:p>
-          <a:p>
-            <a:pPr>
-              <a:spcAft>
-                <a:spcPts val="1200"/>
+              <a:lnSpc>
+                <a:spcPct val="90000"/>
+              </a:lnSpc>
+              <a:spcAft>
+                <a:spcPts val="300"/>
+              </a:spcAft>
+              <a:defRPr sz="2000"/>
+            </a:pPr>
+          </a:p>
+          <a:p>
+            <a:pPr>
+              <a:lnSpc>
+                <a:spcPct val="90000"/>
+              </a:lnSpc>
+              <a:spcAft>
+                <a:spcPts val="300"/>
               </a:spcAft>
               <a:defRPr sz="2000" b="1"/>
             </a:pPr>
             <a:r>
-              <a:rPr sz="1600"/>
+              <a:rPr sz="1400"/>
               <a:t>💡 Yapay zeka son 10 yılda çok hızlı gelişti!</a:t>
             </a:r>
           </a:p>
@@ -9923,7 +10852,7 @@
         </p:nvSpPr>
         <p:spPr/>
         <p:txBody>
-          <a:bodyPr/>
+          <a:bodyPr wrap="square"/>
           <a:lstStyle/>
           <a:p>
             <a:pPr>
@@ -9977,284 +10906,371 @@
             <a:spAutoFit/>
           </a:bodyPr>
           <a:lstStyle/>
-          <a:p/>
-          <a:p>
-            <a:pPr>
-              <a:spcAft>
-                <a:spcPts val="1200"/>
-              </a:spcAft>
-              <a:defRPr sz="2000"/>
-            </a:pPr>
-            <a:r>
-              <a:rPr sz="1400"/>
+          <a:p>
+            <a:pPr>
+              <a:lnSpc>
+                <a:spcPct val="90000"/>
+              </a:lnSpc>
+              <a:spcAft>
+                <a:spcPts val="300"/>
+              </a:spcAft>
+            </a:pPr>
+          </a:p>
+          <a:p>
+            <a:pPr>
+              <a:lnSpc>
+                <a:spcPct val="90000"/>
+              </a:lnSpc>
+              <a:spcAft>
+                <a:spcPts val="300"/>
+              </a:spcAft>
+              <a:defRPr sz="2000"/>
+            </a:pPr>
+            <a:r>
+              <a:rPr sz="1300"/>
               <a:t>Makine Öğrenmesi = Makinelerin deneyimlerden öğrenmesi</a:t>
             </a:r>
           </a:p>
           <a:p>
             <a:pPr>
-              <a:spcAft>
-                <a:spcPts val="1200"/>
-              </a:spcAft>
-              <a:defRPr sz="2000"/>
-            </a:pPr>
-          </a:p>
-          <a:p>
-            <a:pPr>
-              <a:spcAft>
-                <a:spcPts val="1200"/>
+              <a:lnSpc>
+                <a:spcPct val="90000"/>
+              </a:lnSpc>
+              <a:spcAft>
+                <a:spcPts val="300"/>
+              </a:spcAft>
+              <a:defRPr sz="2000"/>
+            </a:pPr>
+          </a:p>
+          <a:p>
+            <a:pPr>
+              <a:lnSpc>
+                <a:spcPct val="90000"/>
+              </a:lnSpc>
+              <a:spcAft>
+                <a:spcPts val="300"/>
               </a:spcAft>
               <a:defRPr sz="2000" b="1"/>
             </a:pPr>
             <a:r>
-              <a:rPr sz="1400"/>
+              <a:rPr sz="1300"/>
               <a:t>✅ Nasıl Çalışır?</a:t>
             </a:r>
           </a:p>
           <a:p>
             <a:pPr>
-              <a:spcAft>
-                <a:spcPts val="1200"/>
-              </a:spcAft>
-              <a:defRPr sz="2000"/>
-            </a:pPr>
-          </a:p>
-          <a:p>
-            <a:pPr>
-              <a:spcAft>
-                <a:spcPts val="1200"/>
-              </a:spcAft>
-              <a:defRPr sz="2000"/>
-            </a:pPr>
-            <a:r>
-              <a:rPr sz="1400"/>
+              <a:lnSpc>
+                <a:spcPct val="90000"/>
+              </a:lnSpc>
+              <a:spcAft>
+                <a:spcPts val="300"/>
+              </a:spcAft>
+              <a:defRPr sz="2000"/>
+            </a:pPr>
+          </a:p>
+          <a:p>
+            <a:pPr>
+              <a:lnSpc>
+                <a:spcPct val="90000"/>
+              </a:lnSpc>
+              <a:spcAft>
+                <a:spcPts val="300"/>
+              </a:spcAft>
+              <a:defRPr sz="2000"/>
+            </a:pPr>
+            <a:r>
+              <a:rPr sz="1300"/>
               <a:t>1️⃣ Veri Topla:</a:t>
             </a:r>
           </a:p>
           <a:p>
             <a:pPr lvl="1">
-              <a:spcAft>
-                <a:spcPts val="1200"/>
-              </a:spcAft>
-              <a:defRPr sz="1800"/>
-            </a:pPr>
-            <a:r>
-              <a:rPr sz="1400"/>
+              <a:lnSpc>
+                <a:spcPct val="90000"/>
+              </a:lnSpc>
+              <a:spcAft>
+                <a:spcPts val="300"/>
+              </a:spcAft>
+              <a:defRPr sz="1800"/>
+            </a:pPr>
+            <a:r>
+              <a:rPr sz="1300"/>
               <a:t>    • Binlerce örnek</a:t>
             </a:r>
           </a:p>
           <a:p>
             <a:pPr>
-              <a:spcAft>
-                <a:spcPts val="1200"/>
-              </a:spcAft>
-              <a:defRPr sz="2000"/>
-            </a:pPr>
-          </a:p>
-          <a:p>
-            <a:pPr>
-              <a:spcAft>
-                <a:spcPts val="1200"/>
-              </a:spcAft>
-              <a:defRPr sz="2000"/>
-            </a:pPr>
-            <a:r>
-              <a:rPr sz="1400"/>
+              <a:lnSpc>
+                <a:spcPct val="90000"/>
+              </a:lnSpc>
+              <a:spcAft>
+                <a:spcPts val="300"/>
+              </a:spcAft>
+              <a:defRPr sz="2000"/>
+            </a:pPr>
+          </a:p>
+          <a:p>
+            <a:pPr>
+              <a:lnSpc>
+                <a:spcPct val="90000"/>
+              </a:lnSpc>
+              <a:spcAft>
+                <a:spcPts val="300"/>
+              </a:spcAft>
+              <a:defRPr sz="2000"/>
+            </a:pPr>
+            <a:r>
+              <a:rPr sz="1300"/>
               <a:t>2️⃣ Öğren:</a:t>
             </a:r>
           </a:p>
           <a:p>
             <a:pPr lvl="1">
-              <a:spcAft>
-                <a:spcPts val="1200"/>
-              </a:spcAft>
-              <a:defRPr sz="1800"/>
-            </a:pPr>
-            <a:r>
-              <a:rPr sz="1400"/>
+              <a:lnSpc>
+                <a:spcPct val="90000"/>
+              </a:lnSpc>
+              <a:spcAft>
+                <a:spcPts val="300"/>
+              </a:spcAft>
+              <a:defRPr sz="1800"/>
+            </a:pPr>
+            <a:r>
+              <a:rPr sz="1300"/>
               <a:t>    • Örneklerdeki kalıpları bul</a:t>
             </a:r>
           </a:p>
           <a:p>
             <a:pPr>
-              <a:spcAft>
-                <a:spcPts val="1200"/>
-              </a:spcAft>
-              <a:defRPr sz="2000"/>
-            </a:pPr>
-          </a:p>
-          <a:p>
-            <a:pPr>
-              <a:spcAft>
-                <a:spcPts val="1200"/>
-              </a:spcAft>
-              <a:defRPr sz="2000"/>
-            </a:pPr>
-            <a:r>
-              <a:rPr sz="1400"/>
+              <a:lnSpc>
+                <a:spcPct val="90000"/>
+              </a:lnSpc>
+              <a:spcAft>
+                <a:spcPts val="300"/>
+              </a:spcAft>
+              <a:defRPr sz="2000"/>
+            </a:pPr>
+          </a:p>
+          <a:p>
+            <a:pPr>
+              <a:lnSpc>
+                <a:spcPct val="90000"/>
+              </a:lnSpc>
+              <a:spcAft>
+                <a:spcPts val="300"/>
+              </a:spcAft>
+              <a:defRPr sz="2000"/>
+            </a:pPr>
+            <a:r>
+              <a:rPr sz="1300"/>
               <a:t>3️⃣ Tahmin Et:</a:t>
             </a:r>
           </a:p>
           <a:p>
             <a:pPr lvl="1">
-              <a:spcAft>
-                <a:spcPts val="1200"/>
-              </a:spcAft>
-              <a:defRPr sz="1800"/>
-            </a:pPr>
-            <a:r>
-              <a:rPr sz="1400"/>
+              <a:lnSpc>
+                <a:spcPct val="90000"/>
+              </a:lnSpc>
+              <a:spcAft>
+                <a:spcPts val="300"/>
+              </a:spcAft>
+              <a:defRPr sz="1800"/>
+            </a:pPr>
+            <a:r>
+              <a:rPr sz="1300"/>
               <a:t>    • Yeni örneklerde karar ver</a:t>
             </a:r>
           </a:p>
           <a:p>
             <a:pPr>
-              <a:spcAft>
-                <a:spcPts val="1200"/>
-              </a:spcAft>
-              <a:defRPr sz="2000"/>
-            </a:pPr>
-          </a:p>
-          <a:p>
-            <a:pPr>
-              <a:spcAft>
-                <a:spcPts val="1200"/>
+              <a:lnSpc>
+                <a:spcPct val="90000"/>
+              </a:lnSpc>
+              <a:spcAft>
+                <a:spcPts val="300"/>
+              </a:spcAft>
+              <a:defRPr sz="2000"/>
+            </a:pPr>
+          </a:p>
+          <a:p>
+            <a:pPr>
+              <a:lnSpc>
+                <a:spcPct val="90000"/>
+              </a:lnSpc>
+              <a:spcAft>
+                <a:spcPts val="300"/>
               </a:spcAft>
               <a:defRPr sz="2000" b="1"/>
             </a:pPr>
             <a:r>
-              <a:rPr sz="1400"/>
+              <a:rPr sz="1300"/>
               <a:t>📌 Örnek: Kedi-Köpek Tanıma</a:t>
             </a:r>
           </a:p>
           <a:p>
             <a:pPr>
-              <a:spcAft>
-                <a:spcPts val="1200"/>
-              </a:spcAft>
-              <a:defRPr sz="2000"/>
-            </a:pPr>
-          </a:p>
-          <a:p>
-            <a:pPr>
-              <a:spcAft>
-                <a:spcPts val="1200"/>
-              </a:spcAft>
-              <a:defRPr sz="2000"/>
-            </a:pPr>
-            <a:r>
-              <a:rPr sz="1400"/>
+              <a:lnSpc>
+                <a:spcPct val="90000"/>
+              </a:lnSpc>
+              <a:spcAft>
+                <a:spcPts val="300"/>
+              </a:spcAft>
+              <a:defRPr sz="2000"/>
+            </a:pPr>
+          </a:p>
+          <a:p>
+            <a:pPr>
+              <a:lnSpc>
+                <a:spcPct val="90000"/>
+              </a:lnSpc>
+              <a:spcAft>
+                <a:spcPts val="300"/>
+              </a:spcAft>
+              <a:defRPr sz="2000"/>
+            </a:pPr>
+            <a:r>
+              <a:rPr sz="1300"/>
               <a:t>1️⃣ Binlerce kedi ve köpek fotoğrafı göster</a:t>
             </a:r>
           </a:p>
           <a:p>
             <a:pPr>
-              <a:spcAft>
-                <a:spcPts val="1200"/>
-              </a:spcAft>
-              <a:defRPr sz="2000"/>
-            </a:pPr>
-            <a:r>
-              <a:rPr sz="1400"/>
+              <a:lnSpc>
+                <a:spcPct val="90000"/>
+              </a:lnSpc>
+              <a:spcAft>
+                <a:spcPts val="300"/>
+              </a:spcAft>
+              <a:defRPr sz="2000"/>
+            </a:pPr>
+            <a:r>
+              <a:rPr sz="1300"/>
               <a:t>2️⃣ AI kalıpları öğrenir:</a:t>
             </a:r>
           </a:p>
           <a:p>
             <a:pPr lvl="1">
-              <a:spcAft>
-                <a:spcPts val="1200"/>
-              </a:spcAft>
-              <a:defRPr sz="1800"/>
-            </a:pPr>
-            <a:r>
-              <a:rPr sz="1400"/>
+              <a:lnSpc>
+                <a:spcPct val="90000"/>
+              </a:lnSpc>
+              <a:spcAft>
+                <a:spcPts val="300"/>
+              </a:spcAft>
+              <a:defRPr sz="1800"/>
+            </a:pPr>
+            <a:r>
+              <a:rPr sz="1300"/>
               <a:t>    • Kulak şekli</a:t>
             </a:r>
           </a:p>
           <a:p>
             <a:pPr lvl="1">
-              <a:spcAft>
-                <a:spcPts val="1200"/>
-              </a:spcAft>
-              <a:defRPr sz="1800"/>
-            </a:pPr>
-            <a:r>
-              <a:rPr sz="1400"/>
+              <a:lnSpc>
+                <a:spcPct val="90000"/>
+              </a:lnSpc>
+              <a:spcAft>
+                <a:spcPts val="300"/>
+              </a:spcAft>
+              <a:defRPr sz="1800"/>
+            </a:pPr>
+            <a:r>
+              <a:rPr sz="1300"/>
               <a:t>    • Burun yapısı</a:t>
             </a:r>
           </a:p>
           <a:p>
             <a:pPr lvl="1">
-              <a:spcAft>
-                <a:spcPts val="1200"/>
-              </a:spcAft>
-              <a:defRPr sz="1800"/>
-            </a:pPr>
-            <a:r>
-              <a:rPr sz="1400"/>
+              <a:lnSpc>
+                <a:spcPct val="90000"/>
+              </a:lnSpc>
+              <a:spcAft>
+                <a:spcPts val="300"/>
+              </a:spcAft>
+              <a:defRPr sz="1800"/>
+            </a:pPr>
+            <a:r>
+              <a:rPr sz="1300"/>
               <a:t>    • Vücut ölçüleri</a:t>
             </a:r>
           </a:p>
           <a:p>
             <a:pPr>
-              <a:spcAft>
-                <a:spcPts val="1200"/>
-              </a:spcAft>
-              <a:defRPr sz="2000"/>
-            </a:pPr>
-            <a:r>
-              <a:rPr sz="1400"/>
+              <a:lnSpc>
+                <a:spcPct val="90000"/>
+              </a:lnSpc>
+              <a:spcAft>
+                <a:spcPts val="300"/>
+              </a:spcAft>
+              <a:defRPr sz="2000"/>
+            </a:pPr>
+            <a:r>
+              <a:rPr sz="1300"/>
               <a:t>3️⃣ Yeni fotoğraf göster → AI tanır: 'Bu bir kedi!'</a:t>
             </a:r>
           </a:p>
           <a:p>
             <a:pPr>
-              <a:spcAft>
-                <a:spcPts val="1200"/>
-              </a:spcAft>
-              <a:defRPr sz="2000"/>
-            </a:pPr>
-          </a:p>
-          <a:p>
-            <a:pPr>
-              <a:spcAft>
-                <a:spcPts val="1200"/>
+              <a:lnSpc>
+                <a:spcPct val="90000"/>
+              </a:lnSpc>
+              <a:spcAft>
+                <a:spcPts val="300"/>
+              </a:spcAft>
+              <a:defRPr sz="2000"/>
+            </a:pPr>
+          </a:p>
+          <a:p>
+            <a:pPr>
+              <a:lnSpc>
+                <a:spcPct val="90000"/>
+              </a:lnSpc>
+              <a:spcAft>
+                <a:spcPts val="300"/>
               </a:spcAft>
               <a:defRPr sz="2000" b="1"/>
             </a:pPr>
             <a:r>
-              <a:rPr sz="1400"/>
+              <a:rPr sz="1300"/>
               <a:t>💡 Ne kadar çok veri, o kadar iyi öğrenir!</a:t>
             </a:r>
           </a:p>
           <a:p>
             <a:pPr>
-              <a:spcAft>
-                <a:spcPts val="1200"/>
-              </a:spcAft>
-              <a:defRPr sz="2000"/>
-            </a:pPr>
-          </a:p>
-          <a:p>
-            <a:pPr>
-              <a:spcAft>
-                <a:spcPts val="1200"/>
+              <a:lnSpc>
+                <a:spcPct val="90000"/>
+              </a:lnSpc>
+              <a:spcAft>
+                <a:spcPts val="300"/>
+              </a:spcAft>
+              <a:defRPr sz="2000"/>
+            </a:pPr>
+          </a:p>
+          <a:p>
+            <a:pPr>
+              <a:lnSpc>
+                <a:spcPct val="90000"/>
+              </a:lnSpc>
+              <a:spcAft>
+                <a:spcPts val="300"/>
               </a:spcAft>
               <a:defRPr sz="2000" b="1"/>
             </a:pPr>
             <a:r>
-              <a:rPr sz="1400"/>
+              <a:rPr sz="1300"/>
               <a:t>🎯 Analoji: Sen de böyle öğrenirsin!</a:t>
             </a:r>
           </a:p>
           <a:p>
             <a:pPr>
-              <a:spcAft>
-                <a:spcPts val="1200"/>
-              </a:spcAft>
-              <a:defRPr sz="2000"/>
-            </a:pPr>
-            <a:r>
-              <a:rPr sz="1400"/>
+              <a:lnSpc>
+                <a:spcPct val="90000"/>
+              </a:lnSpc>
+              <a:spcAft>
+                <a:spcPts val="300"/>
+              </a:spcAft>
+              <a:defRPr sz="2000"/>
+            </a:pPr>
+            <a:r>
+              <a:rPr sz="1300"/>
               <a:t>Bir kez elma gördün → Hepsini tanırsın</a:t>
             </a:r>
           </a:p>
@@ -10290,7 +11306,7 @@
         </p:nvSpPr>
         <p:spPr/>
         <p:txBody>
-          <a:bodyPr/>
+          <a:bodyPr wrap="square"/>
           <a:lstStyle/>
           <a:p>
             <a:pPr>
@@ -10344,272 +11360,353 @@
             <a:spAutoFit/>
           </a:bodyPr>
           <a:lstStyle/>
-          <a:p/>
-          <a:p>
-            <a:pPr>
-              <a:spcAft>
-                <a:spcPts val="1200"/>
-              </a:spcAft>
-              <a:defRPr sz="2000"/>
-            </a:pPr>
-            <a:r>
-              <a:rPr sz="1400"/>
+          <a:p>
+            <a:pPr>
+              <a:lnSpc>
+                <a:spcPct val="90000"/>
+              </a:lnSpc>
+              <a:spcAft>
+                <a:spcPts val="300"/>
+              </a:spcAft>
+            </a:pPr>
+          </a:p>
+          <a:p>
+            <a:pPr>
+              <a:lnSpc>
+                <a:spcPct val="90000"/>
+              </a:lnSpc>
+              <a:spcAft>
+                <a:spcPts val="300"/>
+              </a:spcAft>
+              <a:defRPr sz="2000"/>
+            </a:pPr>
+            <a:r>
+              <a:rPr sz="1300"/>
               <a:t>Derin Öğrenme = Makine öğrenmesinin ileri seviyesi</a:t>
             </a:r>
           </a:p>
           <a:p>
             <a:pPr>
-              <a:spcAft>
-                <a:spcPts val="1200"/>
-              </a:spcAft>
-              <a:defRPr sz="2000"/>
-            </a:pPr>
-            <a:r>
-              <a:rPr sz="1400"/>
+              <a:lnSpc>
+                <a:spcPct val="90000"/>
+              </a:lnSpc>
+              <a:spcAft>
+                <a:spcPts val="300"/>
+              </a:spcAft>
+              <a:defRPr sz="2000"/>
+            </a:pPr>
+            <a:r>
+              <a:rPr sz="1300"/>
               <a:t>Yapay sinir ağları kullanır</a:t>
             </a:r>
           </a:p>
           <a:p>
             <a:pPr>
-              <a:spcAft>
-                <a:spcPts val="1200"/>
-              </a:spcAft>
-              <a:defRPr sz="2000"/>
-            </a:pPr>
-          </a:p>
-          <a:p>
-            <a:pPr>
-              <a:spcAft>
-                <a:spcPts val="1200"/>
+              <a:lnSpc>
+                <a:spcPct val="90000"/>
+              </a:lnSpc>
+              <a:spcAft>
+                <a:spcPts val="300"/>
+              </a:spcAft>
+              <a:defRPr sz="2000"/>
+            </a:pPr>
+          </a:p>
+          <a:p>
+            <a:pPr>
+              <a:lnSpc>
+                <a:spcPct val="90000"/>
+              </a:lnSpc>
+              <a:spcAft>
+                <a:spcPts val="300"/>
               </a:spcAft>
               <a:defRPr sz="2000" b="1"/>
             </a:pPr>
             <a:r>
-              <a:rPr sz="1400"/>
+              <a:rPr sz="1300"/>
               <a:t>✅ Yapay Sinir Ağı:</a:t>
             </a:r>
           </a:p>
           <a:p>
             <a:pPr>
-              <a:spcAft>
-                <a:spcPts val="1200"/>
-              </a:spcAft>
-              <a:defRPr sz="2000"/>
-            </a:pPr>
-            <a:r>
-              <a:rPr sz="1400"/>
+              <a:lnSpc>
+                <a:spcPct val="90000"/>
+              </a:lnSpc>
+              <a:spcAft>
+                <a:spcPts val="300"/>
+              </a:spcAft>
+              <a:defRPr sz="2000"/>
+            </a:pPr>
+            <a:r>
+              <a:rPr sz="1300"/>
               <a:t>İnsan beynini taklit eder</a:t>
             </a:r>
           </a:p>
           <a:p>
             <a:pPr>
-              <a:spcAft>
-                <a:spcPts val="1200"/>
-              </a:spcAft>
-              <a:defRPr sz="2000"/>
-            </a:pPr>
-          </a:p>
-          <a:p>
-            <a:pPr>
-              <a:spcAft>
-                <a:spcPts val="1200"/>
-              </a:spcAft>
-              <a:defRPr sz="2000"/>
-            </a:pPr>
-            <a:r>
-              <a:rPr sz="1400"/>
+              <a:lnSpc>
+                <a:spcPct val="90000"/>
+              </a:lnSpc>
+              <a:spcAft>
+                <a:spcPts val="300"/>
+              </a:spcAft>
+              <a:defRPr sz="2000"/>
+            </a:pPr>
+          </a:p>
+          <a:p>
+            <a:pPr>
+              <a:lnSpc>
+                <a:spcPct val="90000"/>
+              </a:lnSpc>
+              <a:spcAft>
+                <a:spcPts val="300"/>
+              </a:spcAft>
+              <a:defRPr sz="2000"/>
+            </a:pPr>
+            <a:r>
+              <a:rPr sz="1300"/>
               <a:t>🧠 İnsan Beyni:</a:t>
             </a:r>
           </a:p>
           <a:p>
             <a:pPr lvl="1">
-              <a:spcAft>
-                <a:spcPts val="1200"/>
-              </a:spcAft>
-              <a:defRPr sz="1800"/>
-            </a:pPr>
-            <a:r>
-              <a:rPr sz="1400"/>
+              <a:lnSpc>
+                <a:spcPct val="90000"/>
+              </a:lnSpc>
+              <a:spcAft>
+                <a:spcPts val="300"/>
+              </a:spcAft>
+              <a:defRPr sz="1800"/>
+            </a:pPr>
+            <a:r>
+              <a:rPr sz="1300"/>
               <a:t>    • Milyarlarca sinir hücresi (nöron)</a:t>
             </a:r>
           </a:p>
           <a:p>
             <a:pPr lvl="1">
-              <a:spcAft>
-                <a:spcPts val="1200"/>
-              </a:spcAft>
-              <a:defRPr sz="1800"/>
-            </a:pPr>
-            <a:r>
-              <a:rPr sz="1400"/>
+              <a:lnSpc>
+                <a:spcPct val="90000"/>
+              </a:lnSpc>
+              <a:spcAft>
+                <a:spcPts val="300"/>
+              </a:spcAft>
+              <a:defRPr sz="1800"/>
+            </a:pPr>
+            <a:r>
+              <a:rPr sz="1300"/>
               <a:t>    • Birbirine bağlı</a:t>
             </a:r>
           </a:p>
           <a:p>
             <a:pPr lvl="1">
-              <a:spcAft>
-                <a:spcPts val="1200"/>
-              </a:spcAft>
-              <a:defRPr sz="1800"/>
-            </a:pPr>
-            <a:r>
-              <a:rPr sz="1400"/>
+              <a:lnSpc>
+                <a:spcPct val="90000"/>
+              </a:lnSpc>
+              <a:spcAft>
+                <a:spcPts val="300"/>
+              </a:spcAft>
+              <a:defRPr sz="1800"/>
+            </a:pPr>
+            <a:r>
+              <a:rPr sz="1300"/>
               <a:t>    • Bilgi işler</a:t>
             </a:r>
           </a:p>
           <a:p>
             <a:pPr>
-              <a:spcAft>
-                <a:spcPts val="1200"/>
-              </a:spcAft>
-              <a:defRPr sz="2000"/>
-            </a:pPr>
-          </a:p>
-          <a:p>
-            <a:pPr>
-              <a:spcAft>
-                <a:spcPts val="1200"/>
-              </a:spcAft>
-              <a:defRPr sz="2000"/>
-            </a:pPr>
-            <a:r>
-              <a:rPr sz="1400"/>
+              <a:lnSpc>
+                <a:spcPct val="90000"/>
+              </a:lnSpc>
+              <a:spcAft>
+                <a:spcPts val="300"/>
+              </a:spcAft>
+              <a:defRPr sz="2000"/>
+            </a:pPr>
+          </a:p>
+          <a:p>
+            <a:pPr>
+              <a:lnSpc>
+                <a:spcPct val="90000"/>
+              </a:lnSpc>
+              <a:spcAft>
+                <a:spcPts val="300"/>
+              </a:spcAft>
+              <a:defRPr sz="2000"/>
+            </a:pPr>
+            <a:r>
+              <a:rPr sz="1300"/>
               <a:t>🤖 Yapay Sinir Ağı:</a:t>
             </a:r>
           </a:p>
           <a:p>
             <a:pPr lvl="1">
-              <a:spcAft>
-                <a:spcPts val="1200"/>
-              </a:spcAft>
-              <a:defRPr sz="1800"/>
-            </a:pPr>
-            <a:r>
-              <a:rPr sz="1400"/>
+              <a:lnSpc>
+                <a:spcPct val="90000"/>
+              </a:lnSpc>
+              <a:spcAft>
+                <a:spcPts val="300"/>
+              </a:spcAft>
+              <a:defRPr sz="1800"/>
+            </a:pPr>
+            <a:r>
+              <a:rPr sz="1300"/>
               <a:t>    • Dijital nöronlar</a:t>
             </a:r>
           </a:p>
           <a:p>
             <a:pPr lvl="1">
-              <a:spcAft>
-                <a:spcPts val="1200"/>
-              </a:spcAft>
-              <a:defRPr sz="1800"/>
-            </a:pPr>
-            <a:r>
-              <a:rPr sz="1400"/>
+              <a:lnSpc>
+                <a:spcPct val="90000"/>
+              </a:lnSpc>
+              <a:spcAft>
+                <a:spcPts val="300"/>
+              </a:spcAft>
+              <a:defRPr sz="1800"/>
+            </a:pPr>
+            <a:r>
+              <a:rPr sz="1300"/>
               <a:t>    • Katmanlar halinde</a:t>
             </a:r>
           </a:p>
           <a:p>
             <a:pPr lvl="1">
-              <a:spcAft>
-                <a:spcPts val="1200"/>
-              </a:spcAft>
-              <a:defRPr sz="1800"/>
-            </a:pPr>
-            <a:r>
-              <a:rPr sz="1400"/>
+              <a:lnSpc>
+                <a:spcPct val="90000"/>
+              </a:lnSpc>
+              <a:spcAft>
+                <a:spcPts val="300"/>
+              </a:spcAft>
+              <a:defRPr sz="1800"/>
+            </a:pPr>
+            <a:r>
+              <a:rPr sz="1300"/>
               <a:t>    • Karmaşık kalıpları öğrenir</a:t>
             </a:r>
           </a:p>
           <a:p>
             <a:pPr>
-              <a:spcAft>
-                <a:spcPts val="1200"/>
-              </a:spcAft>
-              <a:defRPr sz="2000"/>
-            </a:pPr>
-          </a:p>
-          <a:p>
-            <a:pPr>
-              <a:spcAft>
-                <a:spcPts val="1200"/>
+              <a:lnSpc>
+                <a:spcPct val="90000"/>
+              </a:lnSpc>
+              <a:spcAft>
+                <a:spcPts val="300"/>
+              </a:spcAft>
+              <a:defRPr sz="2000"/>
+            </a:pPr>
+          </a:p>
+          <a:p>
+            <a:pPr>
+              <a:lnSpc>
+                <a:spcPct val="90000"/>
+              </a:lnSpc>
+              <a:spcAft>
+                <a:spcPts val="300"/>
               </a:spcAft>
               <a:defRPr sz="2000" b="1"/>
             </a:pPr>
             <a:r>
-              <a:rPr sz="1400"/>
+              <a:rPr sz="1300"/>
               <a:t>📌 Derin Öğrenme Kullanım Alanları:</a:t>
             </a:r>
           </a:p>
           <a:p>
             <a:pPr lvl="1">
-              <a:spcAft>
-                <a:spcPts val="1200"/>
-              </a:spcAft>
-              <a:defRPr sz="1800"/>
-            </a:pPr>
-            <a:r>
-              <a:rPr sz="1400"/>
+              <a:lnSpc>
+                <a:spcPct val="90000"/>
+              </a:lnSpc>
+              <a:spcAft>
+                <a:spcPts val="300"/>
+              </a:spcAft>
+              <a:defRPr sz="1800"/>
+            </a:pPr>
+            <a:r>
+              <a:rPr sz="1300"/>
               <a:t>    • Yüz tanıma (telefon kilidi)</a:t>
             </a:r>
           </a:p>
           <a:p>
             <a:pPr lvl="1">
-              <a:spcAft>
-                <a:spcPts val="1200"/>
-              </a:spcAft>
-              <a:defRPr sz="1800"/>
-            </a:pPr>
-            <a:r>
-              <a:rPr sz="1400"/>
+              <a:lnSpc>
+                <a:spcPct val="90000"/>
+              </a:lnSpc>
+              <a:spcAft>
+                <a:spcPts val="300"/>
+              </a:spcAft>
+              <a:defRPr sz="1800"/>
+            </a:pPr>
+            <a:r>
+              <a:rPr sz="1300"/>
               <a:t>    • Ses tanıma (Siri)</a:t>
             </a:r>
           </a:p>
           <a:p>
             <a:pPr lvl="1">
-              <a:spcAft>
-                <a:spcPts val="1200"/>
-              </a:spcAft>
-              <a:defRPr sz="1800"/>
-            </a:pPr>
-            <a:r>
-              <a:rPr sz="1400"/>
+              <a:lnSpc>
+                <a:spcPct val="90000"/>
+              </a:lnSpc>
+              <a:spcAft>
+                <a:spcPts val="300"/>
+              </a:spcAft>
+              <a:defRPr sz="1800"/>
+            </a:pPr>
+            <a:r>
+              <a:rPr sz="1300"/>
               <a:t>    • Otomatik çeviri (Google Translate)</a:t>
             </a:r>
           </a:p>
           <a:p>
             <a:pPr lvl="1">
-              <a:spcAft>
-                <a:spcPts val="1200"/>
-              </a:spcAft>
-              <a:defRPr sz="1800"/>
-            </a:pPr>
-            <a:r>
-              <a:rPr sz="1400"/>
+              <a:lnSpc>
+                <a:spcPct val="90000"/>
+              </a:lnSpc>
+              <a:spcAft>
+                <a:spcPts val="300"/>
+              </a:spcAft>
+              <a:defRPr sz="1800"/>
+            </a:pPr>
+            <a:r>
+              <a:rPr sz="1300"/>
               <a:t>    • Görüntü oluşturma (AI sanat)</a:t>
             </a:r>
           </a:p>
           <a:p>
             <a:pPr>
-              <a:spcAft>
-                <a:spcPts val="1200"/>
-              </a:spcAft>
-              <a:defRPr sz="2000"/>
-            </a:pPr>
-          </a:p>
-          <a:p>
-            <a:pPr>
-              <a:spcAft>
-                <a:spcPts val="1200"/>
+              <a:lnSpc>
+                <a:spcPct val="90000"/>
+              </a:lnSpc>
+              <a:spcAft>
+                <a:spcPts val="300"/>
+              </a:spcAft>
+              <a:defRPr sz="2000"/>
+            </a:pPr>
+          </a:p>
+          <a:p>
+            <a:pPr>
+              <a:lnSpc>
+                <a:spcPct val="90000"/>
+              </a:lnSpc>
+              <a:spcAft>
+                <a:spcPts val="300"/>
               </a:spcAft>
               <a:defRPr sz="2000" b="1"/>
             </a:pPr>
             <a:r>
-              <a:rPr sz="1400"/>
+              <a:rPr sz="1300"/>
               <a:t>💡 'Derin' kelimesi:</a:t>
             </a:r>
           </a:p>
           <a:p>
             <a:pPr>
-              <a:spcAft>
-                <a:spcPts val="1200"/>
-              </a:spcAft>
-              <a:defRPr sz="2000"/>
-            </a:pPr>
-            <a:r>
-              <a:rPr sz="1400"/>
+              <a:lnSpc>
+                <a:spcPct val="90000"/>
+              </a:lnSpc>
+              <a:spcAft>
+                <a:spcPts val="300"/>
+              </a:spcAft>
+              <a:defRPr sz="2000"/>
+            </a:pPr>
+            <a:r>
+              <a:rPr sz="1300"/>
               <a:t>Çok katmanlı yapay sinir ağlarından gelir</a:t>
             </a:r>
           </a:p>
@@ -10645,7 +11742,7 @@
         </p:nvSpPr>
         <p:spPr/>
         <p:txBody>
-          <a:bodyPr/>
+          <a:bodyPr wrap="square"/>
           <a:lstStyle/>
           <a:p>
             <a:pPr>
@@ -10699,312 +11796,405 @@
             <a:spAutoFit/>
           </a:bodyPr>
           <a:lstStyle/>
-          <a:p/>
-          <a:p>
-            <a:pPr>
-              <a:spcAft>
-                <a:spcPts val="1200"/>
-              </a:spcAft>
-              <a:defRPr sz="2000"/>
-            </a:pPr>
-            <a:r>
-              <a:rPr sz="1400"/>
+          <a:p>
+            <a:pPr>
+              <a:lnSpc>
+                <a:spcPct val="90000"/>
+              </a:lnSpc>
+              <a:spcAft>
+                <a:spcPts val="300"/>
+              </a:spcAft>
+            </a:pPr>
+          </a:p>
+          <a:p>
+            <a:pPr>
+              <a:lnSpc>
+                <a:spcPct val="90000"/>
+              </a:lnSpc>
+              <a:spcAft>
+                <a:spcPts val="300"/>
+              </a:spcAft>
+              <a:defRPr sz="2000"/>
+            </a:pPr>
+            <a:r>
+              <a:rPr sz="1300"/>
               <a:t>Sesli asistan = Sesinizi anlayan ve yanıt veren yapay zeka</a:t>
             </a:r>
           </a:p>
           <a:p>
             <a:pPr>
-              <a:spcAft>
-                <a:spcPts val="1200"/>
-              </a:spcAft>
-              <a:defRPr sz="2000"/>
-            </a:pPr>
-          </a:p>
-          <a:p>
-            <a:pPr>
-              <a:spcAft>
-                <a:spcPts val="1200"/>
+              <a:lnSpc>
+                <a:spcPct val="90000"/>
+              </a:lnSpc>
+              <a:spcAft>
+                <a:spcPts val="300"/>
+              </a:spcAft>
+              <a:defRPr sz="2000"/>
+            </a:pPr>
+          </a:p>
+          <a:p>
+            <a:pPr>
+              <a:lnSpc>
+                <a:spcPct val="90000"/>
+              </a:lnSpc>
+              <a:spcAft>
+                <a:spcPts val="300"/>
               </a:spcAft>
               <a:defRPr sz="2000" b="1"/>
             </a:pPr>
             <a:r>
-              <a:rPr sz="1400"/>
+              <a:rPr sz="1300"/>
               <a:t>✅ Popüler Sesli Asistanlar:</a:t>
             </a:r>
           </a:p>
           <a:p>
             <a:pPr lvl="1">
-              <a:spcAft>
-                <a:spcPts val="1200"/>
-              </a:spcAft>
-              <a:defRPr sz="1800"/>
-            </a:pPr>
-            <a:r>
-              <a:rPr sz="1400"/>
+              <a:lnSpc>
+                <a:spcPct val="90000"/>
+              </a:lnSpc>
+              <a:spcAft>
+                <a:spcPts val="300"/>
+              </a:spcAft>
+              <a:defRPr sz="1800"/>
+            </a:pPr>
+            <a:r>
+              <a:rPr sz="1300"/>
               <a:t>    • Siri (Apple) 📱</a:t>
             </a:r>
           </a:p>
           <a:p>
             <a:pPr lvl="1">
-              <a:spcAft>
-                <a:spcPts val="1200"/>
-              </a:spcAft>
-              <a:defRPr sz="1800"/>
-            </a:pPr>
-            <a:r>
-              <a:rPr sz="1400"/>
+              <a:lnSpc>
+                <a:spcPct val="90000"/>
+              </a:lnSpc>
+              <a:spcAft>
+                <a:spcPts val="300"/>
+              </a:spcAft>
+              <a:defRPr sz="1800"/>
+            </a:pPr>
+            <a:r>
+              <a:rPr sz="1300"/>
               <a:t>    • Google Asistan (Google) 🔍</a:t>
             </a:r>
           </a:p>
           <a:p>
             <a:pPr lvl="1">
-              <a:spcAft>
-                <a:spcPts val="1200"/>
-              </a:spcAft>
-              <a:defRPr sz="1800"/>
-            </a:pPr>
-            <a:r>
-              <a:rPr sz="1400"/>
+              <a:lnSpc>
+                <a:spcPct val="90000"/>
+              </a:lnSpc>
+              <a:spcAft>
+                <a:spcPts val="300"/>
+              </a:spcAft>
+              <a:defRPr sz="1800"/>
+            </a:pPr>
+            <a:r>
+              <a:rPr sz="1300"/>
               <a:t>    • Alexa (Amazon) 🔊</a:t>
             </a:r>
           </a:p>
           <a:p>
             <a:pPr lvl="1">
-              <a:spcAft>
-                <a:spcPts val="1200"/>
-              </a:spcAft>
-              <a:defRPr sz="1800"/>
-            </a:pPr>
-            <a:r>
-              <a:rPr sz="1400"/>
+              <a:lnSpc>
+                <a:spcPct val="90000"/>
+              </a:lnSpc>
+              <a:spcAft>
+                <a:spcPts val="300"/>
+              </a:spcAft>
+              <a:defRPr sz="1800"/>
+            </a:pPr>
+            <a:r>
+              <a:rPr sz="1300"/>
               <a:t>    • Cortana (Microsoft) 💻</a:t>
             </a:r>
           </a:p>
           <a:p>
             <a:pPr>
-              <a:spcAft>
-                <a:spcPts val="1200"/>
-              </a:spcAft>
-              <a:defRPr sz="2000"/>
-            </a:pPr>
-          </a:p>
-          <a:p>
-            <a:pPr>
-              <a:spcAft>
-                <a:spcPts val="1200"/>
+              <a:lnSpc>
+                <a:spcPct val="90000"/>
+              </a:lnSpc>
+              <a:spcAft>
+                <a:spcPts val="300"/>
+              </a:spcAft>
+              <a:defRPr sz="2000"/>
+            </a:pPr>
+          </a:p>
+          <a:p>
+            <a:pPr>
+              <a:lnSpc>
+                <a:spcPct val="90000"/>
+              </a:lnSpc>
+              <a:spcAft>
+                <a:spcPts val="300"/>
               </a:spcAft>
               <a:defRPr sz="2000" b="1"/>
             </a:pPr>
             <a:r>
-              <a:rPr sz="1400"/>
+              <a:rPr sz="1300"/>
               <a:t>📌 Ne Yapabilirler?</a:t>
             </a:r>
           </a:p>
           <a:p>
             <a:pPr lvl="1">
-              <a:spcAft>
-                <a:spcPts val="1200"/>
-              </a:spcAft>
-              <a:defRPr sz="1800"/>
-            </a:pPr>
-            <a:r>
-              <a:rPr sz="1400"/>
+              <a:lnSpc>
+                <a:spcPct val="90000"/>
+              </a:lnSpc>
+              <a:spcAft>
+                <a:spcPts val="300"/>
+              </a:spcAft>
+              <a:defRPr sz="1800"/>
+            </a:pPr>
+            <a:r>
+              <a:rPr sz="1300"/>
               <a:t>    • Soru cevapla ('Hava nasıl?')</a:t>
             </a:r>
           </a:p>
           <a:p>
             <a:pPr lvl="1">
-              <a:spcAft>
-                <a:spcPts val="1200"/>
-              </a:spcAft>
-              <a:defRPr sz="1800"/>
-            </a:pPr>
-            <a:r>
-              <a:rPr sz="1400"/>
+              <a:lnSpc>
+                <a:spcPct val="90000"/>
+              </a:lnSpc>
+              <a:spcAft>
+                <a:spcPts val="300"/>
+              </a:spcAft>
+              <a:defRPr sz="1800"/>
+            </a:pPr>
+            <a:r>
+              <a:rPr sz="1300"/>
               <a:t>    • Alarm kur</a:t>
             </a:r>
           </a:p>
           <a:p>
             <a:pPr lvl="1">
-              <a:spcAft>
-                <a:spcPts val="1200"/>
-              </a:spcAft>
-              <a:defRPr sz="1800"/>
-            </a:pPr>
-            <a:r>
-              <a:rPr sz="1400"/>
+              <a:lnSpc>
+                <a:spcPct val="90000"/>
+              </a:lnSpc>
+              <a:spcAft>
+                <a:spcPts val="300"/>
+              </a:spcAft>
+              <a:defRPr sz="1800"/>
+            </a:pPr>
+            <a:r>
+              <a:rPr sz="1300"/>
               <a:t>    • Müzik çal</a:t>
             </a:r>
           </a:p>
           <a:p>
             <a:pPr lvl="1">
-              <a:spcAft>
-                <a:spcPts val="1200"/>
-              </a:spcAft>
-              <a:defRPr sz="1800"/>
-            </a:pPr>
-            <a:r>
-              <a:rPr sz="1400"/>
+              <a:lnSpc>
+                <a:spcPct val="90000"/>
+              </a:lnSpc>
+              <a:spcAft>
+                <a:spcPts val="300"/>
+              </a:spcAft>
+              <a:defRPr sz="1800"/>
+            </a:pPr>
+            <a:r>
+              <a:rPr sz="1300"/>
               <a:t>    • Hesaplama yap</a:t>
             </a:r>
           </a:p>
           <a:p>
             <a:pPr lvl="1">
-              <a:spcAft>
-                <a:spcPts val="1200"/>
-              </a:spcAft>
-              <a:defRPr sz="1800"/>
-            </a:pPr>
-            <a:r>
-              <a:rPr sz="1400"/>
+              <a:lnSpc>
+                <a:spcPct val="90000"/>
+              </a:lnSpc>
+              <a:spcAft>
+                <a:spcPts val="300"/>
+              </a:spcAft>
+              <a:defRPr sz="1800"/>
+            </a:pPr>
+            <a:r>
+              <a:rPr sz="1300"/>
               <a:t>    • Akıllı ev kontrolü (ışıklar, klima)</a:t>
             </a:r>
           </a:p>
           <a:p>
             <a:pPr>
-              <a:spcAft>
-                <a:spcPts val="1200"/>
-              </a:spcAft>
-              <a:defRPr sz="2000"/>
-            </a:pPr>
-          </a:p>
-          <a:p>
-            <a:pPr>
-              <a:spcAft>
-                <a:spcPts val="1200"/>
-              </a:spcAft>
-              <a:defRPr sz="2000"/>
-            </a:pPr>
-            <a:r>
-              <a:rPr sz="1400"/>
+              <a:lnSpc>
+                <a:spcPct val="90000"/>
+              </a:lnSpc>
+              <a:spcAft>
+                <a:spcPts val="300"/>
+              </a:spcAft>
+              <a:defRPr sz="2000"/>
+            </a:pPr>
+          </a:p>
+          <a:p>
+            <a:pPr>
+              <a:lnSpc>
+                <a:spcPct val="90000"/>
+              </a:lnSpc>
+              <a:spcAft>
+                <a:spcPts val="300"/>
+              </a:spcAft>
+              <a:defRPr sz="2000"/>
+            </a:pPr>
+            <a:r>
+              <a:rPr sz="1300"/>
               <a:t>⚙️ Nasıl Çalışır?</a:t>
             </a:r>
           </a:p>
           <a:p>
             <a:pPr>
-              <a:spcAft>
-                <a:spcPts val="1200"/>
-              </a:spcAft>
-              <a:defRPr sz="2000"/>
-            </a:pPr>
-          </a:p>
-          <a:p>
-            <a:pPr>
-              <a:spcAft>
-                <a:spcPts val="1200"/>
-              </a:spcAft>
-              <a:defRPr sz="2000"/>
-            </a:pPr>
-            <a:r>
-              <a:rPr sz="1400"/>
+              <a:lnSpc>
+                <a:spcPct val="90000"/>
+              </a:lnSpc>
+              <a:spcAft>
+                <a:spcPts val="300"/>
+              </a:spcAft>
+              <a:defRPr sz="2000"/>
+            </a:pPr>
+          </a:p>
+          <a:p>
+            <a:pPr>
+              <a:lnSpc>
+                <a:spcPct val="90000"/>
+              </a:lnSpc>
+              <a:spcAft>
+                <a:spcPts val="300"/>
+              </a:spcAft>
+              <a:defRPr sz="2000"/>
+            </a:pPr>
+            <a:r>
+              <a:rPr sz="1300"/>
               <a:t>1️⃣ Ses Tanıma:</a:t>
             </a:r>
           </a:p>
           <a:p>
             <a:pPr lvl="1">
-              <a:spcAft>
-                <a:spcPts val="1200"/>
-              </a:spcAft>
-              <a:defRPr sz="1800"/>
-            </a:pPr>
-            <a:r>
-              <a:rPr sz="1400"/>
+              <a:lnSpc>
+                <a:spcPct val="90000"/>
+              </a:lnSpc>
+              <a:spcAft>
+                <a:spcPts val="300"/>
+              </a:spcAft>
+              <a:defRPr sz="1800"/>
+            </a:pPr>
+            <a:r>
+              <a:rPr sz="1300"/>
               <a:t>    • Sesini metne çevirir</a:t>
             </a:r>
           </a:p>
           <a:p>
             <a:pPr>
-              <a:spcAft>
-                <a:spcPts val="1200"/>
-              </a:spcAft>
-              <a:defRPr sz="2000"/>
-            </a:pPr>
-          </a:p>
-          <a:p>
-            <a:pPr>
-              <a:spcAft>
-                <a:spcPts val="1200"/>
-              </a:spcAft>
-              <a:defRPr sz="2000"/>
-            </a:pPr>
-            <a:r>
-              <a:rPr sz="1400"/>
+              <a:lnSpc>
+                <a:spcPct val="90000"/>
+              </a:lnSpc>
+              <a:spcAft>
+                <a:spcPts val="300"/>
+              </a:spcAft>
+              <a:defRPr sz="2000"/>
+            </a:pPr>
+          </a:p>
+          <a:p>
+            <a:pPr>
+              <a:lnSpc>
+                <a:spcPct val="90000"/>
+              </a:lnSpc>
+              <a:spcAft>
+                <a:spcPts val="300"/>
+              </a:spcAft>
+              <a:defRPr sz="2000"/>
+            </a:pPr>
+            <a:r>
+              <a:rPr sz="1300"/>
               <a:t>2️⃣ Doğal Dil İşleme:</a:t>
             </a:r>
           </a:p>
           <a:p>
             <a:pPr lvl="1">
-              <a:spcAft>
-                <a:spcPts val="1200"/>
-              </a:spcAft>
-              <a:defRPr sz="1800"/>
-            </a:pPr>
-            <a:r>
-              <a:rPr sz="1400"/>
+              <a:lnSpc>
+                <a:spcPct val="90000"/>
+              </a:lnSpc>
+              <a:spcAft>
+                <a:spcPts val="300"/>
+              </a:spcAft>
+              <a:defRPr sz="1800"/>
+            </a:pPr>
+            <a:r>
+              <a:rPr sz="1300"/>
               <a:t>    • Cümleyi anlar</a:t>
             </a:r>
           </a:p>
           <a:p>
             <a:pPr>
-              <a:spcAft>
-                <a:spcPts val="1200"/>
-              </a:spcAft>
-              <a:defRPr sz="2000"/>
-            </a:pPr>
-          </a:p>
-          <a:p>
-            <a:pPr>
-              <a:spcAft>
-                <a:spcPts val="1200"/>
-              </a:spcAft>
-              <a:defRPr sz="2000"/>
-            </a:pPr>
-            <a:r>
-              <a:rPr sz="1400"/>
+              <a:lnSpc>
+                <a:spcPct val="90000"/>
+              </a:lnSpc>
+              <a:spcAft>
+                <a:spcPts val="300"/>
+              </a:spcAft>
+              <a:defRPr sz="2000"/>
+            </a:pPr>
+          </a:p>
+          <a:p>
+            <a:pPr>
+              <a:lnSpc>
+                <a:spcPct val="90000"/>
+              </a:lnSpc>
+              <a:spcAft>
+                <a:spcPts val="300"/>
+              </a:spcAft>
+              <a:defRPr sz="2000"/>
+            </a:pPr>
+            <a:r>
+              <a:rPr sz="1300"/>
               <a:t>3️⃣ İşlem:</a:t>
             </a:r>
           </a:p>
           <a:p>
             <a:pPr lvl="1">
-              <a:spcAft>
-                <a:spcPts val="1200"/>
-              </a:spcAft>
-              <a:defRPr sz="1800"/>
-            </a:pPr>
-            <a:r>
-              <a:rPr sz="1400"/>
+              <a:lnSpc>
+                <a:spcPct val="90000"/>
+              </a:lnSpc>
+              <a:spcAft>
+                <a:spcPts val="300"/>
+              </a:spcAft>
+              <a:defRPr sz="1800"/>
+            </a:pPr>
+            <a:r>
+              <a:rPr sz="1300"/>
               <a:t>    • Cevap bulur veya görev yapar</a:t>
             </a:r>
           </a:p>
           <a:p>
             <a:pPr>
-              <a:spcAft>
-                <a:spcPts val="1200"/>
-              </a:spcAft>
-              <a:defRPr sz="2000"/>
-            </a:pPr>
-          </a:p>
-          <a:p>
-            <a:pPr>
-              <a:spcAft>
-                <a:spcPts val="1200"/>
-              </a:spcAft>
-              <a:defRPr sz="2000"/>
-            </a:pPr>
-            <a:r>
-              <a:rPr sz="1400"/>
+              <a:lnSpc>
+                <a:spcPct val="90000"/>
+              </a:lnSpc>
+              <a:spcAft>
+                <a:spcPts val="300"/>
+              </a:spcAft>
+              <a:defRPr sz="2000"/>
+            </a:pPr>
+          </a:p>
+          <a:p>
+            <a:pPr>
+              <a:lnSpc>
+                <a:spcPct val="90000"/>
+              </a:lnSpc>
+              <a:spcAft>
+                <a:spcPts val="300"/>
+              </a:spcAft>
+              <a:defRPr sz="2000"/>
+            </a:pPr>
+            <a:r>
+              <a:rPr sz="1300"/>
               <a:t>4️⃣ Yanıt:</a:t>
             </a:r>
           </a:p>
           <a:p>
             <a:pPr lvl="1">
-              <a:spcAft>
-                <a:spcPts val="1200"/>
-              </a:spcAft>
-              <a:defRPr sz="1800"/>
-            </a:pPr>
-            <a:r>
-              <a:rPr sz="1400"/>
+              <a:lnSpc>
+                <a:spcPct val="90000"/>
+              </a:lnSpc>
+              <a:spcAft>
+                <a:spcPts val="300"/>
+              </a:spcAft>
+              <a:defRPr sz="1800"/>
+            </a:pPr>
+            <a:r>
+              <a:rPr sz="1300"/>
               <a:t>    • Sesli veya ekranda gösterir</a:t>
             </a:r>
           </a:p>
@@ -11040,7 +12230,7 @@
         </p:nvSpPr>
         <p:spPr/>
         <p:txBody>
-          <a:bodyPr/>
+          <a:bodyPr wrap="square"/>
           <a:lstStyle/>
           <a:p>
             <a:pPr>
@@ -11094,320 +12284,416 @@
             <a:spAutoFit/>
           </a:bodyPr>
           <a:lstStyle/>
-          <a:p/>
-          <a:p>
-            <a:pPr>
-              <a:spcAft>
-                <a:spcPts val="1200"/>
-              </a:spcAft>
-              <a:defRPr sz="2000"/>
-            </a:pPr>
-            <a:r>
-              <a:rPr sz="1400"/>
+          <a:p>
+            <a:pPr>
+              <a:lnSpc>
+                <a:spcPct val="90000"/>
+              </a:lnSpc>
+              <a:spcAft>
+                <a:spcPts val="300"/>
+              </a:spcAft>
+            </a:pPr>
+          </a:p>
+          <a:p>
+            <a:pPr>
+              <a:lnSpc>
+                <a:spcPct val="90000"/>
+              </a:lnSpc>
+              <a:spcAft>
+                <a:spcPts val="300"/>
+              </a:spcAft>
+              <a:defRPr sz="2000"/>
+            </a:pPr>
+            <a:r>
+              <a:rPr sz="1300"/>
               <a:t>Görüntü tanıma = AI'nın fotoğraflarda/videolarda nesneleri görmesi</a:t>
             </a:r>
           </a:p>
           <a:p>
             <a:pPr>
-              <a:spcAft>
-                <a:spcPts val="1200"/>
-              </a:spcAft>
-              <a:defRPr sz="2000"/>
-            </a:pPr>
-          </a:p>
-          <a:p>
-            <a:pPr>
-              <a:spcAft>
-                <a:spcPts val="1200"/>
+              <a:lnSpc>
+                <a:spcPct val="90000"/>
+              </a:lnSpc>
+              <a:spcAft>
+                <a:spcPts val="300"/>
+              </a:spcAft>
+              <a:defRPr sz="2000"/>
+            </a:pPr>
+          </a:p>
+          <a:p>
+            <a:pPr>
+              <a:lnSpc>
+                <a:spcPct val="90000"/>
+              </a:lnSpc>
+              <a:spcAft>
+                <a:spcPts val="300"/>
               </a:spcAft>
               <a:defRPr sz="2000" b="1"/>
             </a:pPr>
             <a:r>
-              <a:rPr sz="1400"/>
+              <a:rPr sz="1300"/>
               <a:t>✅ Günlük Hayatta Kullanımı:</a:t>
             </a:r>
           </a:p>
           <a:p>
             <a:pPr>
-              <a:spcAft>
-                <a:spcPts val="1200"/>
-              </a:spcAft>
-              <a:defRPr sz="2000"/>
-            </a:pPr>
-          </a:p>
-          <a:p>
-            <a:pPr>
-              <a:spcAft>
-                <a:spcPts val="1200"/>
-              </a:spcAft>
-              <a:defRPr sz="2000"/>
-            </a:pPr>
-            <a:r>
-              <a:rPr sz="1400"/>
+              <a:lnSpc>
+                <a:spcPct val="90000"/>
+              </a:lnSpc>
+              <a:spcAft>
+                <a:spcPts val="300"/>
+              </a:spcAft>
+              <a:defRPr sz="2000"/>
+            </a:pPr>
+          </a:p>
+          <a:p>
+            <a:pPr>
+              <a:lnSpc>
+                <a:spcPct val="90000"/>
+              </a:lnSpc>
+              <a:spcAft>
+                <a:spcPts val="300"/>
+              </a:spcAft>
+              <a:defRPr sz="2000"/>
+            </a:pPr>
+            <a:r>
+              <a:rPr sz="1300"/>
               <a:t>📱 Telefon Kilit Açma:</a:t>
             </a:r>
           </a:p>
           <a:p>
             <a:pPr lvl="1">
-              <a:spcAft>
-                <a:spcPts val="1200"/>
-              </a:spcAft>
-              <a:defRPr sz="1800"/>
-            </a:pPr>
-            <a:r>
-              <a:rPr sz="1400"/>
+              <a:lnSpc>
+                <a:spcPct val="90000"/>
+              </a:lnSpc>
+              <a:spcAft>
+                <a:spcPts val="300"/>
+              </a:spcAft>
+              <a:defRPr sz="1800"/>
+            </a:pPr>
+            <a:r>
+              <a:rPr sz="1300"/>
               <a:t>    • Yüz tanıma (Face ID)</a:t>
             </a:r>
           </a:p>
           <a:p>
             <a:pPr lvl="1">
-              <a:spcAft>
-                <a:spcPts val="1200"/>
-              </a:spcAft>
-              <a:defRPr sz="1800"/>
-            </a:pPr>
-            <a:r>
-              <a:rPr sz="1400"/>
+              <a:lnSpc>
+                <a:spcPct val="90000"/>
+              </a:lnSpc>
+              <a:spcAft>
+                <a:spcPts val="300"/>
+              </a:spcAft>
+              <a:defRPr sz="1800"/>
+            </a:pPr>
+            <a:r>
+              <a:rPr sz="1300"/>
               <a:t>    • Parmak izi</a:t>
             </a:r>
           </a:p>
           <a:p>
             <a:pPr>
-              <a:spcAft>
-                <a:spcPts val="1200"/>
-              </a:spcAft>
-              <a:defRPr sz="2000"/>
-            </a:pPr>
-          </a:p>
-          <a:p>
-            <a:pPr>
-              <a:spcAft>
-                <a:spcPts val="1200"/>
-              </a:spcAft>
-              <a:defRPr sz="2000"/>
-            </a:pPr>
-            <a:r>
-              <a:rPr sz="1400"/>
+              <a:lnSpc>
+                <a:spcPct val="90000"/>
+              </a:lnSpc>
+              <a:spcAft>
+                <a:spcPts val="300"/>
+              </a:spcAft>
+              <a:defRPr sz="2000"/>
+            </a:pPr>
+          </a:p>
+          <a:p>
+            <a:pPr>
+              <a:lnSpc>
+                <a:spcPct val="90000"/>
+              </a:lnSpc>
+              <a:spcAft>
+                <a:spcPts val="300"/>
+              </a:spcAft>
+              <a:defRPr sz="2000"/>
+            </a:pPr>
+            <a:r>
+              <a:rPr sz="1300"/>
               <a:t>📷 Fotoğraf Düzenleme:</a:t>
             </a:r>
           </a:p>
           <a:p>
             <a:pPr lvl="1">
-              <a:spcAft>
-                <a:spcPts val="1200"/>
-              </a:spcAft>
-              <a:defRPr sz="1800"/>
-            </a:pPr>
-            <a:r>
-              <a:rPr sz="1400"/>
+              <a:lnSpc>
+                <a:spcPct val="90000"/>
+              </a:lnSpc>
+              <a:spcAft>
+                <a:spcPts val="300"/>
+              </a:spcAft>
+              <a:defRPr sz="1800"/>
+            </a:pPr>
+            <a:r>
+              <a:rPr sz="1300"/>
               <a:t>    • Google Photos: 'kedi' ara → tüm kedi fotoğrafları</a:t>
             </a:r>
           </a:p>
           <a:p>
             <a:pPr lvl="1">
-              <a:spcAft>
-                <a:spcPts val="1200"/>
-              </a:spcAft>
-              <a:defRPr sz="1800"/>
-            </a:pPr>
-            <a:r>
-              <a:rPr sz="1400"/>
+              <a:lnSpc>
+                <a:spcPct val="90000"/>
+              </a:lnSpc>
+              <a:spcAft>
+                <a:spcPts val="300"/>
+              </a:spcAft>
+              <a:defRPr sz="1800"/>
+            </a:pPr>
+            <a:r>
+              <a:rPr sz="1300"/>
               <a:t>    • Instagram filtreleri (yüzü bulur)</a:t>
             </a:r>
           </a:p>
           <a:p>
             <a:pPr>
-              <a:spcAft>
-                <a:spcPts val="1200"/>
-              </a:spcAft>
-              <a:defRPr sz="2000"/>
-            </a:pPr>
-          </a:p>
-          <a:p>
-            <a:pPr>
-              <a:spcAft>
-                <a:spcPts val="1200"/>
-              </a:spcAft>
-              <a:defRPr sz="2000"/>
-            </a:pPr>
-            <a:r>
-              <a:rPr sz="1400"/>
+              <a:lnSpc>
+                <a:spcPct val="90000"/>
+              </a:lnSpc>
+              <a:spcAft>
+                <a:spcPts val="300"/>
+              </a:spcAft>
+              <a:defRPr sz="2000"/>
+            </a:pPr>
+          </a:p>
+          <a:p>
+            <a:pPr>
+              <a:lnSpc>
+                <a:spcPct val="90000"/>
+              </a:lnSpc>
+              <a:spcAft>
+                <a:spcPts val="300"/>
+              </a:spcAft>
+              <a:defRPr sz="2000"/>
+            </a:pPr>
+            <a:r>
+              <a:rPr sz="1300"/>
               <a:t>🚗 Otonom Araçlar:</a:t>
             </a:r>
           </a:p>
           <a:p>
             <a:pPr lvl="1">
-              <a:spcAft>
-                <a:spcPts val="1200"/>
-              </a:spcAft>
-              <a:defRPr sz="1800"/>
-            </a:pPr>
-            <a:r>
-              <a:rPr sz="1400"/>
+              <a:lnSpc>
+                <a:spcPct val="90000"/>
+              </a:lnSpc>
+              <a:spcAft>
+                <a:spcPts val="300"/>
+              </a:spcAft>
+              <a:defRPr sz="1800"/>
+            </a:pPr>
+            <a:r>
+              <a:rPr sz="1300"/>
               <a:t>    • Yayaları tanır</a:t>
             </a:r>
           </a:p>
           <a:p>
             <a:pPr lvl="1">
-              <a:spcAft>
-                <a:spcPts val="1200"/>
-              </a:spcAft>
-              <a:defRPr sz="1800"/>
-            </a:pPr>
-            <a:r>
-              <a:rPr sz="1400"/>
+              <a:lnSpc>
+                <a:spcPct val="90000"/>
+              </a:lnSpc>
+              <a:spcAft>
+                <a:spcPts val="300"/>
+              </a:spcAft>
+              <a:defRPr sz="1800"/>
+            </a:pPr>
+            <a:r>
+              <a:rPr sz="1300"/>
               <a:t>    • Trafik işaretlerini okur</a:t>
             </a:r>
           </a:p>
           <a:p>
             <a:pPr>
-              <a:spcAft>
-                <a:spcPts val="1200"/>
-              </a:spcAft>
-              <a:defRPr sz="2000"/>
-            </a:pPr>
-          </a:p>
-          <a:p>
-            <a:pPr>
-              <a:spcAft>
-                <a:spcPts val="1200"/>
-              </a:spcAft>
-              <a:defRPr sz="2000"/>
-            </a:pPr>
-            <a:r>
-              <a:rPr sz="1400"/>
+              <a:lnSpc>
+                <a:spcPct val="90000"/>
+              </a:lnSpc>
+              <a:spcAft>
+                <a:spcPts val="300"/>
+              </a:spcAft>
+              <a:defRPr sz="2000"/>
+            </a:pPr>
+          </a:p>
+          <a:p>
+            <a:pPr>
+              <a:lnSpc>
+                <a:spcPct val="90000"/>
+              </a:lnSpc>
+              <a:spcAft>
+                <a:spcPts val="300"/>
+              </a:spcAft>
+              <a:defRPr sz="2000"/>
+            </a:pPr>
+            <a:r>
+              <a:rPr sz="1300"/>
               <a:t>🏥 Tıp:</a:t>
             </a:r>
           </a:p>
           <a:p>
             <a:pPr lvl="1">
-              <a:spcAft>
-                <a:spcPts val="1200"/>
-              </a:spcAft>
-              <a:defRPr sz="1800"/>
-            </a:pPr>
-            <a:r>
-              <a:rPr sz="1400"/>
+              <a:lnSpc>
+                <a:spcPct val="90000"/>
+              </a:lnSpc>
+              <a:spcAft>
+                <a:spcPts val="300"/>
+              </a:spcAft>
+              <a:defRPr sz="1800"/>
+            </a:pPr>
+            <a:r>
+              <a:rPr sz="1300"/>
               <a:t>    • X-ray'de hastalık tespiti</a:t>
             </a:r>
           </a:p>
           <a:p>
             <a:pPr>
-              <a:spcAft>
-                <a:spcPts val="1200"/>
-              </a:spcAft>
-              <a:defRPr sz="2000"/>
-            </a:pPr>
-          </a:p>
-          <a:p>
-            <a:pPr>
-              <a:spcAft>
-                <a:spcPts val="1200"/>
-              </a:spcAft>
-              <a:defRPr sz="2000"/>
-            </a:pPr>
-            <a:r>
-              <a:rPr sz="1400"/>
+              <a:lnSpc>
+                <a:spcPct val="90000"/>
+              </a:lnSpc>
+              <a:spcAft>
+                <a:spcPts val="300"/>
+              </a:spcAft>
+              <a:defRPr sz="2000"/>
+            </a:pPr>
+          </a:p>
+          <a:p>
+            <a:pPr>
+              <a:lnSpc>
+                <a:spcPct val="90000"/>
+              </a:lnSpc>
+              <a:spcAft>
+                <a:spcPts val="300"/>
+              </a:spcAft>
+              <a:defRPr sz="2000"/>
+            </a:pPr>
+            <a:r>
+              <a:rPr sz="1300"/>
               <a:t>🔍 Güvenlik:</a:t>
             </a:r>
           </a:p>
           <a:p>
             <a:pPr lvl="1">
-              <a:spcAft>
-                <a:spcPts val="1200"/>
-              </a:spcAft>
-              <a:defRPr sz="1800"/>
-            </a:pPr>
-            <a:r>
-              <a:rPr sz="1400"/>
+              <a:lnSpc>
+                <a:spcPct val="90000"/>
+              </a:lnSpc>
+              <a:spcAft>
+                <a:spcPts val="300"/>
+              </a:spcAft>
+              <a:defRPr sz="1800"/>
+            </a:pPr>
+            <a:r>
+              <a:rPr sz="1300"/>
               <a:t>    • Havalimanlarında yüz tanıma</a:t>
             </a:r>
           </a:p>
           <a:p>
             <a:pPr>
-              <a:spcAft>
-                <a:spcPts val="1200"/>
-              </a:spcAft>
-              <a:defRPr sz="2000"/>
-            </a:pPr>
-          </a:p>
-          <a:p>
-            <a:pPr>
-              <a:spcAft>
-                <a:spcPts val="1200"/>
+              <a:lnSpc>
+                <a:spcPct val="90000"/>
+              </a:lnSpc>
+              <a:spcAft>
+                <a:spcPts val="300"/>
+              </a:spcAft>
+              <a:defRPr sz="2000"/>
+            </a:pPr>
+          </a:p>
+          <a:p>
+            <a:pPr>
+              <a:lnSpc>
+                <a:spcPct val="90000"/>
+              </a:lnSpc>
+              <a:spcAft>
+                <a:spcPts val="300"/>
               </a:spcAft>
               <a:defRPr sz="2000" b="1"/>
             </a:pPr>
             <a:r>
-              <a:rPr sz="1400"/>
+              <a:rPr sz="1300"/>
               <a:t>📌 Nasıl Çalışır?</a:t>
             </a:r>
           </a:p>
           <a:p>
             <a:pPr lvl="1">
-              <a:spcAft>
-                <a:spcPts val="1200"/>
-              </a:spcAft>
-              <a:defRPr sz="1800"/>
-            </a:pPr>
-            <a:r>
-              <a:rPr sz="1400"/>
+              <a:lnSpc>
+                <a:spcPct val="90000"/>
+              </a:lnSpc>
+              <a:spcAft>
+                <a:spcPts val="300"/>
+              </a:spcAft>
+              <a:defRPr sz="1800"/>
+            </a:pPr>
+            <a:r>
+              <a:rPr sz="1300"/>
               <a:t>    • Milyonlarca fotoğraf ile eğitilir</a:t>
             </a:r>
           </a:p>
           <a:p>
             <a:pPr lvl="1">
-              <a:spcAft>
-                <a:spcPts val="1200"/>
-              </a:spcAft>
-              <a:defRPr sz="1800"/>
-            </a:pPr>
-            <a:r>
-              <a:rPr sz="1400"/>
+              <a:lnSpc>
+                <a:spcPct val="90000"/>
+              </a:lnSpc>
+              <a:spcAft>
+                <a:spcPts val="300"/>
+              </a:spcAft>
+              <a:defRPr sz="1800"/>
+            </a:pPr>
+            <a:r>
+              <a:rPr sz="1300"/>
               <a:t>    • Pikselleri analiz eder</a:t>
             </a:r>
           </a:p>
           <a:p>
             <a:pPr lvl="1">
-              <a:spcAft>
-                <a:spcPts val="1200"/>
-              </a:spcAft>
-              <a:defRPr sz="1800"/>
-            </a:pPr>
-            <a:r>
-              <a:rPr sz="1400"/>
+              <a:lnSpc>
+                <a:spcPct val="90000"/>
+              </a:lnSpc>
+              <a:spcAft>
+                <a:spcPts val="300"/>
+              </a:spcAft>
+              <a:defRPr sz="1800"/>
+            </a:pPr>
+            <a:r>
+              <a:rPr sz="1300"/>
               <a:t>    • Kalıpları bulur</a:t>
             </a:r>
           </a:p>
           <a:p>
             <a:pPr lvl="1">
-              <a:spcAft>
-                <a:spcPts val="1200"/>
-              </a:spcAft>
-              <a:defRPr sz="1800"/>
-            </a:pPr>
-            <a:r>
-              <a:rPr sz="1400"/>
+              <a:lnSpc>
+                <a:spcPct val="90000"/>
+              </a:lnSpc>
+              <a:spcAft>
+                <a:spcPts val="300"/>
+              </a:spcAft>
+              <a:defRPr sz="1800"/>
+            </a:pPr>
+            <a:r>
+              <a:rPr sz="1300"/>
               <a:t>    • Nesneyi tanır</a:t>
             </a:r>
           </a:p>
           <a:p>
             <a:pPr>
-              <a:spcAft>
-                <a:spcPts val="1200"/>
-              </a:spcAft>
-              <a:defRPr sz="2000"/>
-            </a:pPr>
-          </a:p>
-          <a:p>
-            <a:pPr>
-              <a:spcAft>
-                <a:spcPts val="1200"/>
+              <a:lnSpc>
+                <a:spcPct val="90000"/>
+              </a:lnSpc>
+              <a:spcAft>
+                <a:spcPts val="300"/>
+              </a:spcAft>
+              <a:defRPr sz="2000"/>
+            </a:pPr>
+          </a:p>
+          <a:p>
+            <a:pPr>
+              <a:lnSpc>
+                <a:spcPct val="90000"/>
+              </a:lnSpc>
+              <a:spcAft>
+                <a:spcPts val="300"/>
               </a:spcAft>
               <a:defRPr sz="2000" b="1"/>
             </a:pPr>
             <a:r>
-              <a:rPr sz="1400"/>
+              <a:rPr sz="1300"/>
               <a:t>💡 AI artık bazı şeyleri insandan daha iyi görüyor!</a:t>
             </a:r>
           </a:p>
@@ -11443,7 +12729,7 @@
         </p:nvSpPr>
         <p:spPr/>
         <p:txBody>
-          <a:bodyPr/>
+          <a:bodyPr wrap="square"/>
           <a:lstStyle/>
           <a:p>
             <a:pPr>
@@ -11497,320 +12783,416 @@
             <a:spAutoFit/>
           </a:bodyPr>
           <a:lstStyle/>
-          <a:p/>
-          <a:p>
-            <a:pPr>
-              <a:spcAft>
-                <a:spcPts val="1200"/>
-              </a:spcAft>
-              <a:defRPr sz="2000"/>
-            </a:pPr>
-            <a:r>
-              <a:rPr sz="1400"/>
+          <a:p>
+            <a:pPr>
+              <a:lnSpc>
+                <a:spcPct val="90000"/>
+              </a:lnSpc>
+              <a:spcAft>
+                <a:spcPts val="300"/>
+              </a:spcAft>
+            </a:pPr>
+          </a:p>
+          <a:p>
+            <a:pPr>
+              <a:lnSpc>
+                <a:spcPct val="90000"/>
+              </a:lnSpc>
+              <a:spcAft>
+                <a:spcPts val="300"/>
+              </a:spcAft>
+              <a:defRPr sz="2000"/>
+            </a:pPr>
+            <a:r>
+              <a:rPr sz="1300"/>
               <a:t>Öneri sistemi = Senin için kişiselleştirilmiş öneriler</a:t>
             </a:r>
           </a:p>
           <a:p>
             <a:pPr>
-              <a:spcAft>
-                <a:spcPts val="1200"/>
-              </a:spcAft>
-              <a:defRPr sz="2000"/>
-            </a:pPr>
-          </a:p>
-          <a:p>
-            <a:pPr>
-              <a:spcAft>
-                <a:spcPts val="1200"/>
+              <a:lnSpc>
+                <a:spcPct val="90000"/>
+              </a:lnSpc>
+              <a:spcAft>
+                <a:spcPts val="300"/>
+              </a:spcAft>
+              <a:defRPr sz="2000"/>
+            </a:pPr>
+          </a:p>
+          <a:p>
+            <a:pPr>
+              <a:lnSpc>
+                <a:spcPct val="90000"/>
+              </a:lnSpc>
+              <a:spcAft>
+                <a:spcPts val="300"/>
               </a:spcAft>
               <a:defRPr sz="2000" b="1"/>
             </a:pPr>
             <a:r>
-              <a:rPr sz="1400"/>
+              <a:rPr sz="1300"/>
               <a:t>✅ Nerede Kullanılıyor?</a:t>
             </a:r>
           </a:p>
           <a:p>
             <a:pPr>
-              <a:spcAft>
-                <a:spcPts val="1200"/>
-              </a:spcAft>
-              <a:defRPr sz="2000"/>
-            </a:pPr>
-          </a:p>
-          <a:p>
-            <a:pPr>
-              <a:spcAft>
-                <a:spcPts val="1200"/>
-              </a:spcAft>
-              <a:defRPr sz="2000"/>
-            </a:pPr>
-            <a:r>
-              <a:rPr sz="1400"/>
+              <a:lnSpc>
+                <a:spcPct val="90000"/>
+              </a:lnSpc>
+              <a:spcAft>
+                <a:spcPts val="300"/>
+              </a:spcAft>
+              <a:defRPr sz="2000"/>
+            </a:pPr>
+          </a:p>
+          <a:p>
+            <a:pPr>
+              <a:lnSpc>
+                <a:spcPct val="90000"/>
+              </a:lnSpc>
+              <a:spcAft>
+                <a:spcPts val="300"/>
+              </a:spcAft>
+              <a:defRPr sz="2000"/>
+            </a:pPr>
+            <a:r>
+              <a:rPr sz="1300"/>
               <a:t>📺 YouTube:</a:t>
             </a:r>
           </a:p>
           <a:p>
             <a:pPr lvl="1">
-              <a:spcAft>
-                <a:spcPts val="1200"/>
-              </a:spcAft>
-              <a:defRPr sz="1800"/>
-            </a:pPr>
-            <a:r>
-              <a:rPr sz="1400"/>
+              <a:lnSpc>
+                <a:spcPct val="90000"/>
+              </a:lnSpc>
+              <a:spcAft>
+                <a:spcPts val="300"/>
+              </a:spcAft>
+              <a:defRPr sz="1800"/>
+            </a:pPr>
+            <a:r>
+              <a:rPr sz="1300"/>
               <a:t>    • 'Sana özel videolar'</a:t>
             </a:r>
           </a:p>
           <a:p>
             <a:pPr lvl="1">
-              <a:spcAft>
-                <a:spcPts val="1200"/>
-              </a:spcAft>
-              <a:defRPr sz="1800"/>
-            </a:pPr>
-            <a:r>
-              <a:rPr sz="1400"/>
+              <a:lnSpc>
+                <a:spcPct val="90000"/>
+              </a:lnSpc>
+              <a:spcAft>
+                <a:spcPts val="300"/>
+              </a:spcAft>
+              <a:defRPr sz="1800"/>
+            </a:pPr>
+            <a:r>
+              <a:rPr sz="1300"/>
               <a:t>    • İzlediklerine göre öneri</a:t>
             </a:r>
           </a:p>
           <a:p>
             <a:pPr>
-              <a:spcAft>
-                <a:spcPts val="1200"/>
-              </a:spcAft>
-              <a:defRPr sz="2000"/>
-            </a:pPr>
-          </a:p>
-          <a:p>
-            <a:pPr>
-              <a:spcAft>
-                <a:spcPts val="1200"/>
-              </a:spcAft>
-              <a:defRPr sz="2000"/>
-            </a:pPr>
-            <a:r>
-              <a:rPr sz="1400"/>
+              <a:lnSpc>
+                <a:spcPct val="90000"/>
+              </a:lnSpc>
+              <a:spcAft>
+                <a:spcPts val="300"/>
+              </a:spcAft>
+              <a:defRPr sz="2000"/>
+            </a:pPr>
+          </a:p>
+          <a:p>
+            <a:pPr>
+              <a:lnSpc>
+                <a:spcPct val="90000"/>
+              </a:lnSpc>
+              <a:spcAft>
+                <a:spcPts val="300"/>
+              </a:spcAft>
+              <a:defRPr sz="2000"/>
+            </a:pPr>
+            <a:r>
+              <a:rPr sz="1300"/>
               <a:t>🎵 Spotify:</a:t>
             </a:r>
           </a:p>
           <a:p>
             <a:pPr lvl="1">
-              <a:spcAft>
-                <a:spcPts val="1200"/>
-              </a:spcAft>
-              <a:defRPr sz="1800"/>
-            </a:pPr>
-            <a:r>
-              <a:rPr sz="1400"/>
+              <a:lnSpc>
+                <a:spcPct val="90000"/>
+              </a:lnSpc>
+              <a:spcAft>
+                <a:spcPts val="300"/>
+              </a:spcAft>
+              <a:defRPr sz="1800"/>
+            </a:pPr>
+            <a:r>
+              <a:rPr sz="1300"/>
               <a:t>    • 'Keşfet' çalma listesi</a:t>
             </a:r>
           </a:p>
           <a:p>
             <a:pPr lvl="1">
-              <a:spcAft>
-                <a:spcPts val="1200"/>
-              </a:spcAft>
-              <a:defRPr sz="1800"/>
-            </a:pPr>
-            <a:r>
-              <a:rPr sz="1400"/>
+              <a:lnSpc>
+                <a:spcPct val="90000"/>
+              </a:lnSpc>
+              <a:spcAft>
+                <a:spcPts val="300"/>
+              </a:spcAft>
+              <a:defRPr sz="1800"/>
+            </a:pPr>
+            <a:r>
+              <a:rPr sz="1300"/>
               <a:t>    • Dinlediğin müziğe benzer şarkılar</a:t>
             </a:r>
           </a:p>
           <a:p>
             <a:pPr>
-              <a:spcAft>
-                <a:spcPts val="1200"/>
-              </a:spcAft>
-              <a:defRPr sz="2000"/>
-            </a:pPr>
-          </a:p>
-          <a:p>
-            <a:pPr>
-              <a:spcAft>
-                <a:spcPts val="1200"/>
-              </a:spcAft>
-              <a:defRPr sz="2000"/>
-            </a:pPr>
-            <a:r>
-              <a:rPr sz="1400"/>
+              <a:lnSpc>
+                <a:spcPct val="90000"/>
+              </a:lnSpc>
+              <a:spcAft>
+                <a:spcPts val="300"/>
+              </a:spcAft>
+              <a:defRPr sz="2000"/>
+            </a:pPr>
+          </a:p>
+          <a:p>
+            <a:pPr>
+              <a:lnSpc>
+                <a:spcPct val="90000"/>
+              </a:lnSpc>
+              <a:spcAft>
+                <a:spcPts val="300"/>
+              </a:spcAft>
+              <a:defRPr sz="2000"/>
+            </a:pPr>
+            <a:r>
+              <a:rPr sz="1300"/>
               <a:t>🛒 Amazon/Trendyol:</a:t>
             </a:r>
           </a:p>
           <a:p>
             <a:pPr lvl="1">
-              <a:spcAft>
-                <a:spcPts val="1200"/>
-              </a:spcAft>
-              <a:defRPr sz="1800"/>
-            </a:pPr>
-            <a:r>
-              <a:rPr sz="1400"/>
+              <a:lnSpc>
+                <a:spcPct val="90000"/>
+              </a:lnSpc>
+              <a:spcAft>
+                <a:spcPts val="300"/>
+              </a:spcAft>
+              <a:defRPr sz="1800"/>
+            </a:pPr>
+            <a:r>
+              <a:rPr sz="1300"/>
               <a:t>    • 'Bunları da beğenebilirsin'</a:t>
             </a:r>
           </a:p>
           <a:p>
             <a:pPr>
-              <a:spcAft>
-                <a:spcPts val="1200"/>
-              </a:spcAft>
-              <a:defRPr sz="2000"/>
-            </a:pPr>
-          </a:p>
-          <a:p>
-            <a:pPr>
-              <a:spcAft>
-                <a:spcPts val="1200"/>
-              </a:spcAft>
-              <a:defRPr sz="2000"/>
-            </a:pPr>
-            <a:r>
-              <a:rPr sz="1400"/>
+              <a:lnSpc>
+                <a:spcPct val="90000"/>
+              </a:lnSpc>
+              <a:spcAft>
+                <a:spcPts val="300"/>
+              </a:spcAft>
+              <a:defRPr sz="2000"/>
+            </a:pPr>
+          </a:p>
+          <a:p>
+            <a:pPr>
+              <a:lnSpc>
+                <a:spcPct val="90000"/>
+              </a:lnSpc>
+              <a:spcAft>
+                <a:spcPts val="300"/>
+              </a:spcAft>
+              <a:defRPr sz="2000"/>
+            </a:pPr>
+            <a:r>
+              <a:rPr sz="1300"/>
               <a:t>🎮 Netflix:</a:t>
             </a:r>
           </a:p>
           <a:p>
             <a:pPr lvl="1">
-              <a:spcAft>
-                <a:spcPts val="1200"/>
-              </a:spcAft>
-              <a:defRPr sz="1800"/>
-            </a:pPr>
-            <a:r>
-              <a:rPr sz="1400"/>
+              <a:lnSpc>
+                <a:spcPct val="90000"/>
+              </a:lnSpc>
+              <a:spcAft>
+                <a:spcPts val="300"/>
+              </a:spcAft>
+              <a:defRPr sz="1800"/>
+            </a:pPr>
+            <a:r>
+              <a:rPr sz="1300"/>
               <a:t>    • Film/dizi önerileri</a:t>
             </a:r>
           </a:p>
           <a:p>
             <a:pPr>
-              <a:spcAft>
-                <a:spcPts val="1200"/>
-              </a:spcAft>
-              <a:defRPr sz="2000"/>
-            </a:pPr>
-          </a:p>
-          <a:p>
-            <a:pPr>
-              <a:spcAft>
-                <a:spcPts val="1200"/>
-              </a:spcAft>
-              <a:defRPr sz="2000"/>
-            </a:pPr>
-            <a:r>
-              <a:rPr sz="1400"/>
+              <a:lnSpc>
+                <a:spcPct val="90000"/>
+              </a:lnSpc>
+              <a:spcAft>
+                <a:spcPts val="300"/>
+              </a:spcAft>
+              <a:defRPr sz="2000"/>
+            </a:pPr>
+          </a:p>
+          <a:p>
+            <a:pPr>
+              <a:lnSpc>
+                <a:spcPct val="90000"/>
+              </a:lnSpc>
+              <a:spcAft>
+                <a:spcPts val="300"/>
+              </a:spcAft>
+              <a:defRPr sz="2000"/>
+            </a:pPr>
+            <a:r>
+              <a:rPr sz="1300"/>
               <a:t>📱 Instagram/TikTok:</a:t>
             </a:r>
           </a:p>
           <a:p>
             <a:pPr lvl="1">
-              <a:spcAft>
-                <a:spcPts val="1200"/>
-              </a:spcAft>
-              <a:defRPr sz="1800"/>
-            </a:pPr>
-            <a:r>
-              <a:rPr sz="1400"/>
+              <a:lnSpc>
+                <a:spcPct val="90000"/>
+              </a:lnSpc>
+              <a:spcAft>
+                <a:spcPts val="300"/>
+              </a:spcAft>
+              <a:defRPr sz="1800"/>
+            </a:pPr>
+            <a:r>
+              <a:rPr sz="1300"/>
               <a:t>    • 'Keşfet' sayfası</a:t>
             </a:r>
           </a:p>
           <a:p>
             <a:pPr>
-              <a:spcAft>
-                <a:spcPts val="1200"/>
-              </a:spcAft>
-              <a:defRPr sz="2000"/>
-            </a:pPr>
-          </a:p>
-          <a:p>
-            <a:pPr>
-              <a:spcAft>
-                <a:spcPts val="1200"/>
-              </a:spcAft>
-              <a:defRPr sz="2000"/>
-            </a:pPr>
-            <a:r>
-              <a:rPr sz="1400"/>
+              <a:lnSpc>
+                <a:spcPct val="90000"/>
+              </a:lnSpc>
+              <a:spcAft>
+                <a:spcPts val="300"/>
+              </a:spcAft>
+              <a:defRPr sz="2000"/>
+            </a:pPr>
+          </a:p>
+          <a:p>
+            <a:pPr>
+              <a:lnSpc>
+                <a:spcPct val="90000"/>
+              </a:lnSpc>
+              <a:spcAft>
+                <a:spcPts val="300"/>
+              </a:spcAft>
+              <a:defRPr sz="2000"/>
+            </a:pPr>
+            <a:r>
+              <a:rPr sz="1300"/>
               <a:t>⚙️ Nasıl Çalışır?</a:t>
             </a:r>
           </a:p>
           <a:p>
             <a:pPr lvl="1">
-              <a:spcAft>
-                <a:spcPts val="1200"/>
-              </a:spcAft>
-              <a:defRPr sz="1800"/>
-            </a:pPr>
-            <a:r>
-              <a:rPr sz="1400"/>
+              <a:lnSpc>
+                <a:spcPct val="90000"/>
+              </a:lnSpc>
+              <a:spcAft>
+                <a:spcPts val="300"/>
+              </a:spcAft>
+              <a:defRPr sz="1800"/>
+            </a:pPr>
+            <a:r>
+              <a:rPr sz="1300"/>
               <a:t>    • İzlediklerini, beğendiklerini kaydeder</a:t>
             </a:r>
           </a:p>
           <a:p>
             <a:pPr lvl="1">
-              <a:spcAft>
-                <a:spcPts val="1200"/>
-              </a:spcAft>
-              <a:defRPr sz="1800"/>
-            </a:pPr>
-            <a:r>
-              <a:rPr sz="1400"/>
+              <a:lnSpc>
+                <a:spcPct val="90000"/>
+              </a:lnSpc>
+              <a:spcAft>
+                <a:spcPts val="300"/>
+              </a:spcAft>
+              <a:defRPr sz="1800"/>
+            </a:pPr>
+            <a:r>
+              <a:rPr sz="1300"/>
               <a:t>    • Benzer kullanıcıları bulur</a:t>
             </a:r>
           </a:p>
           <a:p>
             <a:pPr lvl="1">
-              <a:spcAft>
-                <a:spcPts val="1200"/>
-              </a:spcAft>
-              <a:defRPr sz="1800"/>
-            </a:pPr>
-            <a:r>
-              <a:rPr sz="1400"/>
+              <a:lnSpc>
+                <a:spcPct val="90000"/>
+              </a:lnSpc>
+              <a:spcAft>
+                <a:spcPts val="300"/>
+              </a:spcAft>
+              <a:defRPr sz="1800"/>
+            </a:pPr>
+            <a:r>
+              <a:rPr sz="1300"/>
               <a:t>    • Onların beğendiklerini sana önerir</a:t>
             </a:r>
           </a:p>
           <a:p>
             <a:pPr>
-              <a:spcAft>
-                <a:spcPts val="1200"/>
-              </a:spcAft>
-              <a:defRPr sz="2000"/>
-            </a:pPr>
-          </a:p>
-          <a:p>
-            <a:pPr>
-              <a:spcAft>
-                <a:spcPts val="1200"/>
+              <a:lnSpc>
+                <a:spcPct val="90000"/>
+              </a:lnSpc>
+              <a:spcAft>
+                <a:spcPts val="300"/>
+              </a:spcAft>
+              <a:defRPr sz="2000"/>
+            </a:pPr>
+          </a:p>
+          <a:p>
+            <a:pPr>
+              <a:lnSpc>
+                <a:spcPct val="90000"/>
+              </a:lnSpc>
+              <a:spcAft>
+                <a:spcPts val="300"/>
               </a:spcAft>
               <a:defRPr sz="2000" b="1"/>
             </a:pPr>
             <a:r>
-              <a:rPr sz="1400"/>
+              <a:rPr sz="1300"/>
               <a:t>💡 Hem yararlı hem tehlikeli:</a:t>
             </a:r>
           </a:p>
           <a:p>
             <a:pPr>
-              <a:spcAft>
-                <a:spcPts val="1200"/>
+              <a:lnSpc>
+                <a:spcPct val="90000"/>
+              </a:lnSpc>
+              <a:spcAft>
+                <a:spcPts val="300"/>
               </a:spcAft>
               <a:defRPr sz="2000" b="1"/>
             </a:pPr>
             <a:r>
-              <a:rPr sz="1400"/>
+              <a:rPr sz="1300"/>
               <a:t>✅ İstediğin içeriği bulursun</a:t>
             </a:r>
           </a:p>
           <a:p>
             <a:pPr>
-              <a:spcAft>
-                <a:spcPts val="1200"/>
-              </a:spcAft>
-              <a:defRPr sz="2000"/>
-            </a:pPr>
-            <a:r>
-              <a:rPr sz="1400"/>
+              <a:lnSpc>
+                <a:spcPct val="90000"/>
+              </a:lnSpc>
+              <a:spcAft>
+                <a:spcPts val="300"/>
+              </a:spcAft>
+              <a:defRPr sz="2000"/>
+            </a:pPr>
+            <a:r>
+              <a:rPr sz="1300"/>
               <a:t>❌ 'Filtre balonu' - Sadece benzer şeyler görürsün</a:t>
             </a:r>
           </a:p>
